--- a/presentation/Weeding-Chapter.pptx
+++ b/presentation/Weeding-Chapter.pptx
@@ -3155,6 +3155,122 @@
           </a:prstGeom>
         </p:spPr>
       </p:pic>
+      <p:pic>
+        <p:nvPicPr>
+          <p:cNvPr id="4" name="Picture 3">
+            <a:extLst>
+              <a:ext uri="{FF2B5EF4-FFF2-40B4-BE49-F238E27FC236}">
+                <a16:creationId xmlns:a16="http://schemas.microsoft.com/office/drawing/2014/main" id="{6D41C679-5F93-BA48-6F3A-730B14638950}"/>
+              </a:ext>
+            </a:extLst>
+          </p:cNvPr>
+          <p:cNvPicPr>
+            <a:picLocks noChangeAspect="1"/>
+          </p:cNvPicPr>
+          <p:nvPr/>
+        </p:nvPicPr>
+        <p:blipFill>
+          <a:blip r:embed="rId3"/>
+          <a:stretch>
+            <a:fillRect/>
+          </a:stretch>
+        </p:blipFill>
+        <p:spPr>
+          <a:xfrm>
+            <a:off x="4299095" y="5702712"/>
+            <a:ext cx="3488054" cy="648926"/>
+          </a:xfrm>
+          <a:prstGeom prst="rect">
+            <a:avLst/>
+          </a:prstGeom>
+        </p:spPr>
+      </p:pic>
+      <p:sp>
+        <p:nvSpPr>
+          <p:cNvPr id="5" name="Rectangle: Rounded Corners 4">
+            <a:extLst>
+              <a:ext uri="{FF2B5EF4-FFF2-40B4-BE49-F238E27FC236}">
+                <a16:creationId xmlns:a16="http://schemas.microsoft.com/office/drawing/2014/main" id="{7E518577-A490-AC1A-7B6F-264A83A9952C}"/>
+              </a:ext>
+            </a:extLst>
+          </p:cNvPr>
+          <p:cNvSpPr/>
+          <p:nvPr/>
+        </p:nvSpPr>
+        <p:spPr>
+          <a:xfrm>
+            <a:off x="3338050" y="4414687"/>
+            <a:ext cx="5515897" cy="1258529"/>
+          </a:xfrm>
+          <a:prstGeom prst="roundRect">
+            <a:avLst/>
+          </a:prstGeom>
+          <a:solidFill>
+            <a:srgbClr val="FDF8F3"/>
+          </a:solidFill>
+          <a:ln>
+            <a:solidFill>
+              <a:srgbClr val="FDF8F3"/>
+            </a:solidFill>
+          </a:ln>
+        </p:spPr>
+        <p:style>
+          <a:lnRef idx="1">
+            <a:schemeClr val="accent1"/>
+          </a:lnRef>
+          <a:fillRef idx="3">
+            <a:schemeClr val="accent1"/>
+          </a:fillRef>
+          <a:effectRef idx="2">
+            <a:schemeClr val="accent1"/>
+          </a:effectRef>
+          <a:fontRef idx="minor">
+            <a:schemeClr val="lt1"/>
+          </a:fontRef>
+        </p:style>
+        <p:txBody>
+          <a:bodyPr rtlCol="0" anchor="ctr"/>
+          <a:lstStyle/>
+          <a:p>
+            <a:pPr algn="ctr"/>
+            <a:r>
+              <a:rPr lang="en-US" dirty="0">
+                <a:solidFill>
+                  <a:schemeClr val="tx1"/>
+                </a:solidFill>
+              </a:rPr>
+              <a:t>Debmalya Bhattacharyya - 31442723020</a:t>
+            </a:r>
+          </a:p>
+          <a:p>
+            <a:pPr algn="ctr"/>
+            <a:r>
+              <a:rPr lang="en-US" dirty="0">
+                <a:solidFill>
+                  <a:schemeClr val="tx1"/>
+                </a:solidFill>
+              </a:rPr>
+              <a:t>Rumpi Saha - 31442723056</a:t>
+            </a:r>
+          </a:p>
+          <a:p>
+            <a:pPr algn="ctr"/>
+            <a:r>
+              <a:rPr lang="en-US" dirty="0">
+                <a:solidFill>
+                  <a:schemeClr val="tx1"/>
+                </a:solidFill>
+              </a:rPr>
+              <a:t>Sagnik Saha - 31442723059</a:t>
+            </a:r>
+            <a:endParaRPr lang="en-IN" dirty="0">
+              <a:solidFill>
+                <a:schemeClr val="tx1"/>
+              </a:solidFill>
+            </a:endParaRPr>
+          </a:p>
+        </p:txBody>
+      </p:sp>
     </p:spTree>
   </p:cSld>
   <p:clrMapOvr>
@@ -4952,7 +5068,7 @@
         <p:spPr>
           <a:xfrm>
             <a:off x="0" y="-1"/>
-            <a:ext cx="12191999" cy="6777789"/>
+            <a:ext cx="12191999" cy="6858001"/>
           </a:xfrm>
           <a:prstGeom prst="rect">
             <a:avLst/>

--- a/presentation/Weeding-Chapter.pptx
+++ b/presentation/Weeding-Chapter.pptx
@@ -4763,7 +4763,7 @@
       <p:sp>
         <p:nvSpPr>
           <p:cNvPr id="21" name="Rectangle 20">
-            <a:hlinkClick r:id="rId3"/>
+            <a:hlinkClick r:id="rId12"/>
             <a:extLst>
               <a:ext uri="{FF2B5EF4-FFF2-40B4-BE49-F238E27FC236}">
                 <a16:creationId xmlns:a16="http://schemas.microsoft.com/office/drawing/2014/main" id="{1A568B80-B418-F0D1-081B-0C982FEDF3F6}"/>
@@ -4833,7 +4833,7 @@
                 <a:latin typeface="Aptos" panose="020B0004020202020204" pitchFamily="34" charset="0"/>
                 <a:ea typeface="Cambria Math" panose="02040503050406030204" pitchFamily="18" charset="0"/>
               </a:rPr>
-              <a:t>Live Demo </a:t>
+              <a:t>Execution Video </a:t>
             </a:r>
             <a:r>
               <a:rPr lang="en-IN" b="1" dirty="0">
@@ -4843,7 +4843,7 @@
                 <a:latin typeface="Cambria Math" panose="02040503050406030204" pitchFamily="18" charset="0"/>
                 <a:ea typeface="Cambria Math" panose="02040503050406030204" pitchFamily="18" charset="0"/>
               </a:rPr>
-              <a:t>: https://weeding-chapter.vercel.app</a:t>
+              <a:t>: Video-link</a:t>
             </a:r>
           </a:p>
         </p:txBody>
@@ -4851,7 +4851,7 @@
       <p:sp>
         <p:nvSpPr>
           <p:cNvPr id="23" name="Rectangle 22">
-            <a:hlinkClick r:id="rId12"/>
+            <a:hlinkClick r:id="rId13"/>
             <a:extLst>
               <a:ext uri="{FF2B5EF4-FFF2-40B4-BE49-F238E27FC236}">
                 <a16:creationId xmlns:a16="http://schemas.microsoft.com/office/drawing/2014/main" id="{B41CF31D-11B5-8A8E-9987-08652DA74E1E}"/>
@@ -4914,7 +4914,7 @@
           <p:nvPr/>
         </p:nvPicPr>
         <p:blipFill>
-          <a:blip r:embed="rId13"/>
+          <a:blip r:embed="rId14"/>
           <a:stretch>
             <a:fillRect/>
           </a:stretch>
@@ -4932,7 +4932,7 @@
       <p:sp>
         <p:nvSpPr>
           <p:cNvPr id="26" name="Rectangle 25">
-            <a:hlinkClick r:id="rId14"/>
+            <a:hlinkClick r:id="rId15"/>
             <a:extLst>
               <a:ext uri="{FF2B5EF4-FFF2-40B4-BE49-F238E27FC236}">
                 <a16:creationId xmlns:a16="http://schemas.microsoft.com/office/drawing/2014/main" id="{C4DC9C7A-9CA1-7802-1C42-0F9EDE2672F3}"/>

--- a/presentation/Weeding-Chapter.pptx
+++ b/presentation/Weeding-Chapter.pptx
@@ -15,7 +15,12 @@
     <p:sldId id="263" r:id="rId9"/>
     <p:sldId id="264" r:id="rId10"/>
     <p:sldId id="265" r:id="rId11"/>
-    <p:sldId id="266" r:id="rId12"/>
+    <p:sldId id="267" r:id="rId12"/>
+    <p:sldId id="268" r:id="rId13"/>
+    <p:sldId id="269" r:id="rId14"/>
+    <p:sldId id="270" r:id="rId15"/>
+    <p:sldId id="271" r:id="rId16"/>
+    <p:sldId id="266" r:id="rId17"/>
   </p:sldIdLst>
   <p:sldSz cx="12192000" cy="6858000"/>
   <p:notesSz cx="6858000" cy="9144000"/>
@@ -344,7 +349,7 @@
           <a:p>
             <a:fld id="{5BCAD085-E8A6-8845-BD4E-CB4CCA059FC4}" type="datetimeFigureOut">
               <a:rPr lang="en-US" smtClean="0"/>
-              <a:t>4/4/2026</a:t>
+              <a:t>4/19/2026</a:t>
             </a:fld>
             <a:endParaRPr lang="en-US"/>
           </a:p>
@@ -512,7 +517,7 @@
           <a:p>
             <a:fld id="{5BCAD085-E8A6-8845-BD4E-CB4CCA059FC4}" type="datetimeFigureOut">
               <a:rPr lang="en-US" smtClean="0"/>
-              <a:t>4/4/2026</a:t>
+              <a:t>4/19/2026</a:t>
             </a:fld>
             <a:endParaRPr lang="en-US"/>
           </a:p>
@@ -690,7 +695,7 @@
           <a:p>
             <a:fld id="{5BCAD085-E8A6-8845-BD4E-CB4CCA059FC4}" type="datetimeFigureOut">
               <a:rPr lang="en-US" smtClean="0"/>
-              <a:t>4/4/2026</a:t>
+              <a:t>4/19/2026</a:t>
             </a:fld>
             <a:endParaRPr lang="en-US"/>
           </a:p>
@@ -858,7 +863,7 @@
           <a:p>
             <a:fld id="{5BCAD085-E8A6-8845-BD4E-CB4CCA059FC4}" type="datetimeFigureOut">
               <a:rPr lang="en-US" smtClean="0"/>
-              <a:t>4/4/2026</a:t>
+              <a:t>4/19/2026</a:t>
             </a:fld>
             <a:endParaRPr lang="en-US"/>
           </a:p>
@@ -1103,7 +1108,7 @@
           <a:p>
             <a:fld id="{5BCAD085-E8A6-8845-BD4E-CB4CCA059FC4}" type="datetimeFigureOut">
               <a:rPr lang="en-US" smtClean="0"/>
-              <a:t>4/4/2026</a:t>
+              <a:t>4/19/2026</a:t>
             </a:fld>
             <a:endParaRPr lang="en-US"/>
           </a:p>
@@ -1388,7 +1393,7 @@
           <a:p>
             <a:fld id="{5BCAD085-E8A6-8845-BD4E-CB4CCA059FC4}" type="datetimeFigureOut">
               <a:rPr lang="en-US" smtClean="0"/>
-              <a:t>4/4/2026</a:t>
+              <a:t>4/19/2026</a:t>
             </a:fld>
             <a:endParaRPr lang="en-US"/>
           </a:p>
@@ -1807,7 +1812,7 @@
           <a:p>
             <a:fld id="{5BCAD085-E8A6-8845-BD4E-CB4CCA059FC4}" type="datetimeFigureOut">
               <a:rPr lang="en-US" smtClean="0"/>
-              <a:t>4/4/2026</a:t>
+              <a:t>4/19/2026</a:t>
             </a:fld>
             <a:endParaRPr lang="en-US"/>
           </a:p>
@@ -1924,7 +1929,7 @@
           <a:p>
             <a:fld id="{5BCAD085-E8A6-8845-BD4E-CB4CCA059FC4}" type="datetimeFigureOut">
               <a:rPr lang="en-US" smtClean="0"/>
-              <a:t>4/4/2026</a:t>
+              <a:t>4/19/2026</a:t>
             </a:fld>
             <a:endParaRPr lang="en-US"/>
           </a:p>
@@ -2019,7 +2024,7 @@
           <a:p>
             <a:fld id="{5BCAD085-E8A6-8845-BD4E-CB4CCA059FC4}" type="datetimeFigureOut">
               <a:rPr lang="en-US" smtClean="0"/>
-              <a:t>4/4/2026</a:t>
+              <a:t>4/19/2026</a:t>
             </a:fld>
             <a:endParaRPr lang="en-US"/>
           </a:p>
@@ -2294,7 +2299,7 @@
           <a:p>
             <a:fld id="{5BCAD085-E8A6-8845-BD4E-CB4CCA059FC4}" type="datetimeFigureOut">
               <a:rPr lang="en-US" smtClean="0"/>
-              <a:t>4/4/2026</a:t>
+              <a:t>4/19/2026</a:t>
             </a:fld>
             <a:endParaRPr lang="en-US"/>
           </a:p>
@@ -2546,7 +2551,7 @@
           <a:p>
             <a:fld id="{5BCAD085-E8A6-8845-BD4E-CB4CCA059FC4}" type="datetimeFigureOut">
               <a:rPr lang="en-US" smtClean="0"/>
-              <a:t>4/4/2026</a:t>
+              <a:t>4/19/2026</a:t>
             </a:fld>
             <a:endParaRPr lang="en-US"/>
           </a:p>
@@ -2757,7 +2762,7 @@
           <a:p>
             <a:fld id="{5BCAD085-E8A6-8845-BD4E-CB4CCA059FC4}" type="datetimeFigureOut">
               <a:rPr lang="en-US" smtClean="0"/>
-              <a:t>4/4/2026</a:t>
+              <a:t>4/19/2026</a:t>
             </a:fld>
             <a:endParaRPr lang="en-US"/>
           </a:p>
@@ -3346,6 +3351,8195 @@
       </p:grpSpPr>
       <p:sp>
         <p:nvSpPr>
+          <p:cNvPr id="2" name="Rectangle 1"/>
+          <p:cNvSpPr/>
+          <p:nvPr/>
+        </p:nvSpPr>
+        <p:spPr>
+          <a:xfrm>
+            <a:off x="0" y="0"/>
+            <a:ext cx="12191695" cy="6858000"/>
+          </a:xfrm>
+          <a:prstGeom prst="rect">
+            <a:avLst/>
+          </a:prstGeom>
+          <a:solidFill>
+            <a:srgbClr val="FDF8F3"/>
+          </a:solidFill>
+          <a:ln>
+            <a:noFill/>
+          </a:ln>
+        </p:spPr>
+        <p:style>
+          <a:lnRef idx="1">
+            <a:schemeClr val="accent1"/>
+          </a:lnRef>
+          <a:fillRef idx="3">
+            <a:schemeClr val="accent1"/>
+          </a:fillRef>
+          <a:effectRef idx="2">
+            <a:schemeClr val="accent1"/>
+          </a:effectRef>
+          <a:fontRef idx="minor">
+            <a:schemeClr val="lt1"/>
+          </a:fontRef>
+        </p:style>
+        <p:txBody>
+          <a:bodyPr rtlCol="0" anchor="ctr"/>
+          <a:lstStyle/>
+          <a:p>
+            <a:pPr algn="ctr"/>
+            <a:endParaRPr/>
+          </a:p>
+        </p:txBody>
+      </p:sp>
+      <p:sp>
+        <p:nvSpPr>
+          <p:cNvPr id="3" name="Rectangle 2"/>
+          <p:cNvSpPr/>
+          <p:nvPr/>
+        </p:nvSpPr>
+        <p:spPr>
+          <a:xfrm>
+            <a:off x="0" y="0"/>
+            <a:ext cx="12191695" cy="1097280"/>
+          </a:xfrm>
+          <a:prstGeom prst="rect">
+            <a:avLst/>
+          </a:prstGeom>
+          <a:solidFill>
+            <a:srgbClr val="F5ECDD"/>
+          </a:solidFill>
+          <a:ln>
+            <a:noFill/>
+          </a:ln>
+        </p:spPr>
+        <p:style>
+          <a:lnRef idx="1">
+            <a:schemeClr val="accent1"/>
+          </a:lnRef>
+          <a:fillRef idx="3">
+            <a:schemeClr val="accent1"/>
+          </a:fillRef>
+          <a:effectRef idx="2">
+            <a:schemeClr val="accent1"/>
+          </a:effectRef>
+          <a:fontRef idx="minor">
+            <a:schemeClr val="lt1"/>
+          </a:fontRef>
+        </p:style>
+        <p:txBody>
+          <a:bodyPr rtlCol="0" anchor="ctr"/>
+          <a:lstStyle/>
+          <a:p>
+            <a:pPr algn="ctr"/>
+            <a:endParaRPr/>
+          </a:p>
+        </p:txBody>
+      </p:sp>
+      <p:sp>
+        <p:nvSpPr>
+          <p:cNvPr id="4" name="TextBox 3"/>
+          <p:cNvSpPr txBox="1"/>
+          <p:nvPr/>
+        </p:nvSpPr>
+        <p:spPr>
+          <a:xfrm>
+            <a:off x="548640" y="228600"/>
+            <a:ext cx="10972800" cy="731520"/>
+          </a:xfrm>
+          <a:prstGeom prst="rect">
+            <a:avLst/>
+          </a:prstGeom>
+          <a:noFill/>
+        </p:spPr>
+        <p:txBody>
+          <a:bodyPr wrap="square" anchor="ctr">
+            <a:spAutoFit/>
+          </a:bodyPr>
+          <a:lstStyle/>
+          <a:p>
+            <a:pPr algn="l"/>
+            <a:r>
+              <a:rPr sz="3400" b="1" i="0">
+                <a:solidFill>
+                  <a:srgbClr val="4A3728"/>
+                </a:solidFill>
+                <a:latin typeface="Liberation Serif"/>
+              </a:rPr>
+              <a:t>Database Schema &amp; Data Models</a:t>
+            </a:r>
+          </a:p>
+        </p:txBody>
+      </p:sp>
+      <p:sp>
+        <p:nvSpPr>
+          <p:cNvPr id="5" name="Rectangle 4"/>
+          <p:cNvSpPr/>
+          <p:nvPr/>
+        </p:nvSpPr>
+        <p:spPr>
+          <a:xfrm>
+            <a:off x="566928" y="932688"/>
+            <a:ext cx="2011680" cy="38100"/>
+          </a:xfrm>
+          <a:prstGeom prst="rect">
+            <a:avLst/>
+          </a:prstGeom>
+          <a:solidFill>
+            <a:srgbClr val="C9A96E"/>
+          </a:solidFill>
+          <a:ln>
+            <a:noFill/>
+          </a:ln>
+        </p:spPr>
+        <p:style>
+          <a:lnRef idx="1">
+            <a:schemeClr val="accent1"/>
+          </a:lnRef>
+          <a:fillRef idx="3">
+            <a:schemeClr val="accent1"/>
+          </a:fillRef>
+          <a:effectRef idx="2">
+            <a:schemeClr val="accent1"/>
+          </a:effectRef>
+          <a:fontRef idx="minor">
+            <a:schemeClr val="lt1"/>
+          </a:fontRef>
+        </p:style>
+        <p:txBody>
+          <a:bodyPr rtlCol="0" anchor="ctr"/>
+          <a:lstStyle/>
+          <a:p>
+            <a:pPr algn="ctr"/>
+            <a:endParaRPr/>
+          </a:p>
+        </p:txBody>
+      </p:sp>
+      <p:sp>
+        <p:nvSpPr>
+          <p:cNvPr id="6" name="TextBox 5"/>
+          <p:cNvSpPr txBox="1"/>
+          <p:nvPr/>
+        </p:nvSpPr>
+        <p:spPr>
+          <a:xfrm>
+            <a:off x="548640" y="1234440"/>
+            <a:ext cx="11155680" cy="411480"/>
+          </a:xfrm>
+          <a:prstGeom prst="rect">
+            <a:avLst/>
+          </a:prstGeom>
+          <a:noFill/>
+        </p:spPr>
+        <p:txBody>
+          <a:bodyPr wrap="square" anchor="t">
+            <a:spAutoFit/>
+          </a:bodyPr>
+          <a:lstStyle/>
+          <a:p>
+            <a:pPr algn="l"/>
+            <a:r>
+              <a:rPr sz="1300" b="0" i="1">
+                <a:solidFill>
+                  <a:srgbClr val="8B6F47"/>
+                </a:solidFill>
+                <a:latin typeface="Calibri"/>
+              </a:rPr>
+              <a:t>11 Mongoose schemas power the MongoDB data layer, handling every aspect of wedding event planning with referential integrity.</a:t>
+            </a:r>
+          </a:p>
+        </p:txBody>
+      </p:sp>
+      <p:sp>
+        <p:nvSpPr>
+          <p:cNvPr id="7" name="TextBox 6"/>
+          <p:cNvSpPr txBox="1"/>
+          <p:nvPr/>
+        </p:nvSpPr>
+        <p:spPr>
+          <a:xfrm>
+            <a:off x="548640" y="1783080"/>
+            <a:ext cx="5303520" cy="365760"/>
+          </a:xfrm>
+          <a:prstGeom prst="rect">
+            <a:avLst/>
+          </a:prstGeom>
+          <a:noFill/>
+        </p:spPr>
+        <p:txBody>
+          <a:bodyPr wrap="square" anchor="b">
+            <a:spAutoFit/>
+          </a:bodyPr>
+          <a:lstStyle/>
+          <a:p>
+            <a:pPr algn="l"/>
+            <a:r>
+              <a:rPr sz="2000" b="0" i="0">
+                <a:solidFill>
+                  <a:srgbClr val="8B6F47"/>
+                </a:solidFill>
+                <a:latin typeface="Liberation Serif"/>
+              </a:rPr>
+              <a:t>Core Data Models</a:t>
+            </a:r>
+          </a:p>
+        </p:txBody>
+      </p:sp>
+      <p:sp>
+        <p:nvSpPr>
+          <p:cNvPr id="8" name="Rectangle 7"/>
+          <p:cNvSpPr/>
+          <p:nvPr/>
+        </p:nvSpPr>
+        <p:spPr>
+          <a:xfrm>
+            <a:off x="548640" y="2148840"/>
+            <a:ext cx="5303520" cy="9525"/>
+          </a:xfrm>
+          <a:prstGeom prst="rect">
+            <a:avLst/>
+          </a:prstGeom>
+          <a:solidFill>
+            <a:srgbClr val="C9A96E"/>
+          </a:solidFill>
+          <a:ln>
+            <a:noFill/>
+          </a:ln>
+        </p:spPr>
+        <p:style>
+          <a:lnRef idx="1">
+            <a:schemeClr val="accent1"/>
+          </a:lnRef>
+          <a:fillRef idx="3">
+            <a:schemeClr val="accent1"/>
+          </a:fillRef>
+          <a:effectRef idx="2">
+            <a:schemeClr val="accent1"/>
+          </a:effectRef>
+          <a:fontRef idx="minor">
+            <a:schemeClr val="lt1"/>
+          </a:fontRef>
+        </p:style>
+        <p:txBody>
+          <a:bodyPr rtlCol="0" anchor="ctr"/>
+          <a:lstStyle/>
+          <a:p>
+            <a:pPr algn="ctr"/>
+            <a:endParaRPr/>
+          </a:p>
+        </p:txBody>
+      </p:sp>
+      <p:sp>
+        <p:nvSpPr>
+          <p:cNvPr id="9" name="Rectangle 8"/>
+          <p:cNvSpPr/>
+          <p:nvPr/>
+        </p:nvSpPr>
+        <p:spPr>
+          <a:xfrm>
+            <a:off x="548640" y="2286000"/>
+            <a:ext cx="5303520" cy="502920"/>
+          </a:xfrm>
+          <a:prstGeom prst="rect">
+            <a:avLst/>
+          </a:prstGeom>
+          <a:solidFill>
+            <a:srgbClr val="FDFBF7"/>
+          </a:solidFill>
+          <a:ln w="9525">
+            <a:solidFill>
+              <a:srgbClr val="C9A96E"/>
+            </a:solidFill>
+          </a:ln>
+        </p:spPr>
+        <p:style>
+          <a:lnRef idx="1">
+            <a:schemeClr val="accent1"/>
+          </a:lnRef>
+          <a:fillRef idx="3">
+            <a:schemeClr val="accent1"/>
+          </a:fillRef>
+          <a:effectRef idx="2">
+            <a:schemeClr val="accent1"/>
+          </a:effectRef>
+          <a:fontRef idx="minor">
+            <a:schemeClr val="lt1"/>
+          </a:fontRef>
+        </p:style>
+        <p:txBody>
+          <a:bodyPr rtlCol="0" anchor="ctr"/>
+          <a:lstStyle/>
+          <a:p>
+            <a:pPr algn="ctr"/>
+            <a:endParaRPr/>
+          </a:p>
+        </p:txBody>
+      </p:sp>
+      <p:sp>
+        <p:nvSpPr>
+          <p:cNvPr id="10" name="Rectangle 9"/>
+          <p:cNvSpPr/>
+          <p:nvPr/>
+        </p:nvSpPr>
+        <p:spPr>
+          <a:xfrm>
+            <a:off x="548640" y="2286000"/>
+            <a:ext cx="64008" cy="502920"/>
+          </a:xfrm>
+          <a:prstGeom prst="rect">
+            <a:avLst/>
+          </a:prstGeom>
+          <a:solidFill>
+            <a:srgbClr val="C9A96E"/>
+          </a:solidFill>
+          <a:ln>
+            <a:noFill/>
+          </a:ln>
+        </p:spPr>
+        <p:style>
+          <a:lnRef idx="1">
+            <a:schemeClr val="accent1"/>
+          </a:lnRef>
+          <a:fillRef idx="3">
+            <a:schemeClr val="accent1"/>
+          </a:fillRef>
+          <a:effectRef idx="2">
+            <a:schemeClr val="accent1"/>
+          </a:effectRef>
+          <a:fontRef idx="minor">
+            <a:schemeClr val="lt1"/>
+          </a:fontRef>
+        </p:style>
+        <p:txBody>
+          <a:bodyPr rtlCol="0" anchor="ctr"/>
+          <a:lstStyle/>
+          <a:p>
+            <a:pPr algn="ctr"/>
+            <a:endParaRPr/>
+          </a:p>
+        </p:txBody>
+      </p:sp>
+      <p:sp>
+        <p:nvSpPr>
+          <p:cNvPr id="11" name="TextBox 10"/>
+          <p:cNvSpPr txBox="1"/>
+          <p:nvPr/>
+        </p:nvSpPr>
+        <p:spPr>
+          <a:xfrm>
+            <a:off x="685800" y="2286000"/>
+            <a:ext cx="1188720" cy="502920"/>
+          </a:xfrm>
+          <a:prstGeom prst="rect">
+            <a:avLst/>
+          </a:prstGeom>
+          <a:noFill/>
+        </p:spPr>
+        <p:txBody>
+          <a:bodyPr wrap="square" anchor="ctr">
+            <a:spAutoFit/>
+          </a:bodyPr>
+          <a:lstStyle/>
+          <a:p>
+            <a:pPr algn="l"/>
+            <a:r>
+              <a:rPr sz="1300" b="1" i="0">
+                <a:solidFill>
+                  <a:srgbClr val="4A3728"/>
+                </a:solidFill>
+                <a:latin typeface="Liberation Serif"/>
+              </a:rPr>
+              <a:t>User</a:t>
+            </a:r>
+          </a:p>
+        </p:txBody>
+      </p:sp>
+      <p:sp>
+        <p:nvSpPr>
+          <p:cNvPr id="12" name="TextBox 11"/>
+          <p:cNvSpPr txBox="1"/>
+          <p:nvPr/>
+        </p:nvSpPr>
+        <p:spPr>
+          <a:xfrm>
+            <a:off x="1828800" y="2286000"/>
+            <a:ext cx="3931920" cy="502920"/>
+          </a:xfrm>
+          <a:prstGeom prst="rect">
+            <a:avLst/>
+          </a:prstGeom>
+          <a:noFill/>
+        </p:spPr>
+        <p:txBody>
+          <a:bodyPr wrap="square" anchor="ctr">
+            <a:spAutoFit/>
+          </a:bodyPr>
+          <a:lstStyle/>
+          <a:p>
+            <a:pPr algn="l"/>
+            <a:r>
+              <a:rPr sz="1000" b="0" i="0" dirty="0">
+                <a:solidFill>
+                  <a:srgbClr val="5C4D3E"/>
+                </a:solidFill>
+                <a:latin typeface="Calibri"/>
+              </a:rPr>
+              <a:t>name • email • password (</a:t>
+            </a:r>
+            <a:r>
+              <a:rPr sz="1000" b="0" i="0" dirty="0" err="1">
+                <a:solidFill>
+                  <a:srgbClr val="5C4D3E"/>
+                </a:solidFill>
+                <a:latin typeface="Calibri"/>
+              </a:rPr>
+              <a:t>bcrypt</a:t>
+            </a:r>
+            <a:r>
+              <a:rPr sz="1000" b="0" i="0" dirty="0">
+                <a:solidFill>
+                  <a:srgbClr val="5C4D3E"/>
+                </a:solidFill>
+                <a:latin typeface="Calibri"/>
+              </a:rPr>
+              <a:t>) • role [client/admin/vendor] • </a:t>
+            </a:r>
+            <a:r>
+              <a:rPr sz="1000" b="0" i="0" dirty="0" err="1">
+                <a:solidFill>
+                  <a:srgbClr val="5C4D3E"/>
+                </a:solidFill>
+                <a:latin typeface="Calibri"/>
+              </a:rPr>
+              <a:t>profile_image</a:t>
+            </a:r>
+            <a:endParaRPr sz="1000" b="0" i="0" dirty="0">
+              <a:solidFill>
+                <a:srgbClr val="5C4D3E"/>
+              </a:solidFill>
+              <a:latin typeface="Calibri"/>
+            </a:endParaRPr>
+          </a:p>
+        </p:txBody>
+      </p:sp>
+      <p:sp>
+        <p:nvSpPr>
+          <p:cNvPr id="13" name="Rectangle 12"/>
+          <p:cNvSpPr/>
+          <p:nvPr/>
+        </p:nvSpPr>
+        <p:spPr>
+          <a:xfrm>
+            <a:off x="548640" y="2862072"/>
+            <a:ext cx="5303520" cy="502920"/>
+          </a:xfrm>
+          <a:prstGeom prst="rect">
+            <a:avLst/>
+          </a:prstGeom>
+          <a:solidFill>
+            <a:srgbClr val="FDFBF7"/>
+          </a:solidFill>
+          <a:ln w="9525">
+            <a:solidFill>
+              <a:srgbClr val="C9A96E"/>
+            </a:solidFill>
+          </a:ln>
+        </p:spPr>
+        <p:style>
+          <a:lnRef idx="1">
+            <a:schemeClr val="accent1"/>
+          </a:lnRef>
+          <a:fillRef idx="3">
+            <a:schemeClr val="accent1"/>
+          </a:fillRef>
+          <a:effectRef idx="2">
+            <a:schemeClr val="accent1"/>
+          </a:effectRef>
+          <a:fontRef idx="minor">
+            <a:schemeClr val="lt1"/>
+          </a:fontRef>
+        </p:style>
+        <p:txBody>
+          <a:bodyPr rtlCol="0" anchor="ctr"/>
+          <a:lstStyle/>
+          <a:p>
+            <a:pPr algn="ctr"/>
+            <a:endParaRPr/>
+          </a:p>
+        </p:txBody>
+      </p:sp>
+      <p:sp>
+        <p:nvSpPr>
+          <p:cNvPr id="14" name="Rectangle 13"/>
+          <p:cNvSpPr/>
+          <p:nvPr/>
+        </p:nvSpPr>
+        <p:spPr>
+          <a:xfrm>
+            <a:off x="548640" y="2862072"/>
+            <a:ext cx="64008" cy="502920"/>
+          </a:xfrm>
+          <a:prstGeom prst="rect">
+            <a:avLst/>
+          </a:prstGeom>
+          <a:solidFill>
+            <a:srgbClr val="C9A96E"/>
+          </a:solidFill>
+          <a:ln>
+            <a:noFill/>
+          </a:ln>
+        </p:spPr>
+        <p:style>
+          <a:lnRef idx="1">
+            <a:schemeClr val="accent1"/>
+          </a:lnRef>
+          <a:fillRef idx="3">
+            <a:schemeClr val="accent1"/>
+          </a:fillRef>
+          <a:effectRef idx="2">
+            <a:schemeClr val="accent1"/>
+          </a:effectRef>
+          <a:fontRef idx="minor">
+            <a:schemeClr val="lt1"/>
+          </a:fontRef>
+        </p:style>
+        <p:txBody>
+          <a:bodyPr rtlCol="0" anchor="ctr"/>
+          <a:lstStyle/>
+          <a:p>
+            <a:pPr algn="ctr"/>
+            <a:endParaRPr/>
+          </a:p>
+        </p:txBody>
+      </p:sp>
+      <p:sp>
+        <p:nvSpPr>
+          <p:cNvPr id="15" name="TextBox 14"/>
+          <p:cNvSpPr txBox="1"/>
+          <p:nvPr/>
+        </p:nvSpPr>
+        <p:spPr>
+          <a:xfrm>
+            <a:off x="685800" y="2862072"/>
+            <a:ext cx="1188720" cy="502920"/>
+          </a:xfrm>
+          <a:prstGeom prst="rect">
+            <a:avLst/>
+          </a:prstGeom>
+          <a:noFill/>
+        </p:spPr>
+        <p:txBody>
+          <a:bodyPr wrap="square" anchor="ctr">
+            <a:spAutoFit/>
+          </a:bodyPr>
+          <a:lstStyle/>
+          <a:p>
+            <a:pPr algn="l"/>
+            <a:r>
+              <a:rPr sz="1300" b="1" i="0">
+                <a:solidFill>
+                  <a:srgbClr val="4A3728"/>
+                </a:solidFill>
+                <a:latin typeface="Liberation Serif"/>
+              </a:rPr>
+              <a:t>Booking</a:t>
+            </a:r>
+          </a:p>
+        </p:txBody>
+      </p:sp>
+      <p:sp>
+        <p:nvSpPr>
+          <p:cNvPr id="16" name="TextBox 15"/>
+          <p:cNvSpPr txBox="1"/>
+          <p:nvPr/>
+        </p:nvSpPr>
+        <p:spPr>
+          <a:xfrm>
+            <a:off x="1828800" y="2862072"/>
+            <a:ext cx="3931920" cy="502920"/>
+          </a:xfrm>
+          <a:prstGeom prst="rect">
+            <a:avLst/>
+          </a:prstGeom>
+          <a:noFill/>
+        </p:spPr>
+        <p:txBody>
+          <a:bodyPr wrap="square" anchor="ctr">
+            <a:spAutoFit/>
+          </a:bodyPr>
+          <a:lstStyle/>
+          <a:p>
+            <a:pPr algn="l"/>
+            <a:r>
+              <a:rPr sz="1000" b="0" i="0">
+                <a:solidFill>
+                  <a:srgbClr val="5C4D3E"/>
+                </a:solidFill>
+                <a:latin typeface="Calibri"/>
+              </a:rPr>
+              <a:t>package_name • event_date • addons • status • payment_status • timeline</a:t>
+            </a:r>
+          </a:p>
+        </p:txBody>
+      </p:sp>
+      <p:sp>
+        <p:nvSpPr>
+          <p:cNvPr id="17" name="Rectangle 16"/>
+          <p:cNvSpPr/>
+          <p:nvPr/>
+        </p:nvSpPr>
+        <p:spPr>
+          <a:xfrm>
+            <a:off x="548640" y="3438144"/>
+            <a:ext cx="5303520" cy="502920"/>
+          </a:xfrm>
+          <a:prstGeom prst="rect">
+            <a:avLst/>
+          </a:prstGeom>
+          <a:solidFill>
+            <a:srgbClr val="FDFBF7"/>
+          </a:solidFill>
+          <a:ln w="9525">
+            <a:solidFill>
+              <a:srgbClr val="C9A96E"/>
+            </a:solidFill>
+          </a:ln>
+        </p:spPr>
+        <p:style>
+          <a:lnRef idx="1">
+            <a:schemeClr val="accent1"/>
+          </a:lnRef>
+          <a:fillRef idx="3">
+            <a:schemeClr val="accent1"/>
+          </a:fillRef>
+          <a:effectRef idx="2">
+            <a:schemeClr val="accent1"/>
+          </a:effectRef>
+          <a:fontRef idx="minor">
+            <a:schemeClr val="lt1"/>
+          </a:fontRef>
+        </p:style>
+        <p:txBody>
+          <a:bodyPr rtlCol="0" anchor="ctr"/>
+          <a:lstStyle/>
+          <a:p>
+            <a:pPr algn="ctr"/>
+            <a:endParaRPr/>
+          </a:p>
+        </p:txBody>
+      </p:sp>
+      <p:sp>
+        <p:nvSpPr>
+          <p:cNvPr id="18" name="Rectangle 17"/>
+          <p:cNvSpPr/>
+          <p:nvPr/>
+        </p:nvSpPr>
+        <p:spPr>
+          <a:xfrm>
+            <a:off x="548640" y="3438144"/>
+            <a:ext cx="64008" cy="502920"/>
+          </a:xfrm>
+          <a:prstGeom prst="rect">
+            <a:avLst/>
+          </a:prstGeom>
+          <a:solidFill>
+            <a:srgbClr val="C9A96E"/>
+          </a:solidFill>
+          <a:ln>
+            <a:noFill/>
+          </a:ln>
+        </p:spPr>
+        <p:style>
+          <a:lnRef idx="1">
+            <a:schemeClr val="accent1"/>
+          </a:lnRef>
+          <a:fillRef idx="3">
+            <a:schemeClr val="accent1"/>
+          </a:fillRef>
+          <a:effectRef idx="2">
+            <a:schemeClr val="accent1"/>
+          </a:effectRef>
+          <a:fontRef idx="minor">
+            <a:schemeClr val="lt1"/>
+          </a:fontRef>
+        </p:style>
+        <p:txBody>
+          <a:bodyPr rtlCol="0" anchor="ctr"/>
+          <a:lstStyle/>
+          <a:p>
+            <a:pPr algn="ctr"/>
+            <a:endParaRPr/>
+          </a:p>
+        </p:txBody>
+      </p:sp>
+      <p:sp>
+        <p:nvSpPr>
+          <p:cNvPr id="19" name="TextBox 18"/>
+          <p:cNvSpPr txBox="1"/>
+          <p:nvPr/>
+        </p:nvSpPr>
+        <p:spPr>
+          <a:xfrm>
+            <a:off x="685800" y="3438144"/>
+            <a:ext cx="1188720" cy="502920"/>
+          </a:xfrm>
+          <a:prstGeom prst="rect">
+            <a:avLst/>
+          </a:prstGeom>
+          <a:noFill/>
+        </p:spPr>
+        <p:txBody>
+          <a:bodyPr wrap="square" anchor="ctr">
+            <a:spAutoFit/>
+          </a:bodyPr>
+          <a:lstStyle/>
+          <a:p>
+            <a:pPr algn="l"/>
+            <a:r>
+              <a:rPr sz="1300" b="1" i="0">
+                <a:solidFill>
+                  <a:srgbClr val="4A3728"/>
+                </a:solidFill>
+                <a:latin typeface="Liberation Serif"/>
+              </a:rPr>
+              <a:t>Payment</a:t>
+            </a:r>
+          </a:p>
+        </p:txBody>
+      </p:sp>
+      <p:sp>
+        <p:nvSpPr>
+          <p:cNvPr id="20" name="TextBox 19"/>
+          <p:cNvSpPr txBox="1"/>
+          <p:nvPr/>
+        </p:nvSpPr>
+        <p:spPr>
+          <a:xfrm>
+            <a:off x="1828800" y="3438144"/>
+            <a:ext cx="3931920" cy="502920"/>
+          </a:xfrm>
+          <a:prstGeom prst="rect">
+            <a:avLst/>
+          </a:prstGeom>
+          <a:noFill/>
+        </p:spPr>
+        <p:txBody>
+          <a:bodyPr wrap="square" anchor="ctr">
+            <a:spAutoFit/>
+          </a:bodyPr>
+          <a:lstStyle/>
+          <a:p>
+            <a:pPr algn="l"/>
+            <a:r>
+              <a:rPr sz="1000" b="0" i="0">
+                <a:solidFill>
+                  <a:srgbClr val="5C4D3E"/>
+                </a:solidFill>
+                <a:latin typeface="Calibri"/>
+              </a:rPr>
+              <a:t>booking_ref • amount • method [cash/card/UPI] • receipt_no • paid_at</a:t>
+            </a:r>
+          </a:p>
+        </p:txBody>
+      </p:sp>
+      <p:sp>
+        <p:nvSpPr>
+          <p:cNvPr id="21" name="Rectangle 20"/>
+          <p:cNvSpPr/>
+          <p:nvPr/>
+        </p:nvSpPr>
+        <p:spPr>
+          <a:xfrm>
+            <a:off x="548640" y="4014216"/>
+            <a:ext cx="5303520" cy="502920"/>
+          </a:xfrm>
+          <a:prstGeom prst="rect">
+            <a:avLst/>
+          </a:prstGeom>
+          <a:solidFill>
+            <a:srgbClr val="FDFBF7"/>
+          </a:solidFill>
+          <a:ln w="9525">
+            <a:solidFill>
+              <a:srgbClr val="C9A96E"/>
+            </a:solidFill>
+          </a:ln>
+        </p:spPr>
+        <p:style>
+          <a:lnRef idx="1">
+            <a:schemeClr val="accent1"/>
+          </a:lnRef>
+          <a:fillRef idx="3">
+            <a:schemeClr val="accent1"/>
+          </a:fillRef>
+          <a:effectRef idx="2">
+            <a:schemeClr val="accent1"/>
+          </a:effectRef>
+          <a:fontRef idx="minor">
+            <a:schemeClr val="lt1"/>
+          </a:fontRef>
+        </p:style>
+        <p:txBody>
+          <a:bodyPr rtlCol="0" anchor="ctr"/>
+          <a:lstStyle/>
+          <a:p>
+            <a:pPr algn="ctr"/>
+            <a:endParaRPr/>
+          </a:p>
+        </p:txBody>
+      </p:sp>
+      <p:sp>
+        <p:nvSpPr>
+          <p:cNvPr id="22" name="Rectangle 21"/>
+          <p:cNvSpPr/>
+          <p:nvPr/>
+        </p:nvSpPr>
+        <p:spPr>
+          <a:xfrm>
+            <a:off x="548640" y="4014216"/>
+            <a:ext cx="64008" cy="502920"/>
+          </a:xfrm>
+          <a:prstGeom prst="rect">
+            <a:avLst/>
+          </a:prstGeom>
+          <a:solidFill>
+            <a:srgbClr val="C9A96E"/>
+          </a:solidFill>
+          <a:ln>
+            <a:noFill/>
+          </a:ln>
+        </p:spPr>
+        <p:style>
+          <a:lnRef idx="1">
+            <a:schemeClr val="accent1"/>
+          </a:lnRef>
+          <a:fillRef idx="3">
+            <a:schemeClr val="accent1"/>
+          </a:fillRef>
+          <a:effectRef idx="2">
+            <a:schemeClr val="accent1"/>
+          </a:effectRef>
+          <a:fontRef idx="minor">
+            <a:schemeClr val="lt1"/>
+          </a:fontRef>
+        </p:style>
+        <p:txBody>
+          <a:bodyPr rtlCol="0" anchor="ctr"/>
+          <a:lstStyle/>
+          <a:p>
+            <a:pPr algn="ctr"/>
+            <a:endParaRPr/>
+          </a:p>
+        </p:txBody>
+      </p:sp>
+      <p:sp>
+        <p:nvSpPr>
+          <p:cNvPr id="23" name="TextBox 22"/>
+          <p:cNvSpPr txBox="1"/>
+          <p:nvPr/>
+        </p:nvSpPr>
+        <p:spPr>
+          <a:xfrm>
+            <a:off x="685800" y="4014216"/>
+            <a:ext cx="1188720" cy="502920"/>
+          </a:xfrm>
+          <a:prstGeom prst="rect">
+            <a:avLst/>
+          </a:prstGeom>
+          <a:noFill/>
+        </p:spPr>
+        <p:txBody>
+          <a:bodyPr wrap="square" anchor="ctr">
+            <a:spAutoFit/>
+          </a:bodyPr>
+          <a:lstStyle/>
+          <a:p>
+            <a:pPr algn="l"/>
+            <a:r>
+              <a:rPr sz="1300" b="1" i="0">
+                <a:solidFill>
+                  <a:srgbClr val="4A3728"/>
+                </a:solidFill>
+                <a:latin typeface="Liberation Serif"/>
+              </a:rPr>
+              <a:t>Guest</a:t>
+            </a:r>
+          </a:p>
+        </p:txBody>
+      </p:sp>
+      <p:sp>
+        <p:nvSpPr>
+          <p:cNvPr id="24" name="TextBox 23"/>
+          <p:cNvSpPr txBox="1"/>
+          <p:nvPr/>
+        </p:nvSpPr>
+        <p:spPr>
+          <a:xfrm>
+            <a:off x="1828800" y="4014216"/>
+            <a:ext cx="3931920" cy="502920"/>
+          </a:xfrm>
+          <a:prstGeom prst="rect">
+            <a:avLst/>
+          </a:prstGeom>
+          <a:noFill/>
+        </p:spPr>
+        <p:txBody>
+          <a:bodyPr wrap="square" anchor="ctr">
+            <a:spAutoFit/>
+          </a:bodyPr>
+          <a:lstStyle/>
+          <a:p>
+            <a:pPr algn="l"/>
+            <a:r>
+              <a:rPr sz="1000" b="0" i="0">
+                <a:solidFill>
+                  <a:srgbClr val="5C4D3E"/>
+                </a:solidFill>
+                <a:latin typeface="Calibri"/>
+              </a:rPr>
+              <a:t>name • side [bride/groom] • rsvp_status • dietary • plus_one</a:t>
+            </a:r>
+          </a:p>
+        </p:txBody>
+      </p:sp>
+      <p:sp>
+        <p:nvSpPr>
+          <p:cNvPr id="25" name="Rectangle 24"/>
+          <p:cNvSpPr/>
+          <p:nvPr/>
+        </p:nvSpPr>
+        <p:spPr>
+          <a:xfrm>
+            <a:off x="548640" y="4590288"/>
+            <a:ext cx="5303520" cy="502920"/>
+          </a:xfrm>
+          <a:prstGeom prst="rect">
+            <a:avLst/>
+          </a:prstGeom>
+          <a:solidFill>
+            <a:srgbClr val="FDFBF7"/>
+          </a:solidFill>
+          <a:ln w="9525">
+            <a:solidFill>
+              <a:srgbClr val="C9A96E"/>
+            </a:solidFill>
+          </a:ln>
+        </p:spPr>
+        <p:style>
+          <a:lnRef idx="1">
+            <a:schemeClr val="accent1"/>
+          </a:lnRef>
+          <a:fillRef idx="3">
+            <a:schemeClr val="accent1"/>
+          </a:fillRef>
+          <a:effectRef idx="2">
+            <a:schemeClr val="accent1"/>
+          </a:effectRef>
+          <a:fontRef idx="minor">
+            <a:schemeClr val="lt1"/>
+          </a:fontRef>
+        </p:style>
+        <p:txBody>
+          <a:bodyPr rtlCol="0" anchor="ctr"/>
+          <a:lstStyle/>
+          <a:p>
+            <a:pPr algn="ctr"/>
+            <a:endParaRPr/>
+          </a:p>
+        </p:txBody>
+      </p:sp>
+      <p:sp>
+        <p:nvSpPr>
+          <p:cNvPr id="26" name="Rectangle 25"/>
+          <p:cNvSpPr/>
+          <p:nvPr/>
+        </p:nvSpPr>
+        <p:spPr>
+          <a:xfrm>
+            <a:off x="548640" y="4590288"/>
+            <a:ext cx="64008" cy="502920"/>
+          </a:xfrm>
+          <a:prstGeom prst="rect">
+            <a:avLst/>
+          </a:prstGeom>
+          <a:solidFill>
+            <a:srgbClr val="C9A96E"/>
+          </a:solidFill>
+          <a:ln>
+            <a:noFill/>
+          </a:ln>
+        </p:spPr>
+        <p:style>
+          <a:lnRef idx="1">
+            <a:schemeClr val="accent1"/>
+          </a:lnRef>
+          <a:fillRef idx="3">
+            <a:schemeClr val="accent1"/>
+          </a:fillRef>
+          <a:effectRef idx="2">
+            <a:schemeClr val="accent1"/>
+          </a:effectRef>
+          <a:fontRef idx="minor">
+            <a:schemeClr val="lt1"/>
+          </a:fontRef>
+        </p:style>
+        <p:txBody>
+          <a:bodyPr rtlCol="0" anchor="ctr"/>
+          <a:lstStyle/>
+          <a:p>
+            <a:pPr algn="ctr"/>
+            <a:endParaRPr/>
+          </a:p>
+        </p:txBody>
+      </p:sp>
+      <p:sp>
+        <p:nvSpPr>
+          <p:cNvPr id="27" name="TextBox 26"/>
+          <p:cNvSpPr txBox="1"/>
+          <p:nvPr/>
+        </p:nvSpPr>
+        <p:spPr>
+          <a:xfrm>
+            <a:off x="685800" y="4590288"/>
+            <a:ext cx="1188720" cy="502920"/>
+          </a:xfrm>
+          <a:prstGeom prst="rect">
+            <a:avLst/>
+          </a:prstGeom>
+          <a:noFill/>
+        </p:spPr>
+        <p:txBody>
+          <a:bodyPr wrap="square" anchor="ctr">
+            <a:spAutoFit/>
+          </a:bodyPr>
+          <a:lstStyle/>
+          <a:p>
+            <a:pPr algn="l"/>
+            <a:r>
+              <a:rPr sz="1300" b="1" i="0">
+                <a:solidFill>
+                  <a:srgbClr val="4A3728"/>
+                </a:solidFill>
+                <a:latin typeface="Liberation Serif"/>
+              </a:rPr>
+              <a:t>Vendor</a:t>
+            </a:r>
+          </a:p>
+        </p:txBody>
+      </p:sp>
+      <p:sp>
+        <p:nvSpPr>
+          <p:cNvPr id="28" name="TextBox 27"/>
+          <p:cNvSpPr txBox="1"/>
+          <p:nvPr/>
+        </p:nvSpPr>
+        <p:spPr>
+          <a:xfrm>
+            <a:off x="1828800" y="4590288"/>
+            <a:ext cx="3931920" cy="502920"/>
+          </a:xfrm>
+          <a:prstGeom prst="rect">
+            <a:avLst/>
+          </a:prstGeom>
+          <a:noFill/>
+        </p:spPr>
+        <p:txBody>
+          <a:bodyPr wrap="square" anchor="ctr">
+            <a:spAutoFit/>
+          </a:bodyPr>
+          <a:lstStyle/>
+          <a:p>
+            <a:pPr algn="l"/>
+            <a:r>
+              <a:rPr sz="1000" b="0" i="0">
+                <a:solidFill>
+                  <a:srgbClr val="5C4D3E"/>
+                </a:solidFill>
+                <a:latin typeface="Calibri"/>
+              </a:rPr>
+              <a:t>category (12+) • services • rating • price_range • portfolio</a:t>
+            </a:r>
+          </a:p>
+        </p:txBody>
+      </p:sp>
+      <p:sp>
+        <p:nvSpPr>
+          <p:cNvPr id="29" name="Rectangle 28"/>
+          <p:cNvSpPr/>
+          <p:nvPr/>
+        </p:nvSpPr>
+        <p:spPr>
+          <a:xfrm>
+            <a:off x="548640" y="5166360"/>
+            <a:ext cx="5303520" cy="502920"/>
+          </a:xfrm>
+          <a:prstGeom prst="rect">
+            <a:avLst/>
+          </a:prstGeom>
+          <a:solidFill>
+            <a:srgbClr val="FDFBF7"/>
+          </a:solidFill>
+          <a:ln w="9525">
+            <a:solidFill>
+              <a:srgbClr val="C9A96E"/>
+            </a:solidFill>
+          </a:ln>
+        </p:spPr>
+        <p:style>
+          <a:lnRef idx="1">
+            <a:schemeClr val="accent1"/>
+          </a:lnRef>
+          <a:fillRef idx="3">
+            <a:schemeClr val="accent1"/>
+          </a:fillRef>
+          <a:effectRef idx="2">
+            <a:schemeClr val="accent1"/>
+          </a:effectRef>
+          <a:fontRef idx="minor">
+            <a:schemeClr val="lt1"/>
+          </a:fontRef>
+        </p:style>
+        <p:txBody>
+          <a:bodyPr rtlCol="0" anchor="ctr"/>
+          <a:lstStyle/>
+          <a:p>
+            <a:pPr algn="ctr"/>
+            <a:endParaRPr/>
+          </a:p>
+        </p:txBody>
+      </p:sp>
+      <p:sp>
+        <p:nvSpPr>
+          <p:cNvPr id="30" name="Rectangle 29"/>
+          <p:cNvSpPr/>
+          <p:nvPr/>
+        </p:nvSpPr>
+        <p:spPr>
+          <a:xfrm>
+            <a:off x="548640" y="5166360"/>
+            <a:ext cx="64008" cy="502920"/>
+          </a:xfrm>
+          <a:prstGeom prst="rect">
+            <a:avLst/>
+          </a:prstGeom>
+          <a:solidFill>
+            <a:srgbClr val="C9A96E"/>
+          </a:solidFill>
+          <a:ln>
+            <a:noFill/>
+          </a:ln>
+        </p:spPr>
+        <p:style>
+          <a:lnRef idx="1">
+            <a:schemeClr val="accent1"/>
+          </a:lnRef>
+          <a:fillRef idx="3">
+            <a:schemeClr val="accent1"/>
+          </a:fillRef>
+          <a:effectRef idx="2">
+            <a:schemeClr val="accent1"/>
+          </a:effectRef>
+          <a:fontRef idx="minor">
+            <a:schemeClr val="lt1"/>
+          </a:fontRef>
+        </p:style>
+        <p:txBody>
+          <a:bodyPr rtlCol="0" anchor="ctr"/>
+          <a:lstStyle/>
+          <a:p>
+            <a:pPr algn="ctr"/>
+            <a:endParaRPr/>
+          </a:p>
+        </p:txBody>
+      </p:sp>
+      <p:sp>
+        <p:nvSpPr>
+          <p:cNvPr id="31" name="TextBox 30"/>
+          <p:cNvSpPr txBox="1"/>
+          <p:nvPr/>
+        </p:nvSpPr>
+        <p:spPr>
+          <a:xfrm>
+            <a:off x="685800" y="5166360"/>
+            <a:ext cx="1188720" cy="502920"/>
+          </a:xfrm>
+          <a:prstGeom prst="rect">
+            <a:avLst/>
+          </a:prstGeom>
+          <a:noFill/>
+        </p:spPr>
+        <p:txBody>
+          <a:bodyPr wrap="square" anchor="ctr">
+            <a:spAutoFit/>
+          </a:bodyPr>
+          <a:lstStyle/>
+          <a:p>
+            <a:pPr algn="l"/>
+            <a:r>
+              <a:rPr sz="1300" b="1" i="0">
+                <a:solidFill>
+                  <a:srgbClr val="4A3728"/>
+                </a:solidFill>
+                <a:latin typeface="Liberation Serif"/>
+              </a:rPr>
+              <a:t>Review</a:t>
+            </a:r>
+          </a:p>
+        </p:txBody>
+      </p:sp>
+      <p:sp>
+        <p:nvSpPr>
+          <p:cNvPr id="32" name="TextBox 31"/>
+          <p:cNvSpPr txBox="1"/>
+          <p:nvPr/>
+        </p:nvSpPr>
+        <p:spPr>
+          <a:xfrm>
+            <a:off x="1828800" y="5166360"/>
+            <a:ext cx="3931920" cy="502920"/>
+          </a:xfrm>
+          <a:prstGeom prst="rect">
+            <a:avLst/>
+          </a:prstGeom>
+          <a:noFill/>
+        </p:spPr>
+        <p:txBody>
+          <a:bodyPr wrap="square" anchor="ctr">
+            <a:spAutoFit/>
+          </a:bodyPr>
+          <a:lstStyle/>
+          <a:p>
+            <a:pPr algn="l"/>
+            <a:r>
+              <a:rPr sz="1000" b="0" i="0">
+                <a:solidFill>
+                  <a:srgbClr val="5C4D3E"/>
+                </a:solidFill>
+                <a:latin typeface="Calibri"/>
+              </a:rPr>
+              <a:t>rating • comment • admin_reply • client_ref</a:t>
+            </a:r>
+          </a:p>
+        </p:txBody>
+      </p:sp>
+      <p:sp>
+        <p:nvSpPr>
+          <p:cNvPr id="33" name="TextBox 32"/>
+          <p:cNvSpPr txBox="1"/>
+          <p:nvPr/>
+        </p:nvSpPr>
+        <p:spPr>
+          <a:xfrm>
+            <a:off x="6217920" y="1783080"/>
+            <a:ext cx="5486400" cy="365760"/>
+          </a:xfrm>
+          <a:prstGeom prst="rect">
+            <a:avLst/>
+          </a:prstGeom>
+          <a:noFill/>
+        </p:spPr>
+        <p:txBody>
+          <a:bodyPr wrap="square" anchor="b">
+            <a:spAutoFit/>
+          </a:bodyPr>
+          <a:lstStyle/>
+          <a:p>
+            <a:pPr algn="l"/>
+            <a:r>
+              <a:rPr sz="2000" b="0" i="0">
+                <a:solidFill>
+                  <a:srgbClr val="8B6F47"/>
+                </a:solidFill>
+                <a:latin typeface="Liberation Serif"/>
+              </a:rPr>
+              <a:t>Supporting Models</a:t>
+            </a:r>
+          </a:p>
+        </p:txBody>
+      </p:sp>
+      <p:sp>
+        <p:nvSpPr>
+          <p:cNvPr id="34" name="Rectangle 33"/>
+          <p:cNvSpPr/>
+          <p:nvPr/>
+        </p:nvSpPr>
+        <p:spPr>
+          <a:xfrm>
+            <a:off x="6217920" y="2148840"/>
+            <a:ext cx="5486400" cy="9525"/>
+          </a:xfrm>
+          <a:prstGeom prst="rect">
+            <a:avLst/>
+          </a:prstGeom>
+          <a:solidFill>
+            <a:srgbClr val="C9A96E"/>
+          </a:solidFill>
+          <a:ln>
+            <a:noFill/>
+          </a:ln>
+        </p:spPr>
+        <p:style>
+          <a:lnRef idx="1">
+            <a:schemeClr val="accent1"/>
+          </a:lnRef>
+          <a:fillRef idx="3">
+            <a:schemeClr val="accent1"/>
+          </a:fillRef>
+          <a:effectRef idx="2">
+            <a:schemeClr val="accent1"/>
+          </a:effectRef>
+          <a:fontRef idx="minor">
+            <a:schemeClr val="lt1"/>
+          </a:fontRef>
+        </p:style>
+        <p:txBody>
+          <a:bodyPr rtlCol="0" anchor="ctr"/>
+          <a:lstStyle/>
+          <a:p>
+            <a:pPr algn="ctr"/>
+            <a:endParaRPr/>
+          </a:p>
+        </p:txBody>
+      </p:sp>
+      <p:sp>
+        <p:nvSpPr>
+          <p:cNvPr id="35" name="Rectangle 34"/>
+          <p:cNvSpPr/>
+          <p:nvPr/>
+        </p:nvSpPr>
+        <p:spPr>
+          <a:xfrm>
+            <a:off x="6217920" y="2286000"/>
+            <a:ext cx="5486400" cy="1600200"/>
+          </a:xfrm>
+          <a:prstGeom prst="rect">
+            <a:avLst/>
+          </a:prstGeom>
+          <a:solidFill>
+            <a:srgbClr val="FDFBF7"/>
+          </a:solidFill>
+          <a:ln w="9525">
+            <a:solidFill>
+              <a:srgbClr val="C9A96E"/>
+            </a:solidFill>
+          </a:ln>
+        </p:spPr>
+        <p:style>
+          <a:lnRef idx="1">
+            <a:schemeClr val="accent1"/>
+          </a:lnRef>
+          <a:fillRef idx="3">
+            <a:schemeClr val="accent1"/>
+          </a:fillRef>
+          <a:effectRef idx="2">
+            <a:schemeClr val="accent1"/>
+          </a:effectRef>
+          <a:fontRef idx="minor">
+            <a:schemeClr val="lt1"/>
+          </a:fontRef>
+        </p:style>
+        <p:txBody>
+          <a:bodyPr rtlCol="0" anchor="ctr"/>
+          <a:lstStyle/>
+          <a:p>
+            <a:pPr algn="ctr"/>
+            <a:endParaRPr/>
+          </a:p>
+        </p:txBody>
+      </p:sp>
+      <p:sp>
+        <p:nvSpPr>
+          <p:cNvPr id="36" name="Rectangle 35"/>
+          <p:cNvSpPr/>
+          <p:nvPr/>
+        </p:nvSpPr>
+        <p:spPr>
+          <a:xfrm>
+            <a:off x="6217920" y="2286000"/>
+            <a:ext cx="64008" cy="1600200"/>
+          </a:xfrm>
+          <a:prstGeom prst="rect">
+            <a:avLst/>
+          </a:prstGeom>
+          <a:solidFill>
+            <a:srgbClr val="C9A96E"/>
+          </a:solidFill>
+          <a:ln>
+            <a:noFill/>
+          </a:ln>
+        </p:spPr>
+        <p:style>
+          <a:lnRef idx="1">
+            <a:schemeClr val="accent1"/>
+          </a:lnRef>
+          <a:fillRef idx="3">
+            <a:schemeClr val="accent1"/>
+          </a:fillRef>
+          <a:effectRef idx="2">
+            <a:schemeClr val="accent1"/>
+          </a:effectRef>
+          <a:fontRef idx="minor">
+            <a:schemeClr val="lt1"/>
+          </a:fontRef>
+        </p:style>
+        <p:txBody>
+          <a:bodyPr rtlCol="0" anchor="ctr"/>
+          <a:lstStyle/>
+          <a:p>
+            <a:pPr algn="ctr"/>
+            <a:endParaRPr/>
+          </a:p>
+        </p:txBody>
+      </p:sp>
+      <p:sp>
+        <p:nvSpPr>
+          <p:cNvPr id="37" name="TextBox 36"/>
+          <p:cNvSpPr txBox="1"/>
+          <p:nvPr/>
+        </p:nvSpPr>
+        <p:spPr>
+          <a:xfrm>
+            <a:off x="6355080" y="2377440"/>
+            <a:ext cx="5303520" cy="1508760"/>
+          </a:xfrm>
+          <a:prstGeom prst="rect">
+            <a:avLst/>
+          </a:prstGeom>
+          <a:noFill/>
+        </p:spPr>
+        <p:txBody>
+          <a:bodyPr wrap="square">
+            <a:spAutoFit/>
+          </a:bodyPr>
+          <a:lstStyle/>
+          <a:p>
+            <a:pPr algn="l">
+              <a:lnSpc>
+                <a:spcPct val="125000"/>
+              </a:lnSpc>
+            </a:pPr>
+            <a:r>
+              <a:rPr sz="1100" b="1">
+                <a:solidFill>
+                  <a:srgbClr val="C9A96E"/>
+                </a:solidFill>
+                <a:latin typeface="Calibri"/>
+              </a:rPr>
+              <a:t>•  </a:t>
+            </a:r>
+            <a:r>
+              <a:rPr sz="1100">
+                <a:solidFill>
+                  <a:srgbClr val="5C4D3E"/>
+                </a:solidFill>
+                <a:latin typeface="Calibri"/>
+              </a:rPr>
+              <a:t>Menu — 8 pre-loaded cuisines, linked to bookings via ObjectId</a:t>
+            </a:r>
+          </a:p>
+          <a:p>
+            <a:pPr algn="l">
+              <a:lnSpc>
+                <a:spcPct val="125000"/>
+              </a:lnSpc>
+            </a:pPr>
+            <a:r>
+              <a:rPr sz="1100" b="1">
+                <a:solidFill>
+                  <a:srgbClr val="C9A96E"/>
+                </a:solidFill>
+                <a:latin typeface="Calibri"/>
+              </a:rPr>
+              <a:t>•  </a:t>
+            </a:r>
+            <a:r>
+              <a:rPr sz="1100">
+                <a:solidFill>
+                  <a:srgbClr val="5C4D3E"/>
+                </a:solidFill>
+                <a:latin typeface="Calibri"/>
+              </a:rPr>
+              <a:t>Checklist — per-booking to-dos with priority &amp; due_date fields</a:t>
+            </a:r>
+          </a:p>
+          <a:p>
+            <a:pPr algn="l">
+              <a:lnSpc>
+                <a:spcPct val="125000"/>
+              </a:lnSpc>
+            </a:pPr>
+            <a:r>
+              <a:rPr sz="1100" b="1">
+                <a:solidFill>
+                  <a:srgbClr val="C9A96E"/>
+                </a:solidFill>
+                <a:latin typeface="Calibri"/>
+              </a:rPr>
+              <a:t>•  </a:t>
+            </a:r>
+            <a:r>
+              <a:rPr sz="1100">
+                <a:solidFill>
+                  <a:srgbClr val="5C4D3E"/>
+                </a:solidFill>
+                <a:latin typeface="Calibri"/>
+              </a:rPr>
+              <a:t>Notification — type, message, read_status, recipient_ref</a:t>
+            </a:r>
+          </a:p>
+          <a:p>
+            <a:pPr algn="l">
+              <a:lnSpc>
+                <a:spcPct val="125000"/>
+              </a:lnSpc>
+            </a:pPr>
+            <a:r>
+              <a:rPr sz="1100" b="1">
+                <a:solidFill>
+                  <a:srgbClr val="C9A96E"/>
+                </a:solidFill>
+                <a:latin typeface="Calibri"/>
+              </a:rPr>
+              <a:t>•  </a:t>
+            </a:r>
+            <a:r>
+              <a:rPr sz="1100">
+                <a:solidFill>
+                  <a:srgbClr val="5C4D3E"/>
+                </a:solidFill>
+                <a:latin typeface="Calibri"/>
+              </a:rPr>
+              <a:t>Message — in-app chat between client and admin</a:t>
+            </a:r>
+          </a:p>
+          <a:p>
+            <a:pPr algn="l">
+              <a:lnSpc>
+                <a:spcPct val="125000"/>
+              </a:lnSpc>
+            </a:pPr>
+            <a:r>
+              <a:rPr sz="1100" b="1">
+                <a:solidFill>
+                  <a:srgbClr val="C9A96E"/>
+                </a:solidFill>
+                <a:latin typeface="Calibri"/>
+              </a:rPr>
+              <a:t>•  </a:t>
+            </a:r>
+            <a:r>
+              <a:rPr sz="1100">
+                <a:solidFill>
+                  <a:srgbClr val="5C4D3E"/>
+                </a:solidFill>
+                <a:latin typeface="Calibri"/>
+              </a:rPr>
+              <a:t>Inquiry — pre-booking questions with admin response thread</a:t>
+            </a:r>
+          </a:p>
+        </p:txBody>
+      </p:sp>
+      <p:sp>
+        <p:nvSpPr>
+          <p:cNvPr id="38" name="TextBox 37"/>
+          <p:cNvSpPr txBox="1"/>
+          <p:nvPr/>
+        </p:nvSpPr>
+        <p:spPr>
+          <a:xfrm>
+            <a:off x="6217920" y="4069080"/>
+            <a:ext cx="5486400" cy="365760"/>
+          </a:xfrm>
+          <a:prstGeom prst="rect">
+            <a:avLst/>
+          </a:prstGeom>
+          <a:noFill/>
+        </p:spPr>
+        <p:txBody>
+          <a:bodyPr wrap="square" anchor="b">
+            <a:spAutoFit/>
+          </a:bodyPr>
+          <a:lstStyle/>
+          <a:p>
+            <a:pPr algn="l"/>
+            <a:r>
+              <a:rPr sz="2000" b="0" i="0">
+                <a:solidFill>
+                  <a:srgbClr val="8B6F47"/>
+                </a:solidFill>
+                <a:latin typeface="Liberation Serif"/>
+              </a:rPr>
+              <a:t>Design Highlights</a:t>
+            </a:r>
+          </a:p>
+        </p:txBody>
+      </p:sp>
+      <p:sp>
+        <p:nvSpPr>
+          <p:cNvPr id="39" name="Rectangle 38"/>
+          <p:cNvSpPr/>
+          <p:nvPr/>
+        </p:nvSpPr>
+        <p:spPr>
+          <a:xfrm>
+            <a:off x="6217920" y="4434840"/>
+            <a:ext cx="5486400" cy="9525"/>
+          </a:xfrm>
+          <a:prstGeom prst="rect">
+            <a:avLst/>
+          </a:prstGeom>
+          <a:solidFill>
+            <a:srgbClr val="C9A96E"/>
+          </a:solidFill>
+          <a:ln>
+            <a:noFill/>
+          </a:ln>
+        </p:spPr>
+        <p:style>
+          <a:lnRef idx="1">
+            <a:schemeClr val="accent1"/>
+          </a:lnRef>
+          <a:fillRef idx="3">
+            <a:schemeClr val="accent1"/>
+          </a:fillRef>
+          <a:effectRef idx="2">
+            <a:schemeClr val="accent1"/>
+          </a:effectRef>
+          <a:fontRef idx="minor">
+            <a:schemeClr val="lt1"/>
+          </a:fontRef>
+        </p:style>
+        <p:txBody>
+          <a:bodyPr rtlCol="0" anchor="ctr"/>
+          <a:lstStyle/>
+          <a:p>
+            <a:pPr algn="ctr"/>
+            <a:endParaRPr/>
+          </a:p>
+        </p:txBody>
+      </p:sp>
+      <p:sp>
+        <p:nvSpPr>
+          <p:cNvPr id="40" name="Rectangle 39"/>
+          <p:cNvSpPr/>
+          <p:nvPr/>
+        </p:nvSpPr>
+        <p:spPr>
+          <a:xfrm>
+            <a:off x="6217920" y="4572000"/>
+            <a:ext cx="1280160" cy="1097280"/>
+          </a:xfrm>
+          <a:prstGeom prst="rect">
+            <a:avLst/>
+          </a:prstGeom>
+          <a:solidFill>
+            <a:srgbClr val="FDFBF7"/>
+          </a:solidFill>
+          <a:ln w="9525">
+            <a:solidFill>
+              <a:srgbClr val="C9A96E"/>
+            </a:solidFill>
+          </a:ln>
+        </p:spPr>
+        <p:style>
+          <a:lnRef idx="1">
+            <a:schemeClr val="accent1"/>
+          </a:lnRef>
+          <a:fillRef idx="3">
+            <a:schemeClr val="accent1"/>
+          </a:fillRef>
+          <a:effectRef idx="2">
+            <a:schemeClr val="accent1"/>
+          </a:effectRef>
+          <a:fontRef idx="minor">
+            <a:schemeClr val="lt1"/>
+          </a:fontRef>
+        </p:style>
+        <p:txBody>
+          <a:bodyPr rtlCol="0" anchor="ctr"/>
+          <a:lstStyle/>
+          <a:p>
+            <a:pPr algn="ctr"/>
+            <a:endParaRPr/>
+          </a:p>
+        </p:txBody>
+      </p:sp>
+      <p:sp>
+        <p:nvSpPr>
+          <p:cNvPr id="41" name="TextBox 40"/>
+          <p:cNvSpPr txBox="1"/>
+          <p:nvPr/>
+        </p:nvSpPr>
+        <p:spPr>
+          <a:xfrm>
+            <a:off x="6217920" y="4681728"/>
+            <a:ext cx="1280160" cy="502920"/>
+          </a:xfrm>
+          <a:prstGeom prst="rect">
+            <a:avLst/>
+          </a:prstGeom>
+          <a:noFill/>
+        </p:spPr>
+        <p:txBody>
+          <a:bodyPr wrap="square" anchor="t">
+            <a:spAutoFit/>
+          </a:bodyPr>
+          <a:lstStyle/>
+          <a:p>
+            <a:pPr algn="ctr"/>
+            <a:r>
+              <a:rPr sz="2600" b="1" i="0">
+                <a:solidFill>
+                  <a:srgbClr val="4A3728"/>
+                </a:solidFill>
+                <a:latin typeface="Liberation Serif"/>
+              </a:rPr>
+              <a:t>11</a:t>
+            </a:r>
+          </a:p>
+        </p:txBody>
+      </p:sp>
+      <p:sp>
+        <p:nvSpPr>
+          <p:cNvPr id="42" name="TextBox 41"/>
+          <p:cNvSpPr txBox="1"/>
+          <p:nvPr/>
+        </p:nvSpPr>
+        <p:spPr>
+          <a:xfrm>
+            <a:off x="6217920" y="5257800"/>
+            <a:ext cx="1280160" cy="365760"/>
+          </a:xfrm>
+          <a:prstGeom prst="rect">
+            <a:avLst/>
+          </a:prstGeom>
+          <a:noFill/>
+        </p:spPr>
+        <p:txBody>
+          <a:bodyPr wrap="square" anchor="t">
+            <a:spAutoFit/>
+          </a:bodyPr>
+          <a:lstStyle/>
+          <a:p>
+            <a:pPr algn="ctr"/>
+            <a:r>
+              <a:rPr sz="1000" b="0" i="0">
+                <a:solidFill>
+                  <a:srgbClr val="A8894E"/>
+                </a:solidFill>
+                <a:latin typeface="Calibri"/>
+              </a:rPr>
+              <a:t>Schemas</a:t>
+            </a:r>
+          </a:p>
+        </p:txBody>
+      </p:sp>
+      <p:sp>
+        <p:nvSpPr>
+          <p:cNvPr id="43" name="Rectangle 42"/>
+          <p:cNvSpPr/>
+          <p:nvPr/>
+        </p:nvSpPr>
+        <p:spPr>
+          <a:xfrm>
+            <a:off x="7635240" y="4572000"/>
+            <a:ext cx="1280160" cy="1097280"/>
+          </a:xfrm>
+          <a:prstGeom prst="rect">
+            <a:avLst/>
+          </a:prstGeom>
+          <a:solidFill>
+            <a:srgbClr val="FDFBF7"/>
+          </a:solidFill>
+          <a:ln w="9525">
+            <a:solidFill>
+              <a:srgbClr val="C9A96E"/>
+            </a:solidFill>
+          </a:ln>
+        </p:spPr>
+        <p:style>
+          <a:lnRef idx="1">
+            <a:schemeClr val="accent1"/>
+          </a:lnRef>
+          <a:fillRef idx="3">
+            <a:schemeClr val="accent1"/>
+          </a:fillRef>
+          <a:effectRef idx="2">
+            <a:schemeClr val="accent1"/>
+          </a:effectRef>
+          <a:fontRef idx="minor">
+            <a:schemeClr val="lt1"/>
+          </a:fontRef>
+        </p:style>
+        <p:txBody>
+          <a:bodyPr rtlCol="0" anchor="ctr"/>
+          <a:lstStyle/>
+          <a:p>
+            <a:pPr algn="ctr"/>
+            <a:endParaRPr/>
+          </a:p>
+        </p:txBody>
+      </p:sp>
+      <p:sp>
+        <p:nvSpPr>
+          <p:cNvPr id="44" name="TextBox 43"/>
+          <p:cNvSpPr txBox="1"/>
+          <p:nvPr/>
+        </p:nvSpPr>
+        <p:spPr>
+          <a:xfrm>
+            <a:off x="7635240" y="4681728"/>
+            <a:ext cx="1280160" cy="502920"/>
+          </a:xfrm>
+          <a:prstGeom prst="rect">
+            <a:avLst/>
+          </a:prstGeom>
+          <a:noFill/>
+        </p:spPr>
+        <p:txBody>
+          <a:bodyPr wrap="square" anchor="t">
+            <a:spAutoFit/>
+          </a:bodyPr>
+          <a:lstStyle/>
+          <a:p>
+            <a:pPr algn="ctr"/>
+            <a:r>
+              <a:rPr sz="2600" b="1" i="0">
+                <a:solidFill>
+                  <a:srgbClr val="4A3728"/>
+                </a:solidFill>
+                <a:latin typeface="Liberation Serif"/>
+              </a:rPr>
+              <a:t>30+</a:t>
+            </a:r>
+          </a:p>
+        </p:txBody>
+      </p:sp>
+      <p:sp>
+        <p:nvSpPr>
+          <p:cNvPr id="45" name="TextBox 44"/>
+          <p:cNvSpPr txBox="1"/>
+          <p:nvPr/>
+        </p:nvSpPr>
+        <p:spPr>
+          <a:xfrm>
+            <a:off x="7635240" y="5257800"/>
+            <a:ext cx="1280160" cy="365760"/>
+          </a:xfrm>
+          <a:prstGeom prst="rect">
+            <a:avLst/>
+          </a:prstGeom>
+          <a:noFill/>
+        </p:spPr>
+        <p:txBody>
+          <a:bodyPr wrap="square" anchor="t">
+            <a:spAutoFit/>
+          </a:bodyPr>
+          <a:lstStyle/>
+          <a:p>
+            <a:pPr algn="ctr"/>
+            <a:r>
+              <a:rPr sz="1000" b="0" i="0">
+                <a:solidFill>
+                  <a:srgbClr val="A8894E"/>
+                </a:solidFill>
+                <a:latin typeface="Calibri"/>
+              </a:rPr>
+              <a:t>ObjectId Refs</a:t>
+            </a:r>
+          </a:p>
+        </p:txBody>
+      </p:sp>
+      <p:sp>
+        <p:nvSpPr>
+          <p:cNvPr id="46" name="Rectangle 45"/>
+          <p:cNvSpPr/>
+          <p:nvPr/>
+        </p:nvSpPr>
+        <p:spPr>
+          <a:xfrm>
+            <a:off x="9052560" y="4572000"/>
+            <a:ext cx="1280160" cy="1097280"/>
+          </a:xfrm>
+          <a:prstGeom prst="rect">
+            <a:avLst/>
+          </a:prstGeom>
+          <a:solidFill>
+            <a:srgbClr val="FDFBF7"/>
+          </a:solidFill>
+          <a:ln w="9525">
+            <a:solidFill>
+              <a:srgbClr val="C9A96E"/>
+            </a:solidFill>
+          </a:ln>
+        </p:spPr>
+        <p:style>
+          <a:lnRef idx="1">
+            <a:schemeClr val="accent1"/>
+          </a:lnRef>
+          <a:fillRef idx="3">
+            <a:schemeClr val="accent1"/>
+          </a:fillRef>
+          <a:effectRef idx="2">
+            <a:schemeClr val="accent1"/>
+          </a:effectRef>
+          <a:fontRef idx="minor">
+            <a:schemeClr val="lt1"/>
+          </a:fontRef>
+        </p:style>
+        <p:txBody>
+          <a:bodyPr rtlCol="0" anchor="ctr"/>
+          <a:lstStyle/>
+          <a:p>
+            <a:pPr algn="ctr"/>
+            <a:endParaRPr/>
+          </a:p>
+        </p:txBody>
+      </p:sp>
+      <p:sp>
+        <p:nvSpPr>
+          <p:cNvPr id="47" name="TextBox 46"/>
+          <p:cNvSpPr txBox="1"/>
+          <p:nvPr/>
+        </p:nvSpPr>
+        <p:spPr>
+          <a:xfrm>
+            <a:off x="9052560" y="4681728"/>
+            <a:ext cx="1280160" cy="502920"/>
+          </a:xfrm>
+          <a:prstGeom prst="rect">
+            <a:avLst/>
+          </a:prstGeom>
+          <a:noFill/>
+        </p:spPr>
+        <p:txBody>
+          <a:bodyPr wrap="square" anchor="t">
+            <a:spAutoFit/>
+          </a:bodyPr>
+          <a:lstStyle/>
+          <a:p>
+            <a:pPr algn="ctr"/>
+            <a:r>
+              <a:rPr sz="2600" b="1" i="0">
+                <a:solidFill>
+                  <a:srgbClr val="4A3728"/>
+                </a:solidFill>
+                <a:latin typeface="Liberation Serif"/>
+              </a:rPr>
+              <a:t>9</a:t>
+            </a:r>
+          </a:p>
+        </p:txBody>
+      </p:sp>
+      <p:sp>
+        <p:nvSpPr>
+          <p:cNvPr id="48" name="TextBox 47"/>
+          <p:cNvSpPr txBox="1"/>
+          <p:nvPr/>
+        </p:nvSpPr>
+        <p:spPr>
+          <a:xfrm>
+            <a:off x="9052560" y="5257800"/>
+            <a:ext cx="1280160" cy="365760"/>
+          </a:xfrm>
+          <a:prstGeom prst="rect">
+            <a:avLst/>
+          </a:prstGeom>
+          <a:noFill/>
+        </p:spPr>
+        <p:txBody>
+          <a:bodyPr wrap="square" anchor="t">
+            <a:spAutoFit/>
+          </a:bodyPr>
+          <a:lstStyle/>
+          <a:p>
+            <a:pPr algn="ctr"/>
+            <a:r>
+              <a:rPr sz="1000" b="0" i="0">
+                <a:solidFill>
+                  <a:srgbClr val="A8894E"/>
+                </a:solidFill>
+                <a:latin typeface="Calibri"/>
+              </a:rPr>
+              <a:t>Enum Fields</a:t>
+            </a:r>
+          </a:p>
+        </p:txBody>
+      </p:sp>
+      <p:sp>
+        <p:nvSpPr>
+          <p:cNvPr id="49" name="Rectangle 48"/>
+          <p:cNvSpPr/>
+          <p:nvPr/>
+        </p:nvSpPr>
+        <p:spPr>
+          <a:xfrm>
+            <a:off x="10469880" y="4572000"/>
+            <a:ext cx="1280160" cy="1097280"/>
+          </a:xfrm>
+          <a:prstGeom prst="rect">
+            <a:avLst/>
+          </a:prstGeom>
+          <a:solidFill>
+            <a:srgbClr val="FDFBF7"/>
+          </a:solidFill>
+          <a:ln w="9525">
+            <a:solidFill>
+              <a:srgbClr val="C9A96E"/>
+            </a:solidFill>
+          </a:ln>
+        </p:spPr>
+        <p:style>
+          <a:lnRef idx="1">
+            <a:schemeClr val="accent1"/>
+          </a:lnRef>
+          <a:fillRef idx="3">
+            <a:schemeClr val="accent1"/>
+          </a:fillRef>
+          <a:effectRef idx="2">
+            <a:schemeClr val="accent1"/>
+          </a:effectRef>
+          <a:fontRef idx="minor">
+            <a:schemeClr val="lt1"/>
+          </a:fontRef>
+        </p:style>
+        <p:txBody>
+          <a:bodyPr rtlCol="0" anchor="ctr"/>
+          <a:lstStyle/>
+          <a:p>
+            <a:pPr algn="ctr"/>
+            <a:endParaRPr/>
+          </a:p>
+        </p:txBody>
+      </p:sp>
+      <p:sp>
+        <p:nvSpPr>
+          <p:cNvPr id="50" name="TextBox 49"/>
+          <p:cNvSpPr txBox="1"/>
+          <p:nvPr/>
+        </p:nvSpPr>
+        <p:spPr>
+          <a:xfrm>
+            <a:off x="10469880" y="4681728"/>
+            <a:ext cx="1280160" cy="502920"/>
+          </a:xfrm>
+          <a:prstGeom prst="rect">
+            <a:avLst/>
+          </a:prstGeom>
+          <a:noFill/>
+        </p:spPr>
+        <p:txBody>
+          <a:bodyPr wrap="square" anchor="t">
+            <a:spAutoFit/>
+          </a:bodyPr>
+          <a:lstStyle/>
+          <a:p>
+            <a:pPr algn="ctr"/>
+            <a:r>
+              <a:rPr sz="2600" b="1" i="0">
+                <a:solidFill>
+                  <a:srgbClr val="4A3728"/>
+                </a:solidFill>
+                <a:latin typeface="Liberation Serif"/>
+              </a:rPr>
+              <a:t>All</a:t>
+            </a:r>
+          </a:p>
+        </p:txBody>
+      </p:sp>
+      <p:sp>
+        <p:nvSpPr>
+          <p:cNvPr id="51" name="TextBox 50"/>
+          <p:cNvSpPr txBox="1"/>
+          <p:nvPr/>
+        </p:nvSpPr>
+        <p:spPr>
+          <a:xfrm>
+            <a:off x="10469880" y="5257800"/>
+            <a:ext cx="1280160" cy="365760"/>
+          </a:xfrm>
+          <a:prstGeom prst="rect">
+            <a:avLst/>
+          </a:prstGeom>
+          <a:noFill/>
+        </p:spPr>
+        <p:txBody>
+          <a:bodyPr wrap="square" anchor="t">
+            <a:spAutoFit/>
+          </a:bodyPr>
+          <a:lstStyle/>
+          <a:p>
+            <a:pPr algn="ctr"/>
+            <a:r>
+              <a:rPr sz="1000" b="0" i="0">
+                <a:solidFill>
+                  <a:srgbClr val="A8894E"/>
+                </a:solidFill>
+                <a:latin typeface="Calibri"/>
+              </a:rPr>
+              <a:t>Timestamped</a:t>
+            </a:r>
+          </a:p>
+        </p:txBody>
+      </p:sp>
+      <p:sp>
+        <p:nvSpPr>
+          <p:cNvPr id="52" name="TextBox 51"/>
+          <p:cNvSpPr txBox="1"/>
+          <p:nvPr/>
+        </p:nvSpPr>
+        <p:spPr>
+          <a:xfrm>
+            <a:off x="548640" y="5852160"/>
+            <a:ext cx="11155680" cy="365760"/>
+          </a:xfrm>
+          <a:prstGeom prst="rect">
+            <a:avLst/>
+          </a:prstGeom>
+          <a:noFill/>
+        </p:spPr>
+        <p:txBody>
+          <a:bodyPr wrap="square" anchor="t">
+            <a:spAutoFit/>
+          </a:bodyPr>
+          <a:lstStyle/>
+          <a:p>
+            <a:pPr algn="ctr"/>
+            <a:r>
+              <a:rPr sz="1100" b="0" i="1">
+                <a:solidFill>
+                  <a:srgbClr val="8B6F47"/>
+                </a:solidFill>
+                <a:latin typeface="Calibri"/>
+              </a:rPr>
+              <a:t>All schemas leverage Mongoose middleware for validation, pre-save hashing, and population of referenced documents.</a:t>
+            </a:r>
+          </a:p>
+        </p:txBody>
+      </p:sp>
+      <p:sp>
+        <p:nvSpPr>
+          <p:cNvPr id="53" name="TextBox 52"/>
+          <p:cNvSpPr txBox="1"/>
+          <p:nvPr/>
+        </p:nvSpPr>
+        <p:spPr>
+          <a:xfrm>
+            <a:off x="10789920" y="6510528"/>
+            <a:ext cx="1188720" cy="274320"/>
+          </a:xfrm>
+          <a:prstGeom prst="rect">
+            <a:avLst/>
+          </a:prstGeom>
+          <a:noFill/>
+        </p:spPr>
+        <p:txBody>
+          <a:bodyPr wrap="square" anchor="t">
+            <a:spAutoFit/>
+          </a:bodyPr>
+          <a:lstStyle/>
+          <a:p>
+            <a:pPr algn="r"/>
+            <a:r>
+              <a:rPr sz="1000" b="0" i="1">
+                <a:solidFill>
+                  <a:srgbClr val="A8894E"/>
+                </a:solidFill>
+                <a:latin typeface="Calibri"/>
+              </a:rPr>
+              <a:t>Page 11</a:t>
+            </a:r>
+          </a:p>
+        </p:txBody>
+      </p:sp>
+    </p:spTree>
+  </p:cSld>
+  <p:clrMapOvr>
+    <a:masterClrMapping/>
+  </p:clrMapOvr>
+</p:sld>
+</file>
+
+<file path=ppt/slides/slide12.xml><?xml version="1.0" encoding="utf-8"?>
+<p:sld xmlns:a="http://schemas.openxmlformats.org/drawingml/2006/main" xmlns:r="http://schemas.openxmlformats.org/officeDocument/2006/relationships" xmlns:p="http://schemas.openxmlformats.org/presentationml/2006/main">
+  <p:cSld>
+    <p:spTree>
+      <p:nvGrpSpPr>
+        <p:cNvPr id="1" name=""/>
+        <p:cNvGrpSpPr/>
+        <p:nvPr/>
+      </p:nvGrpSpPr>
+      <p:grpSpPr>
+        <a:xfrm>
+          <a:off x="0" y="0"/>
+          <a:ext cx="0" cy="0"/>
+          <a:chOff x="0" y="0"/>
+          <a:chExt cx="0" cy="0"/>
+        </a:xfrm>
+      </p:grpSpPr>
+      <p:sp>
+        <p:nvSpPr>
+          <p:cNvPr id="2" name="Rectangle 1"/>
+          <p:cNvSpPr/>
+          <p:nvPr/>
+        </p:nvSpPr>
+        <p:spPr>
+          <a:xfrm>
+            <a:off x="0" y="0"/>
+            <a:ext cx="12191695" cy="6858000"/>
+          </a:xfrm>
+          <a:prstGeom prst="rect">
+            <a:avLst/>
+          </a:prstGeom>
+          <a:solidFill>
+            <a:srgbClr val="FDF8F3"/>
+          </a:solidFill>
+          <a:ln>
+            <a:noFill/>
+          </a:ln>
+        </p:spPr>
+        <p:style>
+          <a:lnRef idx="1">
+            <a:schemeClr val="accent1"/>
+          </a:lnRef>
+          <a:fillRef idx="3">
+            <a:schemeClr val="accent1"/>
+          </a:fillRef>
+          <a:effectRef idx="2">
+            <a:schemeClr val="accent1"/>
+          </a:effectRef>
+          <a:fontRef idx="minor">
+            <a:schemeClr val="lt1"/>
+          </a:fontRef>
+        </p:style>
+        <p:txBody>
+          <a:bodyPr rtlCol="0" anchor="ctr"/>
+          <a:lstStyle/>
+          <a:p>
+            <a:pPr algn="ctr"/>
+            <a:endParaRPr/>
+          </a:p>
+        </p:txBody>
+      </p:sp>
+      <p:sp>
+        <p:nvSpPr>
+          <p:cNvPr id="3" name="Rectangle 2"/>
+          <p:cNvSpPr/>
+          <p:nvPr/>
+        </p:nvSpPr>
+        <p:spPr>
+          <a:xfrm>
+            <a:off x="0" y="0"/>
+            <a:ext cx="12191695" cy="1097280"/>
+          </a:xfrm>
+          <a:prstGeom prst="rect">
+            <a:avLst/>
+          </a:prstGeom>
+          <a:solidFill>
+            <a:srgbClr val="F5ECDD"/>
+          </a:solidFill>
+          <a:ln>
+            <a:noFill/>
+          </a:ln>
+        </p:spPr>
+        <p:style>
+          <a:lnRef idx="1">
+            <a:schemeClr val="accent1"/>
+          </a:lnRef>
+          <a:fillRef idx="3">
+            <a:schemeClr val="accent1"/>
+          </a:fillRef>
+          <a:effectRef idx="2">
+            <a:schemeClr val="accent1"/>
+          </a:effectRef>
+          <a:fontRef idx="minor">
+            <a:schemeClr val="lt1"/>
+          </a:fontRef>
+        </p:style>
+        <p:txBody>
+          <a:bodyPr rtlCol="0" anchor="ctr"/>
+          <a:lstStyle/>
+          <a:p>
+            <a:pPr algn="ctr"/>
+            <a:endParaRPr/>
+          </a:p>
+        </p:txBody>
+      </p:sp>
+      <p:sp>
+        <p:nvSpPr>
+          <p:cNvPr id="4" name="TextBox 3"/>
+          <p:cNvSpPr txBox="1"/>
+          <p:nvPr/>
+        </p:nvSpPr>
+        <p:spPr>
+          <a:xfrm>
+            <a:off x="548640" y="228600"/>
+            <a:ext cx="10972800" cy="731520"/>
+          </a:xfrm>
+          <a:prstGeom prst="rect">
+            <a:avLst/>
+          </a:prstGeom>
+          <a:noFill/>
+        </p:spPr>
+        <p:txBody>
+          <a:bodyPr wrap="square" anchor="ctr">
+            <a:spAutoFit/>
+          </a:bodyPr>
+          <a:lstStyle/>
+          <a:p>
+            <a:pPr algn="l"/>
+            <a:r>
+              <a:rPr sz="3400" b="1" i="0">
+                <a:solidFill>
+                  <a:srgbClr val="4A3728"/>
+                </a:solidFill>
+                <a:latin typeface="Liberation Serif"/>
+              </a:rPr>
+              <a:t>Security &amp; Authentication</a:t>
+            </a:r>
+          </a:p>
+        </p:txBody>
+      </p:sp>
+      <p:sp>
+        <p:nvSpPr>
+          <p:cNvPr id="5" name="Rectangle 4"/>
+          <p:cNvSpPr/>
+          <p:nvPr/>
+        </p:nvSpPr>
+        <p:spPr>
+          <a:xfrm>
+            <a:off x="566928" y="932688"/>
+            <a:ext cx="2011680" cy="38100"/>
+          </a:xfrm>
+          <a:prstGeom prst="rect">
+            <a:avLst/>
+          </a:prstGeom>
+          <a:solidFill>
+            <a:srgbClr val="C9A96E"/>
+          </a:solidFill>
+          <a:ln>
+            <a:noFill/>
+          </a:ln>
+        </p:spPr>
+        <p:style>
+          <a:lnRef idx="1">
+            <a:schemeClr val="accent1"/>
+          </a:lnRef>
+          <a:fillRef idx="3">
+            <a:schemeClr val="accent1"/>
+          </a:fillRef>
+          <a:effectRef idx="2">
+            <a:schemeClr val="accent1"/>
+          </a:effectRef>
+          <a:fontRef idx="minor">
+            <a:schemeClr val="lt1"/>
+          </a:fontRef>
+        </p:style>
+        <p:txBody>
+          <a:bodyPr rtlCol="0" anchor="ctr"/>
+          <a:lstStyle/>
+          <a:p>
+            <a:pPr algn="ctr"/>
+            <a:endParaRPr/>
+          </a:p>
+        </p:txBody>
+      </p:sp>
+      <p:sp>
+        <p:nvSpPr>
+          <p:cNvPr id="6" name="TextBox 5"/>
+          <p:cNvSpPr txBox="1"/>
+          <p:nvPr/>
+        </p:nvSpPr>
+        <p:spPr>
+          <a:xfrm>
+            <a:off x="548640" y="1234440"/>
+            <a:ext cx="11155680" cy="411480"/>
+          </a:xfrm>
+          <a:prstGeom prst="rect">
+            <a:avLst/>
+          </a:prstGeom>
+          <a:noFill/>
+        </p:spPr>
+        <p:txBody>
+          <a:bodyPr wrap="square" anchor="t">
+            <a:spAutoFit/>
+          </a:bodyPr>
+          <a:lstStyle/>
+          <a:p>
+            <a:pPr algn="l"/>
+            <a:r>
+              <a:rPr sz="1300" b="0" i="1">
+                <a:solidFill>
+                  <a:srgbClr val="8B6F47"/>
+                </a:solidFill>
+                <a:latin typeface="Calibri"/>
+              </a:rPr>
+              <a:t>Multi-layered security architecture protecting user data, sessions, and administrative operations across every request.</a:t>
+            </a:r>
+          </a:p>
+        </p:txBody>
+      </p:sp>
+      <p:sp>
+        <p:nvSpPr>
+          <p:cNvPr id="7" name="Rectangle 6"/>
+          <p:cNvSpPr/>
+          <p:nvPr/>
+        </p:nvSpPr>
+        <p:spPr>
+          <a:xfrm>
+            <a:off x="548640" y="1783080"/>
+            <a:ext cx="5486400" cy="2057400"/>
+          </a:xfrm>
+          <a:prstGeom prst="rect">
+            <a:avLst/>
+          </a:prstGeom>
+          <a:solidFill>
+            <a:srgbClr val="FDFBF7"/>
+          </a:solidFill>
+          <a:ln w="9525">
+            <a:solidFill>
+              <a:srgbClr val="C9A96E"/>
+            </a:solidFill>
+          </a:ln>
+        </p:spPr>
+        <p:style>
+          <a:lnRef idx="1">
+            <a:schemeClr val="accent1"/>
+          </a:lnRef>
+          <a:fillRef idx="3">
+            <a:schemeClr val="accent1"/>
+          </a:fillRef>
+          <a:effectRef idx="2">
+            <a:schemeClr val="accent1"/>
+          </a:effectRef>
+          <a:fontRef idx="minor">
+            <a:schemeClr val="lt1"/>
+          </a:fontRef>
+        </p:style>
+        <p:txBody>
+          <a:bodyPr rtlCol="0" anchor="ctr"/>
+          <a:lstStyle/>
+          <a:p>
+            <a:pPr algn="ctr"/>
+            <a:endParaRPr/>
+          </a:p>
+        </p:txBody>
+      </p:sp>
+      <p:sp>
+        <p:nvSpPr>
+          <p:cNvPr id="8" name="Rectangle 7"/>
+          <p:cNvSpPr/>
+          <p:nvPr/>
+        </p:nvSpPr>
+        <p:spPr>
+          <a:xfrm>
+            <a:off x="548640" y="1783080"/>
+            <a:ext cx="64008" cy="2057400"/>
+          </a:xfrm>
+          <a:prstGeom prst="rect">
+            <a:avLst/>
+          </a:prstGeom>
+          <a:solidFill>
+            <a:srgbClr val="C9A96E"/>
+          </a:solidFill>
+          <a:ln>
+            <a:noFill/>
+          </a:ln>
+        </p:spPr>
+        <p:style>
+          <a:lnRef idx="1">
+            <a:schemeClr val="accent1"/>
+          </a:lnRef>
+          <a:fillRef idx="3">
+            <a:schemeClr val="accent1"/>
+          </a:fillRef>
+          <a:effectRef idx="2">
+            <a:schemeClr val="accent1"/>
+          </a:effectRef>
+          <a:fontRef idx="minor">
+            <a:schemeClr val="lt1"/>
+          </a:fontRef>
+        </p:style>
+        <p:txBody>
+          <a:bodyPr rtlCol="0" anchor="ctr"/>
+          <a:lstStyle/>
+          <a:p>
+            <a:pPr algn="ctr"/>
+            <a:endParaRPr/>
+          </a:p>
+        </p:txBody>
+      </p:sp>
+      <p:sp>
+        <p:nvSpPr>
+          <p:cNvPr id="9" name="TextBox 8"/>
+          <p:cNvSpPr txBox="1"/>
+          <p:nvPr/>
+        </p:nvSpPr>
+        <p:spPr>
+          <a:xfrm>
+            <a:off x="731520" y="1874520"/>
+            <a:ext cx="5212080" cy="365760"/>
+          </a:xfrm>
+          <a:prstGeom prst="rect">
+            <a:avLst/>
+          </a:prstGeom>
+          <a:noFill/>
+        </p:spPr>
+        <p:txBody>
+          <a:bodyPr wrap="square" anchor="t">
+            <a:spAutoFit/>
+          </a:bodyPr>
+          <a:lstStyle/>
+          <a:p>
+            <a:pPr algn="l"/>
+            <a:r>
+              <a:rPr sz="1800" b="1" i="0">
+                <a:solidFill>
+                  <a:srgbClr val="4A3728"/>
+                </a:solidFill>
+                <a:latin typeface="Liberation Serif"/>
+              </a:rPr>
+              <a:t>Password Hashing</a:t>
+            </a:r>
+          </a:p>
+        </p:txBody>
+      </p:sp>
+      <p:sp>
+        <p:nvSpPr>
+          <p:cNvPr id="10" name="TextBox 9"/>
+          <p:cNvSpPr txBox="1"/>
+          <p:nvPr/>
+        </p:nvSpPr>
+        <p:spPr>
+          <a:xfrm>
+            <a:off x="731520" y="2286000"/>
+            <a:ext cx="5212080" cy="320040"/>
+          </a:xfrm>
+          <a:prstGeom prst="rect">
+            <a:avLst/>
+          </a:prstGeom>
+          <a:noFill/>
+        </p:spPr>
+        <p:txBody>
+          <a:bodyPr wrap="square" anchor="t">
+            <a:spAutoFit/>
+          </a:bodyPr>
+          <a:lstStyle/>
+          <a:p>
+            <a:pPr algn="l"/>
+            <a:r>
+              <a:rPr sz="1200" b="1" i="1">
+                <a:solidFill>
+                  <a:srgbClr val="A8894E"/>
+                </a:solidFill>
+                <a:latin typeface="Calibri"/>
+              </a:rPr>
+              <a:t>bcryptjs</a:t>
+            </a:r>
+          </a:p>
+        </p:txBody>
+      </p:sp>
+      <p:sp>
+        <p:nvSpPr>
+          <p:cNvPr id="11" name="TextBox 10"/>
+          <p:cNvSpPr txBox="1"/>
+          <p:nvPr/>
+        </p:nvSpPr>
+        <p:spPr>
+          <a:xfrm>
+            <a:off x="731520" y="2651760"/>
+            <a:ext cx="5212080" cy="1143000"/>
+          </a:xfrm>
+          <a:prstGeom prst="rect">
+            <a:avLst/>
+          </a:prstGeom>
+          <a:noFill/>
+        </p:spPr>
+        <p:txBody>
+          <a:bodyPr wrap="square">
+            <a:spAutoFit/>
+          </a:bodyPr>
+          <a:lstStyle/>
+          <a:p>
+            <a:pPr algn="l">
+              <a:lnSpc>
+                <a:spcPct val="125000"/>
+              </a:lnSpc>
+            </a:pPr>
+            <a:r>
+              <a:rPr sz="1100" b="1">
+                <a:solidFill>
+                  <a:srgbClr val="C9A96E"/>
+                </a:solidFill>
+                <a:latin typeface="Calibri"/>
+              </a:rPr>
+              <a:t>•  </a:t>
+            </a:r>
+            <a:r>
+              <a:rPr sz="1100">
+                <a:solidFill>
+                  <a:srgbClr val="5C4D3E"/>
+                </a:solidFill>
+                <a:latin typeface="Calibri"/>
+              </a:rPr>
+              <a:t>Salted hashing with 10-round factor</a:t>
+            </a:r>
+          </a:p>
+          <a:p>
+            <a:pPr algn="l">
+              <a:lnSpc>
+                <a:spcPct val="125000"/>
+              </a:lnSpc>
+            </a:pPr>
+            <a:r>
+              <a:rPr sz="1100" b="1">
+                <a:solidFill>
+                  <a:srgbClr val="C9A96E"/>
+                </a:solidFill>
+                <a:latin typeface="Calibri"/>
+              </a:rPr>
+              <a:t>•  </a:t>
+            </a:r>
+            <a:r>
+              <a:rPr sz="1100">
+                <a:solidFill>
+                  <a:srgbClr val="5C4D3E"/>
+                </a:solidFill>
+                <a:latin typeface="Calibri"/>
+              </a:rPr>
+              <a:t>Irreversible one-way cryptography</a:t>
+            </a:r>
+          </a:p>
+          <a:p>
+            <a:pPr algn="l">
+              <a:lnSpc>
+                <a:spcPct val="125000"/>
+              </a:lnSpc>
+            </a:pPr>
+            <a:r>
+              <a:rPr sz="1100" b="1">
+                <a:solidFill>
+                  <a:srgbClr val="C9A96E"/>
+                </a:solidFill>
+                <a:latin typeface="Calibri"/>
+              </a:rPr>
+              <a:t>•  </a:t>
+            </a:r>
+            <a:r>
+              <a:rPr sz="1100">
+                <a:solidFill>
+                  <a:srgbClr val="5C4D3E"/>
+                </a:solidFill>
+                <a:latin typeface="Calibri"/>
+              </a:rPr>
+              <a:t>Pre-save Mongoose hook auto-hashes</a:t>
+            </a:r>
+          </a:p>
+        </p:txBody>
+      </p:sp>
+      <p:sp>
+        <p:nvSpPr>
+          <p:cNvPr id="12" name="Rectangle 11"/>
+          <p:cNvSpPr/>
+          <p:nvPr/>
+        </p:nvSpPr>
+        <p:spPr>
+          <a:xfrm>
+            <a:off x="6217920" y="1783080"/>
+            <a:ext cx="5486400" cy="2057400"/>
+          </a:xfrm>
+          <a:prstGeom prst="rect">
+            <a:avLst/>
+          </a:prstGeom>
+          <a:solidFill>
+            <a:srgbClr val="FDFBF7"/>
+          </a:solidFill>
+          <a:ln w="9525">
+            <a:solidFill>
+              <a:srgbClr val="C9A96E"/>
+            </a:solidFill>
+          </a:ln>
+        </p:spPr>
+        <p:style>
+          <a:lnRef idx="1">
+            <a:schemeClr val="accent1"/>
+          </a:lnRef>
+          <a:fillRef idx="3">
+            <a:schemeClr val="accent1"/>
+          </a:fillRef>
+          <a:effectRef idx="2">
+            <a:schemeClr val="accent1"/>
+          </a:effectRef>
+          <a:fontRef idx="minor">
+            <a:schemeClr val="lt1"/>
+          </a:fontRef>
+        </p:style>
+        <p:txBody>
+          <a:bodyPr rtlCol="0" anchor="ctr"/>
+          <a:lstStyle/>
+          <a:p>
+            <a:pPr algn="ctr"/>
+            <a:endParaRPr/>
+          </a:p>
+        </p:txBody>
+      </p:sp>
+      <p:sp>
+        <p:nvSpPr>
+          <p:cNvPr id="13" name="Rectangle 12"/>
+          <p:cNvSpPr/>
+          <p:nvPr/>
+        </p:nvSpPr>
+        <p:spPr>
+          <a:xfrm>
+            <a:off x="6217920" y="1783080"/>
+            <a:ext cx="64008" cy="2057400"/>
+          </a:xfrm>
+          <a:prstGeom prst="rect">
+            <a:avLst/>
+          </a:prstGeom>
+          <a:solidFill>
+            <a:srgbClr val="C9A96E"/>
+          </a:solidFill>
+          <a:ln>
+            <a:noFill/>
+          </a:ln>
+        </p:spPr>
+        <p:style>
+          <a:lnRef idx="1">
+            <a:schemeClr val="accent1"/>
+          </a:lnRef>
+          <a:fillRef idx="3">
+            <a:schemeClr val="accent1"/>
+          </a:fillRef>
+          <a:effectRef idx="2">
+            <a:schemeClr val="accent1"/>
+          </a:effectRef>
+          <a:fontRef idx="minor">
+            <a:schemeClr val="lt1"/>
+          </a:fontRef>
+        </p:style>
+        <p:txBody>
+          <a:bodyPr rtlCol="0" anchor="ctr"/>
+          <a:lstStyle/>
+          <a:p>
+            <a:pPr algn="ctr"/>
+            <a:endParaRPr/>
+          </a:p>
+        </p:txBody>
+      </p:sp>
+      <p:sp>
+        <p:nvSpPr>
+          <p:cNvPr id="14" name="TextBox 13"/>
+          <p:cNvSpPr txBox="1"/>
+          <p:nvPr/>
+        </p:nvSpPr>
+        <p:spPr>
+          <a:xfrm>
+            <a:off x="6400800" y="1874520"/>
+            <a:ext cx="5212080" cy="365760"/>
+          </a:xfrm>
+          <a:prstGeom prst="rect">
+            <a:avLst/>
+          </a:prstGeom>
+          <a:noFill/>
+        </p:spPr>
+        <p:txBody>
+          <a:bodyPr wrap="square" anchor="t">
+            <a:spAutoFit/>
+          </a:bodyPr>
+          <a:lstStyle/>
+          <a:p>
+            <a:pPr algn="l"/>
+            <a:r>
+              <a:rPr sz="1800" b="1" i="0">
+                <a:solidFill>
+                  <a:srgbClr val="4A3728"/>
+                </a:solidFill>
+                <a:latin typeface="Liberation Serif"/>
+              </a:rPr>
+              <a:t>Token Authentication</a:t>
+            </a:r>
+          </a:p>
+        </p:txBody>
+      </p:sp>
+      <p:sp>
+        <p:nvSpPr>
+          <p:cNvPr id="15" name="TextBox 14"/>
+          <p:cNvSpPr txBox="1"/>
+          <p:nvPr/>
+        </p:nvSpPr>
+        <p:spPr>
+          <a:xfrm>
+            <a:off x="6400800" y="2286000"/>
+            <a:ext cx="5212080" cy="320040"/>
+          </a:xfrm>
+          <a:prstGeom prst="rect">
+            <a:avLst/>
+          </a:prstGeom>
+          <a:noFill/>
+        </p:spPr>
+        <p:txBody>
+          <a:bodyPr wrap="square" anchor="t">
+            <a:spAutoFit/>
+          </a:bodyPr>
+          <a:lstStyle/>
+          <a:p>
+            <a:pPr algn="l"/>
+            <a:r>
+              <a:rPr sz="1200" b="1" i="1">
+                <a:solidFill>
+                  <a:srgbClr val="A8894E"/>
+                </a:solidFill>
+                <a:latin typeface="Calibri"/>
+              </a:rPr>
+              <a:t>JWT + HTTP-only Cookies</a:t>
+            </a:r>
+          </a:p>
+        </p:txBody>
+      </p:sp>
+      <p:sp>
+        <p:nvSpPr>
+          <p:cNvPr id="16" name="TextBox 15"/>
+          <p:cNvSpPr txBox="1"/>
+          <p:nvPr/>
+        </p:nvSpPr>
+        <p:spPr>
+          <a:xfrm>
+            <a:off x="6400800" y="2651760"/>
+            <a:ext cx="5212080" cy="1143000"/>
+          </a:xfrm>
+          <a:prstGeom prst="rect">
+            <a:avLst/>
+          </a:prstGeom>
+          <a:noFill/>
+        </p:spPr>
+        <p:txBody>
+          <a:bodyPr wrap="square">
+            <a:spAutoFit/>
+          </a:bodyPr>
+          <a:lstStyle/>
+          <a:p>
+            <a:pPr algn="l">
+              <a:lnSpc>
+                <a:spcPct val="125000"/>
+              </a:lnSpc>
+            </a:pPr>
+            <a:r>
+              <a:rPr sz="1100" b="1">
+                <a:solidFill>
+                  <a:srgbClr val="C9A96E"/>
+                </a:solidFill>
+                <a:latin typeface="Calibri"/>
+              </a:rPr>
+              <a:t>•  </a:t>
+            </a:r>
+            <a:r>
+              <a:rPr sz="1100">
+                <a:solidFill>
+                  <a:srgbClr val="5C4D3E"/>
+                </a:solidFill>
+                <a:latin typeface="Calibri"/>
+              </a:rPr>
+              <a:t>Signed with secret + 7-day expiry</a:t>
+            </a:r>
+          </a:p>
+          <a:p>
+            <a:pPr algn="l">
+              <a:lnSpc>
+                <a:spcPct val="125000"/>
+              </a:lnSpc>
+            </a:pPr>
+            <a:r>
+              <a:rPr sz="1100" b="1">
+                <a:solidFill>
+                  <a:srgbClr val="C9A96E"/>
+                </a:solidFill>
+                <a:latin typeface="Calibri"/>
+              </a:rPr>
+              <a:t>•  </a:t>
+            </a:r>
+            <a:r>
+              <a:rPr sz="1100">
+                <a:solidFill>
+                  <a:srgbClr val="5C4D3E"/>
+                </a:solidFill>
+                <a:latin typeface="Calibri"/>
+              </a:rPr>
+              <a:t>HTTP-only flag blocks XSS theft</a:t>
+            </a:r>
+          </a:p>
+          <a:p>
+            <a:pPr algn="l">
+              <a:lnSpc>
+                <a:spcPct val="125000"/>
+              </a:lnSpc>
+            </a:pPr>
+            <a:r>
+              <a:rPr sz="1100" b="1">
+                <a:solidFill>
+                  <a:srgbClr val="C9A96E"/>
+                </a:solidFill>
+                <a:latin typeface="Calibri"/>
+              </a:rPr>
+              <a:t>•  </a:t>
+            </a:r>
+            <a:r>
+              <a:rPr sz="1100">
+                <a:solidFill>
+                  <a:srgbClr val="5C4D3E"/>
+                </a:solidFill>
+                <a:latin typeface="Calibri"/>
+              </a:rPr>
+              <a:t>SameSite + Secure in production</a:t>
+            </a:r>
+          </a:p>
+        </p:txBody>
+      </p:sp>
+      <p:sp>
+        <p:nvSpPr>
+          <p:cNvPr id="17" name="Rectangle 16"/>
+          <p:cNvSpPr/>
+          <p:nvPr/>
+        </p:nvSpPr>
+        <p:spPr>
+          <a:xfrm>
+            <a:off x="548640" y="3977639"/>
+            <a:ext cx="5486400" cy="2057400"/>
+          </a:xfrm>
+          <a:prstGeom prst="rect">
+            <a:avLst/>
+          </a:prstGeom>
+          <a:solidFill>
+            <a:srgbClr val="FDFBF7"/>
+          </a:solidFill>
+          <a:ln w="9525">
+            <a:solidFill>
+              <a:srgbClr val="C9A96E"/>
+            </a:solidFill>
+          </a:ln>
+        </p:spPr>
+        <p:style>
+          <a:lnRef idx="1">
+            <a:schemeClr val="accent1"/>
+          </a:lnRef>
+          <a:fillRef idx="3">
+            <a:schemeClr val="accent1"/>
+          </a:fillRef>
+          <a:effectRef idx="2">
+            <a:schemeClr val="accent1"/>
+          </a:effectRef>
+          <a:fontRef idx="minor">
+            <a:schemeClr val="lt1"/>
+          </a:fontRef>
+        </p:style>
+        <p:txBody>
+          <a:bodyPr rtlCol="0" anchor="ctr"/>
+          <a:lstStyle/>
+          <a:p>
+            <a:pPr algn="ctr"/>
+            <a:endParaRPr/>
+          </a:p>
+        </p:txBody>
+      </p:sp>
+      <p:sp>
+        <p:nvSpPr>
+          <p:cNvPr id="18" name="Rectangle 17"/>
+          <p:cNvSpPr/>
+          <p:nvPr/>
+        </p:nvSpPr>
+        <p:spPr>
+          <a:xfrm>
+            <a:off x="548640" y="3977639"/>
+            <a:ext cx="64008" cy="2057400"/>
+          </a:xfrm>
+          <a:prstGeom prst="rect">
+            <a:avLst/>
+          </a:prstGeom>
+          <a:solidFill>
+            <a:srgbClr val="C9A96E"/>
+          </a:solidFill>
+          <a:ln>
+            <a:noFill/>
+          </a:ln>
+        </p:spPr>
+        <p:style>
+          <a:lnRef idx="1">
+            <a:schemeClr val="accent1"/>
+          </a:lnRef>
+          <a:fillRef idx="3">
+            <a:schemeClr val="accent1"/>
+          </a:fillRef>
+          <a:effectRef idx="2">
+            <a:schemeClr val="accent1"/>
+          </a:effectRef>
+          <a:fontRef idx="minor">
+            <a:schemeClr val="lt1"/>
+          </a:fontRef>
+        </p:style>
+        <p:txBody>
+          <a:bodyPr rtlCol="0" anchor="ctr"/>
+          <a:lstStyle/>
+          <a:p>
+            <a:pPr algn="ctr"/>
+            <a:endParaRPr/>
+          </a:p>
+        </p:txBody>
+      </p:sp>
+      <p:sp>
+        <p:nvSpPr>
+          <p:cNvPr id="19" name="TextBox 18"/>
+          <p:cNvSpPr txBox="1"/>
+          <p:nvPr/>
+        </p:nvSpPr>
+        <p:spPr>
+          <a:xfrm>
+            <a:off x="731520" y="4069079"/>
+            <a:ext cx="5212080" cy="365760"/>
+          </a:xfrm>
+          <a:prstGeom prst="rect">
+            <a:avLst/>
+          </a:prstGeom>
+          <a:noFill/>
+        </p:spPr>
+        <p:txBody>
+          <a:bodyPr wrap="square" anchor="t">
+            <a:spAutoFit/>
+          </a:bodyPr>
+          <a:lstStyle/>
+          <a:p>
+            <a:pPr algn="l"/>
+            <a:r>
+              <a:rPr sz="1800" b="1" i="0">
+                <a:solidFill>
+                  <a:srgbClr val="4A3728"/>
+                </a:solidFill>
+                <a:latin typeface="Liberation Serif"/>
+              </a:rPr>
+              <a:t>Authorization Layer</a:t>
+            </a:r>
+          </a:p>
+        </p:txBody>
+      </p:sp>
+      <p:sp>
+        <p:nvSpPr>
+          <p:cNvPr id="20" name="TextBox 19"/>
+          <p:cNvSpPr txBox="1"/>
+          <p:nvPr/>
+        </p:nvSpPr>
+        <p:spPr>
+          <a:xfrm>
+            <a:off x="731520" y="4480559"/>
+            <a:ext cx="5212080" cy="320040"/>
+          </a:xfrm>
+          <a:prstGeom prst="rect">
+            <a:avLst/>
+          </a:prstGeom>
+          <a:noFill/>
+        </p:spPr>
+        <p:txBody>
+          <a:bodyPr wrap="square" anchor="t">
+            <a:spAutoFit/>
+          </a:bodyPr>
+          <a:lstStyle/>
+          <a:p>
+            <a:pPr algn="l"/>
+            <a:r>
+              <a:rPr sz="1200" b="1" i="1">
+                <a:solidFill>
+                  <a:srgbClr val="A8894E"/>
+                </a:solidFill>
+                <a:latin typeface="Calibri"/>
+              </a:rPr>
+              <a:t>Role-Based Access Control</a:t>
+            </a:r>
+          </a:p>
+        </p:txBody>
+      </p:sp>
+      <p:sp>
+        <p:nvSpPr>
+          <p:cNvPr id="21" name="TextBox 20"/>
+          <p:cNvSpPr txBox="1"/>
+          <p:nvPr/>
+        </p:nvSpPr>
+        <p:spPr>
+          <a:xfrm>
+            <a:off x="731520" y="4846319"/>
+            <a:ext cx="5212080" cy="1143000"/>
+          </a:xfrm>
+          <a:prstGeom prst="rect">
+            <a:avLst/>
+          </a:prstGeom>
+          <a:noFill/>
+        </p:spPr>
+        <p:txBody>
+          <a:bodyPr wrap="square">
+            <a:spAutoFit/>
+          </a:bodyPr>
+          <a:lstStyle/>
+          <a:p>
+            <a:pPr algn="l">
+              <a:lnSpc>
+                <a:spcPct val="125000"/>
+              </a:lnSpc>
+            </a:pPr>
+            <a:r>
+              <a:rPr sz="1100" b="1">
+                <a:solidFill>
+                  <a:srgbClr val="C9A96E"/>
+                </a:solidFill>
+                <a:latin typeface="Calibri"/>
+              </a:rPr>
+              <a:t>•  </a:t>
+            </a:r>
+            <a:r>
+              <a:rPr sz="1100">
+                <a:solidFill>
+                  <a:srgbClr val="5C4D3E"/>
+                </a:solidFill>
+                <a:latin typeface="Calibri"/>
+              </a:rPr>
+              <a:t>Roles: client, admin, vendor</a:t>
+            </a:r>
+          </a:p>
+          <a:p>
+            <a:pPr algn="l">
+              <a:lnSpc>
+                <a:spcPct val="125000"/>
+              </a:lnSpc>
+            </a:pPr>
+            <a:r>
+              <a:rPr sz="1100" b="1">
+                <a:solidFill>
+                  <a:srgbClr val="C9A96E"/>
+                </a:solidFill>
+                <a:latin typeface="Calibri"/>
+              </a:rPr>
+              <a:t>•  </a:t>
+            </a:r>
+            <a:r>
+              <a:rPr sz="1100">
+                <a:solidFill>
+                  <a:srgbClr val="5C4D3E"/>
+                </a:solidFill>
+                <a:latin typeface="Calibri"/>
+              </a:rPr>
+              <a:t>authMiddleware guards all routes</a:t>
+            </a:r>
+          </a:p>
+          <a:p>
+            <a:pPr algn="l">
+              <a:lnSpc>
+                <a:spcPct val="125000"/>
+              </a:lnSpc>
+            </a:pPr>
+            <a:r>
+              <a:rPr sz="1100" b="1">
+                <a:solidFill>
+                  <a:srgbClr val="C9A96E"/>
+                </a:solidFill>
+                <a:latin typeface="Calibri"/>
+              </a:rPr>
+              <a:t>•  </a:t>
+            </a:r>
+            <a:r>
+              <a:rPr sz="1100">
+                <a:solidFill>
+                  <a:srgbClr val="5C4D3E"/>
+                </a:solidFill>
+                <a:latin typeface="Calibri"/>
+              </a:rPr>
+              <a:t>Admin-only endpoints are gated</a:t>
+            </a:r>
+          </a:p>
+        </p:txBody>
+      </p:sp>
+      <p:sp>
+        <p:nvSpPr>
+          <p:cNvPr id="22" name="Rectangle 21"/>
+          <p:cNvSpPr/>
+          <p:nvPr/>
+        </p:nvSpPr>
+        <p:spPr>
+          <a:xfrm>
+            <a:off x="6217920" y="3977639"/>
+            <a:ext cx="5486400" cy="2057400"/>
+          </a:xfrm>
+          <a:prstGeom prst="rect">
+            <a:avLst/>
+          </a:prstGeom>
+          <a:solidFill>
+            <a:srgbClr val="FDFBF7"/>
+          </a:solidFill>
+          <a:ln w="9525">
+            <a:solidFill>
+              <a:srgbClr val="C9A96E"/>
+            </a:solidFill>
+          </a:ln>
+        </p:spPr>
+        <p:style>
+          <a:lnRef idx="1">
+            <a:schemeClr val="accent1"/>
+          </a:lnRef>
+          <a:fillRef idx="3">
+            <a:schemeClr val="accent1"/>
+          </a:fillRef>
+          <a:effectRef idx="2">
+            <a:schemeClr val="accent1"/>
+          </a:effectRef>
+          <a:fontRef idx="minor">
+            <a:schemeClr val="lt1"/>
+          </a:fontRef>
+        </p:style>
+        <p:txBody>
+          <a:bodyPr rtlCol="0" anchor="ctr"/>
+          <a:lstStyle/>
+          <a:p>
+            <a:pPr algn="ctr"/>
+            <a:endParaRPr/>
+          </a:p>
+        </p:txBody>
+      </p:sp>
+      <p:sp>
+        <p:nvSpPr>
+          <p:cNvPr id="23" name="Rectangle 22"/>
+          <p:cNvSpPr/>
+          <p:nvPr/>
+        </p:nvSpPr>
+        <p:spPr>
+          <a:xfrm>
+            <a:off x="6217920" y="3977639"/>
+            <a:ext cx="64008" cy="2057400"/>
+          </a:xfrm>
+          <a:prstGeom prst="rect">
+            <a:avLst/>
+          </a:prstGeom>
+          <a:solidFill>
+            <a:srgbClr val="C9A96E"/>
+          </a:solidFill>
+          <a:ln>
+            <a:noFill/>
+          </a:ln>
+        </p:spPr>
+        <p:style>
+          <a:lnRef idx="1">
+            <a:schemeClr val="accent1"/>
+          </a:lnRef>
+          <a:fillRef idx="3">
+            <a:schemeClr val="accent1"/>
+          </a:fillRef>
+          <a:effectRef idx="2">
+            <a:schemeClr val="accent1"/>
+          </a:effectRef>
+          <a:fontRef idx="minor">
+            <a:schemeClr val="lt1"/>
+          </a:fontRef>
+        </p:style>
+        <p:txBody>
+          <a:bodyPr rtlCol="0" anchor="ctr"/>
+          <a:lstStyle/>
+          <a:p>
+            <a:pPr algn="ctr"/>
+            <a:endParaRPr/>
+          </a:p>
+        </p:txBody>
+      </p:sp>
+      <p:sp>
+        <p:nvSpPr>
+          <p:cNvPr id="24" name="TextBox 23"/>
+          <p:cNvSpPr txBox="1"/>
+          <p:nvPr/>
+        </p:nvSpPr>
+        <p:spPr>
+          <a:xfrm>
+            <a:off x="6400800" y="4069079"/>
+            <a:ext cx="5212080" cy="365760"/>
+          </a:xfrm>
+          <a:prstGeom prst="rect">
+            <a:avLst/>
+          </a:prstGeom>
+          <a:noFill/>
+        </p:spPr>
+        <p:txBody>
+          <a:bodyPr wrap="square" anchor="t">
+            <a:spAutoFit/>
+          </a:bodyPr>
+          <a:lstStyle/>
+          <a:p>
+            <a:pPr algn="l"/>
+            <a:r>
+              <a:rPr sz="1800" b="1" i="0">
+                <a:solidFill>
+                  <a:srgbClr val="4A3728"/>
+                </a:solidFill>
+                <a:latin typeface="Liberation Serif"/>
+              </a:rPr>
+              <a:t>Network &amp; CORS</a:t>
+            </a:r>
+          </a:p>
+        </p:txBody>
+      </p:sp>
+      <p:sp>
+        <p:nvSpPr>
+          <p:cNvPr id="25" name="TextBox 24"/>
+          <p:cNvSpPr txBox="1"/>
+          <p:nvPr/>
+        </p:nvSpPr>
+        <p:spPr>
+          <a:xfrm>
+            <a:off x="6400800" y="4480559"/>
+            <a:ext cx="5212080" cy="320040"/>
+          </a:xfrm>
+          <a:prstGeom prst="rect">
+            <a:avLst/>
+          </a:prstGeom>
+          <a:noFill/>
+        </p:spPr>
+        <p:txBody>
+          <a:bodyPr wrap="square" anchor="t">
+            <a:spAutoFit/>
+          </a:bodyPr>
+          <a:lstStyle/>
+          <a:p>
+            <a:pPr algn="l"/>
+            <a:r>
+              <a:rPr sz="1200" b="1" i="1">
+                <a:solidFill>
+                  <a:srgbClr val="A8894E"/>
+                </a:solidFill>
+                <a:latin typeface="Calibri"/>
+              </a:rPr>
+              <a:t>Whitelist + Credentials</a:t>
+            </a:r>
+          </a:p>
+        </p:txBody>
+      </p:sp>
+      <p:sp>
+        <p:nvSpPr>
+          <p:cNvPr id="26" name="TextBox 25"/>
+          <p:cNvSpPr txBox="1"/>
+          <p:nvPr/>
+        </p:nvSpPr>
+        <p:spPr>
+          <a:xfrm>
+            <a:off x="6400800" y="4846319"/>
+            <a:ext cx="5212080" cy="1143000"/>
+          </a:xfrm>
+          <a:prstGeom prst="rect">
+            <a:avLst/>
+          </a:prstGeom>
+          <a:noFill/>
+        </p:spPr>
+        <p:txBody>
+          <a:bodyPr wrap="square">
+            <a:spAutoFit/>
+          </a:bodyPr>
+          <a:lstStyle/>
+          <a:p>
+            <a:pPr algn="l">
+              <a:lnSpc>
+                <a:spcPct val="125000"/>
+              </a:lnSpc>
+            </a:pPr>
+            <a:r>
+              <a:rPr sz="1100" b="1">
+                <a:solidFill>
+                  <a:srgbClr val="C9A96E"/>
+                </a:solidFill>
+                <a:latin typeface="Calibri"/>
+              </a:rPr>
+              <a:t>•  </a:t>
+            </a:r>
+            <a:r>
+              <a:rPr sz="1100">
+                <a:solidFill>
+                  <a:srgbClr val="5C4D3E"/>
+                </a:solidFill>
+                <a:latin typeface="Calibri"/>
+              </a:rPr>
+              <a:t>Origin whitelist for allowed domains</a:t>
+            </a:r>
+          </a:p>
+          <a:p>
+            <a:pPr algn="l">
+              <a:lnSpc>
+                <a:spcPct val="125000"/>
+              </a:lnSpc>
+            </a:pPr>
+            <a:r>
+              <a:rPr sz="1100" b="1">
+                <a:solidFill>
+                  <a:srgbClr val="C9A96E"/>
+                </a:solidFill>
+                <a:latin typeface="Calibri"/>
+              </a:rPr>
+              <a:t>•  </a:t>
+            </a:r>
+            <a:r>
+              <a:rPr sz="1100">
+                <a:solidFill>
+                  <a:srgbClr val="5C4D3E"/>
+                </a:solidFill>
+                <a:latin typeface="Calibri"/>
+              </a:rPr>
+              <a:t>Credentials flag for cookie flow</a:t>
+            </a:r>
+          </a:p>
+          <a:p>
+            <a:pPr algn="l">
+              <a:lnSpc>
+                <a:spcPct val="125000"/>
+              </a:lnSpc>
+            </a:pPr>
+            <a:r>
+              <a:rPr sz="1100" b="1">
+                <a:solidFill>
+                  <a:srgbClr val="C9A96E"/>
+                </a:solidFill>
+                <a:latin typeface="Calibri"/>
+              </a:rPr>
+              <a:t>•  </a:t>
+            </a:r>
+            <a:r>
+              <a:rPr sz="1100">
+                <a:solidFill>
+                  <a:srgbClr val="5C4D3E"/>
+                </a:solidFill>
+                <a:latin typeface="Calibri"/>
+              </a:rPr>
+              <a:t>trust proxy for secure headers</a:t>
+            </a:r>
+          </a:p>
+        </p:txBody>
+      </p:sp>
+      <p:sp>
+        <p:nvSpPr>
+          <p:cNvPr id="27" name="TextBox 26"/>
+          <p:cNvSpPr txBox="1"/>
+          <p:nvPr/>
+        </p:nvSpPr>
+        <p:spPr>
+          <a:xfrm>
+            <a:off x="548640" y="6172200"/>
+            <a:ext cx="11155680" cy="274320"/>
+          </a:xfrm>
+          <a:prstGeom prst="rect">
+            <a:avLst/>
+          </a:prstGeom>
+          <a:noFill/>
+        </p:spPr>
+        <p:txBody>
+          <a:bodyPr wrap="square" anchor="t">
+            <a:spAutoFit/>
+          </a:bodyPr>
+          <a:lstStyle/>
+          <a:p>
+            <a:pPr algn="ctr"/>
+            <a:r>
+              <a:rPr sz="1100" b="1" i="1">
+                <a:solidFill>
+                  <a:srgbClr val="8B6F47"/>
+                </a:solidFill>
+                <a:latin typeface="Calibri"/>
+              </a:rPr>
+              <a:t>Login  →  bcrypt.compare()  →  jwt.sign()  →  set HTTP-only cookie  →  middleware verifies on every request</a:t>
+            </a:r>
+          </a:p>
+        </p:txBody>
+      </p:sp>
+      <p:sp>
+        <p:nvSpPr>
+          <p:cNvPr id="28" name="TextBox 27"/>
+          <p:cNvSpPr txBox="1"/>
+          <p:nvPr/>
+        </p:nvSpPr>
+        <p:spPr>
+          <a:xfrm>
+            <a:off x="10789920" y="6510528"/>
+            <a:ext cx="1188720" cy="274320"/>
+          </a:xfrm>
+          <a:prstGeom prst="rect">
+            <a:avLst/>
+          </a:prstGeom>
+          <a:noFill/>
+        </p:spPr>
+        <p:txBody>
+          <a:bodyPr wrap="square" anchor="t">
+            <a:spAutoFit/>
+          </a:bodyPr>
+          <a:lstStyle/>
+          <a:p>
+            <a:pPr algn="r"/>
+            <a:r>
+              <a:rPr sz="1000" b="0" i="1">
+                <a:solidFill>
+                  <a:srgbClr val="A8894E"/>
+                </a:solidFill>
+                <a:latin typeface="Calibri"/>
+              </a:rPr>
+              <a:t>Page 12</a:t>
+            </a:r>
+          </a:p>
+        </p:txBody>
+      </p:sp>
+    </p:spTree>
+  </p:cSld>
+  <p:clrMapOvr>
+    <a:masterClrMapping/>
+  </p:clrMapOvr>
+</p:sld>
+</file>
+
+<file path=ppt/slides/slide13.xml><?xml version="1.0" encoding="utf-8"?>
+<p:sld xmlns:a="http://schemas.openxmlformats.org/drawingml/2006/main" xmlns:r="http://schemas.openxmlformats.org/officeDocument/2006/relationships" xmlns:p="http://schemas.openxmlformats.org/presentationml/2006/main">
+  <p:cSld>
+    <p:spTree>
+      <p:nvGrpSpPr>
+        <p:cNvPr id="1" name=""/>
+        <p:cNvGrpSpPr/>
+        <p:nvPr/>
+      </p:nvGrpSpPr>
+      <p:grpSpPr>
+        <a:xfrm>
+          <a:off x="0" y="0"/>
+          <a:ext cx="0" cy="0"/>
+          <a:chOff x="0" y="0"/>
+          <a:chExt cx="0" cy="0"/>
+        </a:xfrm>
+      </p:grpSpPr>
+      <p:sp>
+        <p:nvSpPr>
+          <p:cNvPr id="2" name="Rectangle 1"/>
+          <p:cNvSpPr/>
+          <p:nvPr/>
+        </p:nvSpPr>
+        <p:spPr>
+          <a:xfrm>
+            <a:off x="0" y="0"/>
+            <a:ext cx="12191695" cy="6858000"/>
+          </a:xfrm>
+          <a:prstGeom prst="rect">
+            <a:avLst/>
+          </a:prstGeom>
+          <a:solidFill>
+            <a:srgbClr val="FDF8F3"/>
+          </a:solidFill>
+          <a:ln>
+            <a:noFill/>
+          </a:ln>
+        </p:spPr>
+        <p:style>
+          <a:lnRef idx="1">
+            <a:schemeClr val="accent1"/>
+          </a:lnRef>
+          <a:fillRef idx="3">
+            <a:schemeClr val="accent1"/>
+          </a:fillRef>
+          <a:effectRef idx="2">
+            <a:schemeClr val="accent1"/>
+          </a:effectRef>
+          <a:fontRef idx="minor">
+            <a:schemeClr val="lt1"/>
+          </a:fontRef>
+        </p:style>
+        <p:txBody>
+          <a:bodyPr rtlCol="0" anchor="ctr"/>
+          <a:lstStyle/>
+          <a:p>
+            <a:pPr algn="ctr"/>
+            <a:endParaRPr/>
+          </a:p>
+        </p:txBody>
+      </p:sp>
+      <p:sp>
+        <p:nvSpPr>
+          <p:cNvPr id="3" name="Rectangle 2"/>
+          <p:cNvSpPr/>
+          <p:nvPr/>
+        </p:nvSpPr>
+        <p:spPr>
+          <a:xfrm>
+            <a:off x="0" y="0"/>
+            <a:ext cx="12191695" cy="1097280"/>
+          </a:xfrm>
+          <a:prstGeom prst="rect">
+            <a:avLst/>
+          </a:prstGeom>
+          <a:solidFill>
+            <a:srgbClr val="F5ECDD"/>
+          </a:solidFill>
+          <a:ln>
+            <a:noFill/>
+          </a:ln>
+        </p:spPr>
+        <p:style>
+          <a:lnRef idx="1">
+            <a:schemeClr val="accent1"/>
+          </a:lnRef>
+          <a:fillRef idx="3">
+            <a:schemeClr val="accent1"/>
+          </a:fillRef>
+          <a:effectRef idx="2">
+            <a:schemeClr val="accent1"/>
+          </a:effectRef>
+          <a:fontRef idx="minor">
+            <a:schemeClr val="lt1"/>
+          </a:fontRef>
+        </p:style>
+        <p:txBody>
+          <a:bodyPr rtlCol="0" anchor="ctr"/>
+          <a:lstStyle/>
+          <a:p>
+            <a:pPr algn="ctr"/>
+            <a:endParaRPr/>
+          </a:p>
+        </p:txBody>
+      </p:sp>
+      <p:sp>
+        <p:nvSpPr>
+          <p:cNvPr id="4" name="TextBox 3"/>
+          <p:cNvSpPr txBox="1"/>
+          <p:nvPr/>
+        </p:nvSpPr>
+        <p:spPr>
+          <a:xfrm>
+            <a:off x="548640" y="228600"/>
+            <a:ext cx="10972800" cy="731520"/>
+          </a:xfrm>
+          <a:prstGeom prst="rect">
+            <a:avLst/>
+          </a:prstGeom>
+          <a:noFill/>
+        </p:spPr>
+        <p:txBody>
+          <a:bodyPr wrap="square" anchor="ctr">
+            <a:spAutoFit/>
+          </a:bodyPr>
+          <a:lstStyle/>
+          <a:p>
+            <a:pPr algn="l"/>
+            <a:r>
+              <a:rPr sz="3400" b="1" i="0">
+                <a:solidFill>
+                  <a:srgbClr val="4A3728"/>
+                </a:solidFill>
+                <a:latin typeface="Liberation Serif"/>
+              </a:rPr>
+              <a:t>REST API Endpoints Reference</a:t>
+            </a:r>
+          </a:p>
+        </p:txBody>
+      </p:sp>
+      <p:sp>
+        <p:nvSpPr>
+          <p:cNvPr id="5" name="Rectangle 4"/>
+          <p:cNvSpPr/>
+          <p:nvPr/>
+        </p:nvSpPr>
+        <p:spPr>
+          <a:xfrm>
+            <a:off x="566928" y="932688"/>
+            <a:ext cx="2011680" cy="38100"/>
+          </a:xfrm>
+          <a:prstGeom prst="rect">
+            <a:avLst/>
+          </a:prstGeom>
+          <a:solidFill>
+            <a:srgbClr val="C9A96E"/>
+          </a:solidFill>
+          <a:ln>
+            <a:noFill/>
+          </a:ln>
+        </p:spPr>
+        <p:style>
+          <a:lnRef idx="1">
+            <a:schemeClr val="accent1"/>
+          </a:lnRef>
+          <a:fillRef idx="3">
+            <a:schemeClr val="accent1"/>
+          </a:fillRef>
+          <a:effectRef idx="2">
+            <a:schemeClr val="accent1"/>
+          </a:effectRef>
+          <a:fontRef idx="minor">
+            <a:schemeClr val="lt1"/>
+          </a:fontRef>
+        </p:style>
+        <p:txBody>
+          <a:bodyPr rtlCol="0" anchor="ctr"/>
+          <a:lstStyle/>
+          <a:p>
+            <a:pPr algn="ctr"/>
+            <a:endParaRPr/>
+          </a:p>
+        </p:txBody>
+      </p:sp>
+      <p:sp>
+        <p:nvSpPr>
+          <p:cNvPr id="6" name="TextBox 5"/>
+          <p:cNvSpPr txBox="1"/>
+          <p:nvPr/>
+        </p:nvSpPr>
+        <p:spPr>
+          <a:xfrm>
+            <a:off x="548640" y="1234440"/>
+            <a:ext cx="11155680" cy="411480"/>
+          </a:xfrm>
+          <a:prstGeom prst="rect">
+            <a:avLst/>
+          </a:prstGeom>
+          <a:noFill/>
+        </p:spPr>
+        <p:txBody>
+          <a:bodyPr wrap="square" anchor="t">
+            <a:spAutoFit/>
+          </a:bodyPr>
+          <a:lstStyle/>
+          <a:p>
+            <a:pPr algn="l"/>
+            <a:r>
+              <a:rPr sz="1300" b="0" i="1">
+                <a:solidFill>
+                  <a:srgbClr val="8B6F47"/>
+                </a:solidFill>
+                <a:latin typeface="Calibri"/>
+              </a:rPr>
+              <a:t>40+ RESTful endpoints organized across 12 route modules, following resource-based URL conventions and standard HTTP semantics.</a:t>
+            </a:r>
+          </a:p>
+        </p:txBody>
+      </p:sp>
+      <p:sp>
+        <p:nvSpPr>
+          <p:cNvPr id="7" name="Rectangle 6"/>
+          <p:cNvSpPr/>
+          <p:nvPr/>
+        </p:nvSpPr>
+        <p:spPr>
+          <a:xfrm>
+            <a:off x="548640" y="1783080"/>
+            <a:ext cx="3703320" cy="2148840"/>
+          </a:xfrm>
+          <a:prstGeom prst="rect">
+            <a:avLst/>
+          </a:prstGeom>
+          <a:solidFill>
+            <a:srgbClr val="FDFBF7"/>
+          </a:solidFill>
+          <a:ln w="9525">
+            <a:solidFill>
+              <a:srgbClr val="C9A96E"/>
+            </a:solidFill>
+          </a:ln>
+        </p:spPr>
+        <p:style>
+          <a:lnRef idx="1">
+            <a:schemeClr val="accent1"/>
+          </a:lnRef>
+          <a:fillRef idx="3">
+            <a:schemeClr val="accent1"/>
+          </a:fillRef>
+          <a:effectRef idx="2">
+            <a:schemeClr val="accent1"/>
+          </a:effectRef>
+          <a:fontRef idx="minor">
+            <a:schemeClr val="lt1"/>
+          </a:fontRef>
+        </p:style>
+        <p:txBody>
+          <a:bodyPr rtlCol="0" anchor="ctr"/>
+          <a:lstStyle/>
+          <a:p>
+            <a:pPr algn="ctr"/>
+            <a:endParaRPr/>
+          </a:p>
+        </p:txBody>
+      </p:sp>
+      <p:sp>
+        <p:nvSpPr>
+          <p:cNvPr id="8" name="Rectangle 7"/>
+          <p:cNvSpPr/>
+          <p:nvPr/>
+        </p:nvSpPr>
+        <p:spPr>
+          <a:xfrm>
+            <a:off x="548640" y="1783080"/>
+            <a:ext cx="64008" cy="2148840"/>
+          </a:xfrm>
+          <a:prstGeom prst="rect">
+            <a:avLst/>
+          </a:prstGeom>
+          <a:solidFill>
+            <a:srgbClr val="C9A96E"/>
+          </a:solidFill>
+          <a:ln>
+            <a:noFill/>
+          </a:ln>
+        </p:spPr>
+        <p:style>
+          <a:lnRef idx="1">
+            <a:schemeClr val="accent1"/>
+          </a:lnRef>
+          <a:fillRef idx="3">
+            <a:schemeClr val="accent1"/>
+          </a:fillRef>
+          <a:effectRef idx="2">
+            <a:schemeClr val="accent1"/>
+          </a:effectRef>
+          <a:fontRef idx="minor">
+            <a:schemeClr val="lt1"/>
+          </a:fontRef>
+        </p:style>
+        <p:txBody>
+          <a:bodyPr rtlCol="0" anchor="ctr"/>
+          <a:lstStyle/>
+          <a:p>
+            <a:pPr algn="ctr"/>
+            <a:endParaRPr/>
+          </a:p>
+        </p:txBody>
+      </p:sp>
+      <p:sp>
+        <p:nvSpPr>
+          <p:cNvPr id="9" name="TextBox 8"/>
+          <p:cNvSpPr txBox="1"/>
+          <p:nvPr/>
+        </p:nvSpPr>
+        <p:spPr>
+          <a:xfrm>
+            <a:off x="731520" y="1874520"/>
+            <a:ext cx="3429000" cy="365760"/>
+          </a:xfrm>
+          <a:prstGeom prst="rect">
+            <a:avLst/>
+          </a:prstGeom>
+          <a:noFill/>
+        </p:spPr>
+        <p:txBody>
+          <a:bodyPr wrap="square" anchor="t">
+            <a:spAutoFit/>
+          </a:bodyPr>
+          <a:lstStyle/>
+          <a:p>
+            <a:pPr algn="l"/>
+            <a:r>
+              <a:rPr sz="1600" b="1" i="0">
+                <a:solidFill>
+                  <a:srgbClr val="4A3728"/>
+                </a:solidFill>
+                <a:latin typeface="Liberation Serif"/>
+              </a:rPr>
+              <a:t>Authentication</a:t>
+            </a:r>
+          </a:p>
+        </p:txBody>
+      </p:sp>
+      <p:sp>
+        <p:nvSpPr>
+          <p:cNvPr id="10" name="TextBox 9"/>
+          <p:cNvSpPr txBox="1"/>
+          <p:nvPr/>
+        </p:nvSpPr>
+        <p:spPr>
+          <a:xfrm>
+            <a:off x="749808" y="2286000"/>
+            <a:ext cx="3383280" cy="1600200"/>
+          </a:xfrm>
+          <a:prstGeom prst="rect">
+            <a:avLst/>
+          </a:prstGeom>
+          <a:noFill/>
+        </p:spPr>
+        <p:txBody>
+          <a:bodyPr wrap="square">
+            <a:spAutoFit/>
+          </a:bodyPr>
+          <a:lstStyle/>
+          <a:p>
+            <a:pPr>
+              <a:lnSpc>
+                <a:spcPct val="125000"/>
+              </a:lnSpc>
+            </a:pPr>
+            <a:r>
+              <a:rPr sz="1000" b="1" dirty="0">
+                <a:solidFill>
+                  <a:srgbClr val="8B6F47"/>
+                </a:solidFill>
+                <a:latin typeface="Consolas"/>
+              </a:rPr>
+              <a:t>POST   </a:t>
+            </a:r>
+            <a:r>
+              <a:rPr sz="1000" dirty="0">
+                <a:solidFill>
+                  <a:srgbClr val="5C4D3E"/>
+                </a:solidFill>
+                <a:latin typeface="Consolas"/>
+              </a:rPr>
+              <a:t>/</a:t>
+            </a:r>
+            <a:r>
+              <a:rPr sz="1000" dirty="0" err="1">
+                <a:solidFill>
+                  <a:srgbClr val="5C4D3E"/>
+                </a:solidFill>
+                <a:latin typeface="Consolas"/>
+              </a:rPr>
+              <a:t>api</a:t>
+            </a:r>
+            <a:r>
+              <a:rPr sz="1000" dirty="0">
+                <a:solidFill>
+                  <a:srgbClr val="5C4D3E"/>
+                </a:solidFill>
+                <a:latin typeface="Consolas"/>
+              </a:rPr>
+              <a:t>/auth/register</a:t>
+            </a:r>
+          </a:p>
+          <a:p>
+            <a:pPr>
+              <a:lnSpc>
+                <a:spcPct val="125000"/>
+              </a:lnSpc>
+            </a:pPr>
+            <a:r>
+              <a:rPr sz="1000" b="1" dirty="0">
+                <a:solidFill>
+                  <a:srgbClr val="8B6F47"/>
+                </a:solidFill>
+                <a:latin typeface="Consolas"/>
+              </a:rPr>
+              <a:t>POST   </a:t>
+            </a:r>
+            <a:r>
+              <a:rPr sz="1000" dirty="0">
+                <a:solidFill>
+                  <a:srgbClr val="5C4D3E"/>
+                </a:solidFill>
+                <a:latin typeface="Consolas"/>
+              </a:rPr>
+              <a:t>/</a:t>
+            </a:r>
+            <a:r>
+              <a:rPr sz="1000" dirty="0" err="1">
+                <a:solidFill>
+                  <a:srgbClr val="5C4D3E"/>
+                </a:solidFill>
+                <a:latin typeface="Consolas"/>
+              </a:rPr>
+              <a:t>api</a:t>
+            </a:r>
+            <a:r>
+              <a:rPr sz="1000" dirty="0">
+                <a:solidFill>
+                  <a:srgbClr val="5C4D3E"/>
+                </a:solidFill>
+                <a:latin typeface="Consolas"/>
+              </a:rPr>
+              <a:t>/auth/login</a:t>
+            </a:r>
+          </a:p>
+          <a:p>
+            <a:pPr>
+              <a:lnSpc>
+                <a:spcPct val="125000"/>
+              </a:lnSpc>
+            </a:pPr>
+            <a:r>
+              <a:rPr sz="1000" b="1" dirty="0">
+                <a:solidFill>
+                  <a:srgbClr val="8B6F47"/>
+                </a:solidFill>
+                <a:latin typeface="Consolas"/>
+              </a:rPr>
+              <a:t>POST   </a:t>
+            </a:r>
+            <a:r>
+              <a:rPr sz="1000" dirty="0">
+                <a:solidFill>
+                  <a:srgbClr val="5C4D3E"/>
+                </a:solidFill>
+                <a:latin typeface="Consolas"/>
+              </a:rPr>
+              <a:t>/</a:t>
+            </a:r>
+            <a:r>
+              <a:rPr sz="1000" dirty="0" err="1">
+                <a:solidFill>
+                  <a:srgbClr val="5C4D3E"/>
+                </a:solidFill>
+                <a:latin typeface="Consolas"/>
+              </a:rPr>
+              <a:t>api</a:t>
+            </a:r>
+            <a:r>
+              <a:rPr sz="1000" dirty="0">
+                <a:solidFill>
+                  <a:srgbClr val="5C4D3E"/>
+                </a:solidFill>
+                <a:latin typeface="Consolas"/>
+              </a:rPr>
+              <a:t>/auth/logout</a:t>
+            </a:r>
+          </a:p>
+          <a:p>
+            <a:pPr>
+              <a:lnSpc>
+                <a:spcPct val="125000"/>
+              </a:lnSpc>
+            </a:pPr>
+            <a:r>
+              <a:rPr sz="1000" b="1" dirty="0">
+                <a:solidFill>
+                  <a:srgbClr val="A87A2E"/>
+                </a:solidFill>
+                <a:latin typeface="Consolas"/>
+              </a:rPr>
+              <a:t>PUT    </a:t>
+            </a:r>
+            <a:r>
+              <a:rPr sz="1000" dirty="0">
+                <a:solidFill>
+                  <a:srgbClr val="5C4D3E"/>
+                </a:solidFill>
+                <a:latin typeface="Consolas"/>
+              </a:rPr>
+              <a:t>/</a:t>
+            </a:r>
+            <a:r>
+              <a:rPr sz="1000" dirty="0" err="1">
+                <a:solidFill>
+                  <a:srgbClr val="5C4D3E"/>
+                </a:solidFill>
+                <a:latin typeface="Consolas"/>
+              </a:rPr>
+              <a:t>api</a:t>
+            </a:r>
+            <a:r>
+              <a:rPr sz="1000" dirty="0">
+                <a:solidFill>
+                  <a:srgbClr val="5C4D3E"/>
+                </a:solidFill>
+                <a:latin typeface="Consolas"/>
+              </a:rPr>
+              <a:t>/auth/update-profile</a:t>
+            </a:r>
+          </a:p>
+          <a:p>
+            <a:pPr>
+              <a:lnSpc>
+                <a:spcPct val="125000"/>
+              </a:lnSpc>
+            </a:pPr>
+            <a:r>
+              <a:rPr sz="1000" b="1" dirty="0">
+                <a:solidFill>
+                  <a:srgbClr val="A87A2E"/>
+                </a:solidFill>
+                <a:latin typeface="Consolas"/>
+              </a:rPr>
+              <a:t>PUT    </a:t>
+            </a:r>
+            <a:r>
+              <a:rPr sz="1000" dirty="0">
+                <a:solidFill>
+                  <a:srgbClr val="5C4D3E"/>
+                </a:solidFill>
+                <a:latin typeface="Consolas"/>
+              </a:rPr>
+              <a:t>/</a:t>
+            </a:r>
+            <a:r>
+              <a:rPr sz="1000" dirty="0" err="1">
+                <a:solidFill>
+                  <a:srgbClr val="5C4D3E"/>
+                </a:solidFill>
+                <a:latin typeface="Consolas"/>
+              </a:rPr>
+              <a:t>api</a:t>
+            </a:r>
+            <a:r>
+              <a:rPr sz="1000" dirty="0">
+                <a:solidFill>
+                  <a:srgbClr val="5C4D3E"/>
+                </a:solidFill>
+                <a:latin typeface="Consolas"/>
+              </a:rPr>
+              <a:t>/auth/change-password</a:t>
+            </a:r>
+          </a:p>
+        </p:txBody>
+      </p:sp>
+      <p:sp>
+        <p:nvSpPr>
+          <p:cNvPr id="11" name="Rectangle 10"/>
+          <p:cNvSpPr/>
+          <p:nvPr/>
+        </p:nvSpPr>
+        <p:spPr>
+          <a:xfrm>
+            <a:off x="4389120" y="1783080"/>
+            <a:ext cx="3703320" cy="2148840"/>
+          </a:xfrm>
+          <a:prstGeom prst="rect">
+            <a:avLst/>
+          </a:prstGeom>
+          <a:solidFill>
+            <a:srgbClr val="FDFBF7"/>
+          </a:solidFill>
+          <a:ln w="9525">
+            <a:solidFill>
+              <a:srgbClr val="C9A96E"/>
+            </a:solidFill>
+          </a:ln>
+        </p:spPr>
+        <p:style>
+          <a:lnRef idx="1">
+            <a:schemeClr val="accent1"/>
+          </a:lnRef>
+          <a:fillRef idx="3">
+            <a:schemeClr val="accent1"/>
+          </a:fillRef>
+          <a:effectRef idx="2">
+            <a:schemeClr val="accent1"/>
+          </a:effectRef>
+          <a:fontRef idx="minor">
+            <a:schemeClr val="lt1"/>
+          </a:fontRef>
+        </p:style>
+        <p:txBody>
+          <a:bodyPr rtlCol="0" anchor="ctr"/>
+          <a:lstStyle/>
+          <a:p>
+            <a:pPr algn="ctr"/>
+            <a:endParaRPr/>
+          </a:p>
+        </p:txBody>
+      </p:sp>
+      <p:sp>
+        <p:nvSpPr>
+          <p:cNvPr id="12" name="Rectangle 11"/>
+          <p:cNvSpPr/>
+          <p:nvPr/>
+        </p:nvSpPr>
+        <p:spPr>
+          <a:xfrm>
+            <a:off x="4389120" y="1783080"/>
+            <a:ext cx="64008" cy="2148840"/>
+          </a:xfrm>
+          <a:prstGeom prst="rect">
+            <a:avLst/>
+          </a:prstGeom>
+          <a:solidFill>
+            <a:srgbClr val="C9A96E"/>
+          </a:solidFill>
+          <a:ln>
+            <a:noFill/>
+          </a:ln>
+        </p:spPr>
+        <p:style>
+          <a:lnRef idx="1">
+            <a:schemeClr val="accent1"/>
+          </a:lnRef>
+          <a:fillRef idx="3">
+            <a:schemeClr val="accent1"/>
+          </a:fillRef>
+          <a:effectRef idx="2">
+            <a:schemeClr val="accent1"/>
+          </a:effectRef>
+          <a:fontRef idx="minor">
+            <a:schemeClr val="lt1"/>
+          </a:fontRef>
+        </p:style>
+        <p:txBody>
+          <a:bodyPr rtlCol="0" anchor="ctr"/>
+          <a:lstStyle/>
+          <a:p>
+            <a:pPr algn="ctr"/>
+            <a:endParaRPr/>
+          </a:p>
+        </p:txBody>
+      </p:sp>
+      <p:sp>
+        <p:nvSpPr>
+          <p:cNvPr id="13" name="TextBox 12"/>
+          <p:cNvSpPr txBox="1"/>
+          <p:nvPr/>
+        </p:nvSpPr>
+        <p:spPr>
+          <a:xfrm>
+            <a:off x="4572000" y="1874520"/>
+            <a:ext cx="3429000" cy="365760"/>
+          </a:xfrm>
+          <a:prstGeom prst="rect">
+            <a:avLst/>
+          </a:prstGeom>
+          <a:noFill/>
+        </p:spPr>
+        <p:txBody>
+          <a:bodyPr wrap="square" anchor="t">
+            <a:spAutoFit/>
+          </a:bodyPr>
+          <a:lstStyle/>
+          <a:p>
+            <a:pPr algn="l"/>
+            <a:r>
+              <a:rPr sz="1600" b="1" i="0">
+                <a:solidFill>
+                  <a:srgbClr val="4A3728"/>
+                </a:solidFill>
+                <a:latin typeface="Liberation Serif"/>
+              </a:rPr>
+              <a:t>Bookings</a:t>
+            </a:r>
+          </a:p>
+        </p:txBody>
+      </p:sp>
+      <p:sp>
+        <p:nvSpPr>
+          <p:cNvPr id="14" name="TextBox 13"/>
+          <p:cNvSpPr txBox="1"/>
+          <p:nvPr/>
+        </p:nvSpPr>
+        <p:spPr>
+          <a:xfrm>
+            <a:off x="4590288" y="2286000"/>
+            <a:ext cx="3383280" cy="1600200"/>
+          </a:xfrm>
+          <a:prstGeom prst="rect">
+            <a:avLst/>
+          </a:prstGeom>
+          <a:noFill/>
+        </p:spPr>
+        <p:txBody>
+          <a:bodyPr wrap="square">
+            <a:spAutoFit/>
+          </a:bodyPr>
+          <a:lstStyle/>
+          <a:p>
+            <a:pPr>
+              <a:lnSpc>
+                <a:spcPct val="125000"/>
+              </a:lnSpc>
+            </a:pPr>
+            <a:r>
+              <a:rPr sz="1000" b="1">
+                <a:solidFill>
+                  <a:srgbClr val="8B6F47"/>
+                </a:solidFill>
+                <a:latin typeface="Consolas"/>
+              </a:rPr>
+              <a:t>POST   </a:t>
+            </a:r>
+            <a:r>
+              <a:rPr sz="1000">
+                <a:solidFill>
+                  <a:srgbClr val="5C4D3E"/>
+                </a:solidFill>
+                <a:latin typeface="Consolas"/>
+              </a:rPr>
+              <a:t>/api/bookings</a:t>
+            </a:r>
+          </a:p>
+          <a:p>
+            <a:pPr>
+              <a:lnSpc>
+                <a:spcPct val="125000"/>
+              </a:lnSpc>
+            </a:pPr>
+            <a:r>
+              <a:rPr sz="1000" b="1">
+                <a:solidFill>
+                  <a:srgbClr val="4A6E3C"/>
+                </a:solidFill>
+                <a:latin typeface="Consolas"/>
+              </a:rPr>
+              <a:t>GET    </a:t>
+            </a:r>
+            <a:r>
+              <a:rPr sz="1000">
+                <a:solidFill>
+                  <a:srgbClr val="5C4D3E"/>
+                </a:solidFill>
+                <a:latin typeface="Consolas"/>
+              </a:rPr>
+              <a:t>/api/bookings/my-bookings</a:t>
+            </a:r>
+          </a:p>
+          <a:p>
+            <a:pPr>
+              <a:lnSpc>
+                <a:spcPct val="125000"/>
+              </a:lnSpc>
+            </a:pPr>
+            <a:r>
+              <a:rPr sz="1000" b="1">
+                <a:solidFill>
+                  <a:srgbClr val="4A6E3C"/>
+                </a:solidFill>
+                <a:latin typeface="Consolas"/>
+              </a:rPr>
+              <a:t>GET    </a:t>
+            </a:r>
+            <a:r>
+              <a:rPr sz="1000">
+                <a:solidFill>
+                  <a:srgbClr val="5C4D3E"/>
+                </a:solidFill>
+                <a:latin typeface="Consolas"/>
+              </a:rPr>
+              <a:t>/api/bookings/admin/all</a:t>
+            </a:r>
+          </a:p>
+          <a:p>
+            <a:pPr>
+              <a:lnSpc>
+                <a:spcPct val="125000"/>
+              </a:lnSpc>
+            </a:pPr>
+            <a:r>
+              <a:rPr sz="1000" b="1">
+                <a:solidFill>
+                  <a:srgbClr val="4A6E3C"/>
+                </a:solidFill>
+                <a:latin typeface="Consolas"/>
+              </a:rPr>
+              <a:t>GET    </a:t>
+            </a:r>
+            <a:r>
+              <a:rPr sz="1000">
+                <a:solidFill>
+                  <a:srgbClr val="5C4D3E"/>
+                </a:solidFill>
+                <a:latin typeface="Consolas"/>
+              </a:rPr>
+              <a:t>/api/bookings/booked-dates</a:t>
+            </a:r>
+          </a:p>
+          <a:p>
+            <a:pPr>
+              <a:lnSpc>
+                <a:spcPct val="125000"/>
+              </a:lnSpc>
+            </a:pPr>
+            <a:r>
+              <a:rPr sz="1000" b="1">
+                <a:solidFill>
+                  <a:srgbClr val="8B6F47"/>
+                </a:solidFill>
+                <a:latin typeface="Consolas"/>
+              </a:rPr>
+              <a:t>POST   </a:t>
+            </a:r>
+            <a:r>
+              <a:rPr sz="1000">
+                <a:solidFill>
+                  <a:srgbClr val="5C4D3E"/>
+                </a:solidFill>
+                <a:latin typeface="Consolas"/>
+              </a:rPr>
+              <a:t>/api/bookings/rebook/:id</a:t>
+            </a:r>
+          </a:p>
+        </p:txBody>
+      </p:sp>
+      <p:sp>
+        <p:nvSpPr>
+          <p:cNvPr id="15" name="Rectangle 14"/>
+          <p:cNvSpPr/>
+          <p:nvPr/>
+        </p:nvSpPr>
+        <p:spPr>
+          <a:xfrm>
+            <a:off x="8229600" y="1783080"/>
+            <a:ext cx="3703320" cy="2148840"/>
+          </a:xfrm>
+          <a:prstGeom prst="rect">
+            <a:avLst/>
+          </a:prstGeom>
+          <a:solidFill>
+            <a:srgbClr val="FDFBF7"/>
+          </a:solidFill>
+          <a:ln w="9525">
+            <a:solidFill>
+              <a:srgbClr val="C9A96E"/>
+            </a:solidFill>
+          </a:ln>
+        </p:spPr>
+        <p:style>
+          <a:lnRef idx="1">
+            <a:schemeClr val="accent1"/>
+          </a:lnRef>
+          <a:fillRef idx="3">
+            <a:schemeClr val="accent1"/>
+          </a:fillRef>
+          <a:effectRef idx="2">
+            <a:schemeClr val="accent1"/>
+          </a:effectRef>
+          <a:fontRef idx="minor">
+            <a:schemeClr val="lt1"/>
+          </a:fontRef>
+        </p:style>
+        <p:txBody>
+          <a:bodyPr rtlCol="0" anchor="ctr"/>
+          <a:lstStyle/>
+          <a:p>
+            <a:pPr algn="ctr"/>
+            <a:endParaRPr/>
+          </a:p>
+        </p:txBody>
+      </p:sp>
+      <p:sp>
+        <p:nvSpPr>
+          <p:cNvPr id="16" name="Rectangle 15"/>
+          <p:cNvSpPr/>
+          <p:nvPr/>
+        </p:nvSpPr>
+        <p:spPr>
+          <a:xfrm>
+            <a:off x="8229600" y="1783080"/>
+            <a:ext cx="64008" cy="2148840"/>
+          </a:xfrm>
+          <a:prstGeom prst="rect">
+            <a:avLst/>
+          </a:prstGeom>
+          <a:solidFill>
+            <a:srgbClr val="C9A96E"/>
+          </a:solidFill>
+          <a:ln>
+            <a:noFill/>
+          </a:ln>
+        </p:spPr>
+        <p:style>
+          <a:lnRef idx="1">
+            <a:schemeClr val="accent1"/>
+          </a:lnRef>
+          <a:fillRef idx="3">
+            <a:schemeClr val="accent1"/>
+          </a:fillRef>
+          <a:effectRef idx="2">
+            <a:schemeClr val="accent1"/>
+          </a:effectRef>
+          <a:fontRef idx="minor">
+            <a:schemeClr val="lt1"/>
+          </a:fontRef>
+        </p:style>
+        <p:txBody>
+          <a:bodyPr rtlCol="0" anchor="ctr"/>
+          <a:lstStyle/>
+          <a:p>
+            <a:pPr algn="ctr"/>
+            <a:endParaRPr/>
+          </a:p>
+        </p:txBody>
+      </p:sp>
+      <p:sp>
+        <p:nvSpPr>
+          <p:cNvPr id="17" name="TextBox 16"/>
+          <p:cNvSpPr txBox="1"/>
+          <p:nvPr/>
+        </p:nvSpPr>
+        <p:spPr>
+          <a:xfrm>
+            <a:off x="8412480" y="1874520"/>
+            <a:ext cx="3429000" cy="365760"/>
+          </a:xfrm>
+          <a:prstGeom prst="rect">
+            <a:avLst/>
+          </a:prstGeom>
+          <a:noFill/>
+        </p:spPr>
+        <p:txBody>
+          <a:bodyPr wrap="square" anchor="t">
+            <a:spAutoFit/>
+          </a:bodyPr>
+          <a:lstStyle/>
+          <a:p>
+            <a:pPr algn="l"/>
+            <a:r>
+              <a:rPr sz="1600" b="1" i="0">
+                <a:solidFill>
+                  <a:srgbClr val="4A3728"/>
+                </a:solidFill>
+                <a:latin typeface="Liberation Serif"/>
+              </a:rPr>
+              <a:t>Payments</a:t>
+            </a:r>
+          </a:p>
+        </p:txBody>
+      </p:sp>
+      <p:sp>
+        <p:nvSpPr>
+          <p:cNvPr id="18" name="TextBox 17"/>
+          <p:cNvSpPr txBox="1"/>
+          <p:nvPr/>
+        </p:nvSpPr>
+        <p:spPr>
+          <a:xfrm>
+            <a:off x="8430768" y="2286000"/>
+            <a:ext cx="3383280" cy="1600200"/>
+          </a:xfrm>
+          <a:prstGeom prst="rect">
+            <a:avLst/>
+          </a:prstGeom>
+          <a:noFill/>
+        </p:spPr>
+        <p:txBody>
+          <a:bodyPr wrap="square">
+            <a:spAutoFit/>
+          </a:bodyPr>
+          <a:lstStyle/>
+          <a:p>
+            <a:pPr>
+              <a:lnSpc>
+                <a:spcPct val="125000"/>
+              </a:lnSpc>
+            </a:pPr>
+            <a:r>
+              <a:rPr sz="1000" b="1">
+                <a:solidFill>
+                  <a:srgbClr val="8B6F47"/>
+                </a:solidFill>
+                <a:latin typeface="Consolas"/>
+              </a:rPr>
+              <a:t>POST   </a:t>
+            </a:r>
+            <a:r>
+              <a:rPr sz="1000">
+                <a:solidFill>
+                  <a:srgbClr val="5C4D3E"/>
+                </a:solidFill>
+                <a:latin typeface="Consolas"/>
+              </a:rPr>
+              <a:t>/api/payments</a:t>
+            </a:r>
+          </a:p>
+          <a:p>
+            <a:pPr>
+              <a:lnSpc>
+                <a:spcPct val="125000"/>
+              </a:lnSpc>
+            </a:pPr>
+            <a:r>
+              <a:rPr sz="1000" b="1">
+                <a:solidFill>
+                  <a:srgbClr val="4A6E3C"/>
+                </a:solidFill>
+                <a:latin typeface="Consolas"/>
+              </a:rPr>
+              <a:t>GET    </a:t>
+            </a:r>
+            <a:r>
+              <a:rPr sz="1000">
+                <a:solidFill>
+                  <a:srgbClr val="5C4D3E"/>
+                </a:solidFill>
+                <a:latin typeface="Consolas"/>
+              </a:rPr>
+              <a:t>/api/payments/my-payments</a:t>
+            </a:r>
+          </a:p>
+          <a:p>
+            <a:pPr>
+              <a:lnSpc>
+                <a:spcPct val="125000"/>
+              </a:lnSpc>
+            </a:pPr>
+            <a:r>
+              <a:rPr sz="1000" b="1">
+                <a:solidFill>
+                  <a:srgbClr val="4A6E3C"/>
+                </a:solidFill>
+                <a:latin typeface="Consolas"/>
+              </a:rPr>
+              <a:t>GET    </a:t>
+            </a:r>
+            <a:r>
+              <a:rPr sz="1000">
+                <a:solidFill>
+                  <a:srgbClr val="5C4D3E"/>
+                </a:solidFill>
+                <a:latin typeface="Consolas"/>
+              </a:rPr>
+              <a:t>/api/payments/admin/all</a:t>
+            </a:r>
+          </a:p>
+          <a:p>
+            <a:pPr>
+              <a:lnSpc>
+                <a:spcPct val="125000"/>
+              </a:lnSpc>
+            </a:pPr>
+            <a:r>
+              <a:rPr sz="1000" b="1">
+                <a:solidFill>
+                  <a:srgbClr val="4A6E3C"/>
+                </a:solidFill>
+                <a:latin typeface="Consolas"/>
+              </a:rPr>
+              <a:t>GET    </a:t>
+            </a:r>
+            <a:r>
+              <a:rPr sz="1000">
+                <a:solidFill>
+                  <a:srgbClr val="5C4D3E"/>
+                </a:solidFill>
+                <a:latin typeface="Consolas"/>
+              </a:rPr>
+              <a:t>/api/payments/admin/revenue</a:t>
+            </a:r>
+          </a:p>
+          <a:p>
+            <a:pPr>
+              <a:lnSpc>
+                <a:spcPct val="125000"/>
+              </a:lnSpc>
+            </a:pPr>
+            <a:r>
+              <a:rPr sz="1000" b="1">
+                <a:solidFill>
+                  <a:srgbClr val="4A6E3C"/>
+                </a:solidFill>
+                <a:latin typeface="Consolas"/>
+              </a:rPr>
+              <a:t>GET    </a:t>
+            </a:r>
+            <a:r>
+              <a:rPr sz="1000">
+                <a:solidFill>
+                  <a:srgbClr val="5C4D3E"/>
+                </a:solidFill>
+                <a:latin typeface="Consolas"/>
+              </a:rPr>
+              <a:t>/api/payments/receipt/:id</a:t>
+            </a:r>
+          </a:p>
+        </p:txBody>
+      </p:sp>
+      <p:sp>
+        <p:nvSpPr>
+          <p:cNvPr id="19" name="Rectangle 18"/>
+          <p:cNvSpPr/>
+          <p:nvPr/>
+        </p:nvSpPr>
+        <p:spPr>
+          <a:xfrm>
+            <a:off x="548640" y="4069080"/>
+            <a:ext cx="3703320" cy="2148840"/>
+          </a:xfrm>
+          <a:prstGeom prst="rect">
+            <a:avLst/>
+          </a:prstGeom>
+          <a:solidFill>
+            <a:srgbClr val="FDFBF7"/>
+          </a:solidFill>
+          <a:ln w="9525">
+            <a:solidFill>
+              <a:srgbClr val="C9A96E"/>
+            </a:solidFill>
+          </a:ln>
+        </p:spPr>
+        <p:style>
+          <a:lnRef idx="1">
+            <a:schemeClr val="accent1"/>
+          </a:lnRef>
+          <a:fillRef idx="3">
+            <a:schemeClr val="accent1"/>
+          </a:fillRef>
+          <a:effectRef idx="2">
+            <a:schemeClr val="accent1"/>
+          </a:effectRef>
+          <a:fontRef idx="minor">
+            <a:schemeClr val="lt1"/>
+          </a:fontRef>
+        </p:style>
+        <p:txBody>
+          <a:bodyPr rtlCol="0" anchor="ctr"/>
+          <a:lstStyle/>
+          <a:p>
+            <a:pPr algn="ctr"/>
+            <a:endParaRPr/>
+          </a:p>
+        </p:txBody>
+      </p:sp>
+      <p:sp>
+        <p:nvSpPr>
+          <p:cNvPr id="20" name="Rectangle 19"/>
+          <p:cNvSpPr/>
+          <p:nvPr/>
+        </p:nvSpPr>
+        <p:spPr>
+          <a:xfrm>
+            <a:off x="548640" y="4069080"/>
+            <a:ext cx="64008" cy="2148840"/>
+          </a:xfrm>
+          <a:prstGeom prst="rect">
+            <a:avLst/>
+          </a:prstGeom>
+          <a:solidFill>
+            <a:srgbClr val="C9A96E"/>
+          </a:solidFill>
+          <a:ln>
+            <a:noFill/>
+          </a:ln>
+        </p:spPr>
+        <p:style>
+          <a:lnRef idx="1">
+            <a:schemeClr val="accent1"/>
+          </a:lnRef>
+          <a:fillRef idx="3">
+            <a:schemeClr val="accent1"/>
+          </a:fillRef>
+          <a:effectRef idx="2">
+            <a:schemeClr val="accent1"/>
+          </a:effectRef>
+          <a:fontRef idx="minor">
+            <a:schemeClr val="lt1"/>
+          </a:fontRef>
+        </p:style>
+        <p:txBody>
+          <a:bodyPr rtlCol="0" anchor="ctr"/>
+          <a:lstStyle/>
+          <a:p>
+            <a:pPr algn="ctr"/>
+            <a:endParaRPr/>
+          </a:p>
+        </p:txBody>
+      </p:sp>
+      <p:sp>
+        <p:nvSpPr>
+          <p:cNvPr id="21" name="TextBox 20"/>
+          <p:cNvSpPr txBox="1"/>
+          <p:nvPr/>
+        </p:nvSpPr>
+        <p:spPr>
+          <a:xfrm>
+            <a:off x="731520" y="4160520"/>
+            <a:ext cx="3429000" cy="365760"/>
+          </a:xfrm>
+          <a:prstGeom prst="rect">
+            <a:avLst/>
+          </a:prstGeom>
+          <a:noFill/>
+        </p:spPr>
+        <p:txBody>
+          <a:bodyPr wrap="square" anchor="t">
+            <a:spAutoFit/>
+          </a:bodyPr>
+          <a:lstStyle/>
+          <a:p>
+            <a:pPr algn="l"/>
+            <a:r>
+              <a:rPr sz="1600" b="1" i="0">
+                <a:solidFill>
+                  <a:srgbClr val="4A3728"/>
+                </a:solidFill>
+                <a:latin typeface="Liberation Serif"/>
+              </a:rPr>
+              <a:t>Guests &amp; RSVP</a:t>
+            </a:r>
+          </a:p>
+        </p:txBody>
+      </p:sp>
+      <p:sp>
+        <p:nvSpPr>
+          <p:cNvPr id="22" name="TextBox 21"/>
+          <p:cNvSpPr txBox="1"/>
+          <p:nvPr/>
+        </p:nvSpPr>
+        <p:spPr>
+          <a:xfrm>
+            <a:off x="749808" y="4572000"/>
+            <a:ext cx="3383280" cy="1600200"/>
+          </a:xfrm>
+          <a:prstGeom prst="rect">
+            <a:avLst/>
+          </a:prstGeom>
+          <a:noFill/>
+        </p:spPr>
+        <p:txBody>
+          <a:bodyPr wrap="square">
+            <a:spAutoFit/>
+          </a:bodyPr>
+          <a:lstStyle/>
+          <a:p>
+            <a:pPr>
+              <a:lnSpc>
+                <a:spcPct val="125000"/>
+              </a:lnSpc>
+            </a:pPr>
+            <a:r>
+              <a:rPr sz="1000" b="1">
+                <a:solidFill>
+                  <a:srgbClr val="8B6F47"/>
+                </a:solidFill>
+                <a:latin typeface="Consolas"/>
+              </a:rPr>
+              <a:t>POST   </a:t>
+            </a:r>
+            <a:r>
+              <a:rPr sz="1000">
+                <a:solidFill>
+                  <a:srgbClr val="5C4D3E"/>
+                </a:solidFill>
+                <a:latin typeface="Consolas"/>
+              </a:rPr>
+              <a:t>/api/guests</a:t>
+            </a:r>
+          </a:p>
+          <a:p>
+            <a:pPr>
+              <a:lnSpc>
+                <a:spcPct val="125000"/>
+              </a:lnSpc>
+            </a:pPr>
+            <a:r>
+              <a:rPr sz="1000" b="1">
+                <a:solidFill>
+                  <a:srgbClr val="4A6E3C"/>
+                </a:solidFill>
+                <a:latin typeface="Consolas"/>
+              </a:rPr>
+              <a:t>GET    </a:t>
+            </a:r>
+            <a:r>
+              <a:rPr sz="1000">
+                <a:solidFill>
+                  <a:srgbClr val="5C4D3E"/>
+                </a:solidFill>
+                <a:latin typeface="Consolas"/>
+              </a:rPr>
+              <a:t>/api/guests/booking/:id</a:t>
+            </a:r>
+          </a:p>
+          <a:p>
+            <a:pPr>
+              <a:lnSpc>
+                <a:spcPct val="125000"/>
+              </a:lnSpc>
+            </a:pPr>
+            <a:r>
+              <a:rPr sz="1000" b="1">
+                <a:solidFill>
+                  <a:srgbClr val="4A6E3C"/>
+                </a:solidFill>
+                <a:latin typeface="Consolas"/>
+              </a:rPr>
+              <a:t>GET    </a:t>
+            </a:r>
+            <a:r>
+              <a:rPr sz="1000">
+                <a:solidFill>
+                  <a:srgbClr val="5C4D3E"/>
+                </a:solidFill>
+                <a:latin typeface="Consolas"/>
+              </a:rPr>
+              <a:t>/api/guests/stats/:id</a:t>
+            </a:r>
+          </a:p>
+          <a:p>
+            <a:pPr>
+              <a:lnSpc>
+                <a:spcPct val="125000"/>
+              </a:lnSpc>
+            </a:pPr>
+            <a:r>
+              <a:rPr sz="1000" b="1">
+                <a:solidFill>
+                  <a:srgbClr val="A87A2E"/>
+                </a:solidFill>
+                <a:latin typeface="Consolas"/>
+              </a:rPr>
+              <a:t>PUT    </a:t>
+            </a:r>
+            <a:r>
+              <a:rPr sz="1000">
+                <a:solidFill>
+                  <a:srgbClr val="5C4D3E"/>
+                </a:solidFill>
+                <a:latin typeface="Consolas"/>
+              </a:rPr>
+              <a:t>/api/guests/rsvp/:id</a:t>
+            </a:r>
+          </a:p>
+          <a:p>
+            <a:pPr>
+              <a:lnSpc>
+                <a:spcPct val="125000"/>
+              </a:lnSpc>
+            </a:pPr>
+            <a:r>
+              <a:rPr sz="1000" b="1">
+                <a:solidFill>
+                  <a:srgbClr val="A84A3A"/>
+                </a:solidFill>
+                <a:latin typeface="Consolas"/>
+              </a:rPr>
+              <a:t>DELETE </a:t>
+            </a:r>
+            <a:r>
+              <a:rPr sz="1000">
+                <a:solidFill>
+                  <a:srgbClr val="5C4D3E"/>
+                </a:solidFill>
+                <a:latin typeface="Consolas"/>
+              </a:rPr>
+              <a:t>/api/guests/:id</a:t>
+            </a:r>
+          </a:p>
+        </p:txBody>
+      </p:sp>
+      <p:sp>
+        <p:nvSpPr>
+          <p:cNvPr id="23" name="Rectangle 22"/>
+          <p:cNvSpPr/>
+          <p:nvPr/>
+        </p:nvSpPr>
+        <p:spPr>
+          <a:xfrm>
+            <a:off x="4389120" y="4069080"/>
+            <a:ext cx="3703320" cy="2148840"/>
+          </a:xfrm>
+          <a:prstGeom prst="rect">
+            <a:avLst/>
+          </a:prstGeom>
+          <a:solidFill>
+            <a:srgbClr val="FDFBF7"/>
+          </a:solidFill>
+          <a:ln w="9525">
+            <a:solidFill>
+              <a:srgbClr val="C9A96E"/>
+            </a:solidFill>
+          </a:ln>
+        </p:spPr>
+        <p:style>
+          <a:lnRef idx="1">
+            <a:schemeClr val="accent1"/>
+          </a:lnRef>
+          <a:fillRef idx="3">
+            <a:schemeClr val="accent1"/>
+          </a:fillRef>
+          <a:effectRef idx="2">
+            <a:schemeClr val="accent1"/>
+          </a:effectRef>
+          <a:fontRef idx="minor">
+            <a:schemeClr val="lt1"/>
+          </a:fontRef>
+        </p:style>
+        <p:txBody>
+          <a:bodyPr rtlCol="0" anchor="ctr"/>
+          <a:lstStyle/>
+          <a:p>
+            <a:pPr algn="ctr"/>
+            <a:endParaRPr/>
+          </a:p>
+        </p:txBody>
+      </p:sp>
+      <p:sp>
+        <p:nvSpPr>
+          <p:cNvPr id="24" name="Rectangle 23"/>
+          <p:cNvSpPr/>
+          <p:nvPr/>
+        </p:nvSpPr>
+        <p:spPr>
+          <a:xfrm>
+            <a:off x="4389120" y="4069080"/>
+            <a:ext cx="64008" cy="2148840"/>
+          </a:xfrm>
+          <a:prstGeom prst="rect">
+            <a:avLst/>
+          </a:prstGeom>
+          <a:solidFill>
+            <a:srgbClr val="C9A96E"/>
+          </a:solidFill>
+          <a:ln>
+            <a:noFill/>
+          </a:ln>
+        </p:spPr>
+        <p:style>
+          <a:lnRef idx="1">
+            <a:schemeClr val="accent1"/>
+          </a:lnRef>
+          <a:fillRef idx="3">
+            <a:schemeClr val="accent1"/>
+          </a:fillRef>
+          <a:effectRef idx="2">
+            <a:schemeClr val="accent1"/>
+          </a:effectRef>
+          <a:fontRef idx="minor">
+            <a:schemeClr val="lt1"/>
+          </a:fontRef>
+        </p:style>
+        <p:txBody>
+          <a:bodyPr rtlCol="0" anchor="ctr"/>
+          <a:lstStyle/>
+          <a:p>
+            <a:pPr algn="ctr"/>
+            <a:endParaRPr/>
+          </a:p>
+        </p:txBody>
+      </p:sp>
+      <p:sp>
+        <p:nvSpPr>
+          <p:cNvPr id="25" name="TextBox 24"/>
+          <p:cNvSpPr txBox="1"/>
+          <p:nvPr/>
+        </p:nvSpPr>
+        <p:spPr>
+          <a:xfrm>
+            <a:off x="4572000" y="4160520"/>
+            <a:ext cx="3429000" cy="365760"/>
+          </a:xfrm>
+          <a:prstGeom prst="rect">
+            <a:avLst/>
+          </a:prstGeom>
+          <a:noFill/>
+        </p:spPr>
+        <p:txBody>
+          <a:bodyPr wrap="square" anchor="t">
+            <a:spAutoFit/>
+          </a:bodyPr>
+          <a:lstStyle/>
+          <a:p>
+            <a:pPr algn="l"/>
+            <a:r>
+              <a:rPr sz="1600" b="1" i="0">
+                <a:solidFill>
+                  <a:srgbClr val="4A3728"/>
+                </a:solidFill>
+                <a:latin typeface="Liberation Serif"/>
+              </a:rPr>
+              <a:t>Vendors &amp; Reviews</a:t>
+            </a:r>
+          </a:p>
+        </p:txBody>
+      </p:sp>
+      <p:sp>
+        <p:nvSpPr>
+          <p:cNvPr id="26" name="TextBox 25"/>
+          <p:cNvSpPr txBox="1"/>
+          <p:nvPr/>
+        </p:nvSpPr>
+        <p:spPr>
+          <a:xfrm>
+            <a:off x="4590288" y="4572000"/>
+            <a:ext cx="3383280" cy="1600200"/>
+          </a:xfrm>
+          <a:prstGeom prst="rect">
+            <a:avLst/>
+          </a:prstGeom>
+          <a:noFill/>
+        </p:spPr>
+        <p:txBody>
+          <a:bodyPr wrap="square">
+            <a:spAutoFit/>
+          </a:bodyPr>
+          <a:lstStyle/>
+          <a:p>
+            <a:pPr>
+              <a:lnSpc>
+                <a:spcPct val="125000"/>
+              </a:lnSpc>
+            </a:pPr>
+            <a:r>
+              <a:rPr sz="1000" b="1">
+                <a:solidFill>
+                  <a:srgbClr val="4A6E3C"/>
+                </a:solidFill>
+                <a:latin typeface="Consolas"/>
+              </a:rPr>
+              <a:t>GET    </a:t>
+            </a:r>
+            <a:r>
+              <a:rPr sz="1000">
+                <a:solidFill>
+                  <a:srgbClr val="5C4D3E"/>
+                </a:solidFill>
+                <a:latin typeface="Consolas"/>
+              </a:rPr>
+              <a:t>/api/vendors</a:t>
+            </a:r>
+          </a:p>
+          <a:p>
+            <a:pPr>
+              <a:lnSpc>
+                <a:spcPct val="125000"/>
+              </a:lnSpc>
+            </a:pPr>
+            <a:r>
+              <a:rPr sz="1000" b="1">
+                <a:solidFill>
+                  <a:srgbClr val="4A6E3C"/>
+                </a:solidFill>
+                <a:latin typeface="Consolas"/>
+              </a:rPr>
+              <a:t>GET    </a:t>
+            </a:r>
+            <a:r>
+              <a:rPr sz="1000">
+                <a:solidFill>
+                  <a:srgbClr val="5C4D3E"/>
+                </a:solidFill>
+                <a:latin typeface="Consolas"/>
+              </a:rPr>
+              <a:t>/api/vendors/:category</a:t>
+            </a:r>
+          </a:p>
+          <a:p>
+            <a:pPr>
+              <a:lnSpc>
+                <a:spcPct val="125000"/>
+              </a:lnSpc>
+            </a:pPr>
+            <a:r>
+              <a:rPr sz="1000" b="1">
+                <a:solidFill>
+                  <a:srgbClr val="8B6F47"/>
+                </a:solidFill>
+                <a:latin typeface="Consolas"/>
+              </a:rPr>
+              <a:t>POST   </a:t>
+            </a:r>
+            <a:r>
+              <a:rPr sz="1000">
+                <a:solidFill>
+                  <a:srgbClr val="5C4D3E"/>
+                </a:solidFill>
+                <a:latin typeface="Consolas"/>
+              </a:rPr>
+              <a:t>/api/reviews</a:t>
+            </a:r>
+          </a:p>
+          <a:p>
+            <a:pPr>
+              <a:lnSpc>
+                <a:spcPct val="125000"/>
+              </a:lnSpc>
+            </a:pPr>
+            <a:r>
+              <a:rPr sz="1000" b="1">
+                <a:solidFill>
+                  <a:srgbClr val="4A6E3C"/>
+                </a:solidFill>
+                <a:latin typeface="Consolas"/>
+              </a:rPr>
+              <a:t>GET    </a:t>
+            </a:r>
+            <a:r>
+              <a:rPr sz="1000">
+                <a:solidFill>
+                  <a:srgbClr val="5C4D3E"/>
+                </a:solidFill>
+                <a:latin typeface="Consolas"/>
+              </a:rPr>
+              <a:t>/api/reviews/admin/all</a:t>
+            </a:r>
+          </a:p>
+          <a:p>
+            <a:pPr>
+              <a:lnSpc>
+                <a:spcPct val="125000"/>
+              </a:lnSpc>
+            </a:pPr>
+            <a:r>
+              <a:rPr sz="1000" b="1">
+                <a:solidFill>
+                  <a:srgbClr val="A87A2E"/>
+                </a:solidFill>
+                <a:latin typeface="Consolas"/>
+              </a:rPr>
+              <a:t>PUT    </a:t>
+            </a:r>
+            <a:r>
+              <a:rPr sz="1000">
+                <a:solidFill>
+                  <a:srgbClr val="5C4D3E"/>
+                </a:solidFill>
+                <a:latin typeface="Consolas"/>
+              </a:rPr>
+              <a:t>/api/reviews/reply/:id</a:t>
+            </a:r>
+          </a:p>
+        </p:txBody>
+      </p:sp>
+      <p:sp>
+        <p:nvSpPr>
+          <p:cNvPr id="27" name="Rectangle 26"/>
+          <p:cNvSpPr/>
+          <p:nvPr/>
+        </p:nvSpPr>
+        <p:spPr>
+          <a:xfrm>
+            <a:off x="8229600" y="4069080"/>
+            <a:ext cx="3703320" cy="2148840"/>
+          </a:xfrm>
+          <a:prstGeom prst="rect">
+            <a:avLst/>
+          </a:prstGeom>
+          <a:solidFill>
+            <a:srgbClr val="FDFBF7"/>
+          </a:solidFill>
+          <a:ln w="9525">
+            <a:solidFill>
+              <a:srgbClr val="C9A96E"/>
+            </a:solidFill>
+          </a:ln>
+        </p:spPr>
+        <p:style>
+          <a:lnRef idx="1">
+            <a:schemeClr val="accent1"/>
+          </a:lnRef>
+          <a:fillRef idx="3">
+            <a:schemeClr val="accent1"/>
+          </a:fillRef>
+          <a:effectRef idx="2">
+            <a:schemeClr val="accent1"/>
+          </a:effectRef>
+          <a:fontRef idx="minor">
+            <a:schemeClr val="lt1"/>
+          </a:fontRef>
+        </p:style>
+        <p:txBody>
+          <a:bodyPr rtlCol="0" anchor="ctr"/>
+          <a:lstStyle/>
+          <a:p>
+            <a:pPr algn="ctr"/>
+            <a:endParaRPr/>
+          </a:p>
+        </p:txBody>
+      </p:sp>
+      <p:sp>
+        <p:nvSpPr>
+          <p:cNvPr id="28" name="Rectangle 27"/>
+          <p:cNvSpPr/>
+          <p:nvPr/>
+        </p:nvSpPr>
+        <p:spPr>
+          <a:xfrm>
+            <a:off x="8229600" y="4069080"/>
+            <a:ext cx="64008" cy="2148840"/>
+          </a:xfrm>
+          <a:prstGeom prst="rect">
+            <a:avLst/>
+          </a:prstGeom>
+          <a:solidFill>
+            <a:srgbClr val="C9A96E"/>
+          </a:solidFill>
+          <a:ln>
+            <a:noFill/>
+          </a:ln>
+        </p:spPr>
+        <p:style>
+          <a:lnRef idx="1">
+            <a:schemeClr val="accent1"/>
+          </a:lnRef>
+          <a:fillRef idx="3">
+            <a:schemeClr val="accent1"/>
+          </a:fillRef>
+          <a:effectRef idx="2">
+            <a:schemeClr val="accent1"/>
+          </a:effectRef>
+          <a:fontRef idx="minor">
+            <a:schemeClr val="lt1"/>
+          </a:fontRef>
+        </p:style>
+        <p:txBody>
+          <a:bodyPr rtlCol="0" anchor="ctr"/>
+          <a:lstStyle/>
+          <a:p>
+            <a:pPr algn="ctr"/>
+            <a:endParaRPr/>
+          </a:p>
+        </p:txBody>
+      </p:sp>
+      <p:sp>
+        <p:nvSpPr>
+          <p:cNvPr id="29" name="TextBox 28"/>
+          <p:cNvSpPr txBox="1"/>
+          <p:nvPr/>
+        </p:nvSpPr>
+        <p:spPr>
+          <a:xfrm>
+            <a:off x="8412480" y="4160520"/>
+            <a:ext cx="3429000" cy="365760"/>
+          </a:xfrm>
+          <a:prstGeom prst="rect">
+            <a:avLst/>
+          </a:prstGeom>
+          <a:noFill/>
+        </p:spPr>
+        <p:txBody>
+          <a:bodyPr wrap="square" anchor="t">
+            <a:spAutoFit/>
+          </a:bodyPr>
+          <a:lstStyle/>
+          <a:p>
+            <a:pPr algn="l"/>
+            <a:r>
+              <a:rPr sz="1600" b="1" i="0">
+                <a:solidFill>
+                  <a:srgbClr val="4A3728"/>
+                </a:solidFill>
+                <a:latin typeface="Liberation Serif"/>
+              </a:rPr>
+              <a:t>Utilities</a:t>
+            </a:r>
+          </a:p>
+        </p:txBody>
+      </p:sp>
+      <p:sp>
+        <p:nvSpPr>
+          <p:cNvPr id="30" name="TextBox 29"/>
+          <p:cNvSpPr txBox="1"/>
+          <p:nvPr/>
+        </p:nvSpPr>
+        <p:spPr>
+          <a:xfrm>
+            <a:off x="8430768" y="4572000"/>
+            <a:ext cx="3383280" cy="1600200"/>
+          </a:xfrm>
+          <a:prstGeom prst="rect">
+            <a:avLst/>
+          </a:prstGeom>
+          <a:noFill/>
+        </p:spPr>
+        <p:txBody>
+          <a:bodyPr wrap="square">
+            <a:spAutoFit/>
+          </a:bodyPr>
+          <a:lstStyle/>
+          <a:p>
+            <a:pPr>
+              <a:lnSpc>
+                <a:spcPct val="125000"/>
+              </a:lnSpc>
+            </a:pPr>
+            <a:r>
+              <a:rPr sz="1000" b="1">
+                <a:solidFill>
+                  <a:srgbClr val="4A6E3C"/>
+                </a:solidFill>
+                <a:latin typeface="Consolas"/>
+              </a:rPr>
+              <a:t>GET    </a:t>
+            </a:r>
+            <a:r>
+              <a:rPr sz="1000">
+                <a:solidFill>
+                  <a:srgbClr val="5C4D3E"/>
+                </a:solidFill>
+                <a:latin typeface="Consolas"/>
+              </a:rPr>
+              <a:t>/api/notifications</a:t>
+            </a:r>
+          </a:p>
+          <a:p>
+            <a:pPr>
+              <a:lnSpc>
+                <a:spcPct val="125000"/>
+              </a:lnSpc>
+            </a:pPr>
+            <a:r>
+              <a:rPr sz="1000" b="1">
+                <a:solidFill>
+                  <a:srgbClr val="4A6E3C"/>
+                </a:solidFill>
+                <a:latin typeface="Consolas"/>
+              </a:rPr>
+              <a:t>GET    </a:t>
+            </a:r>
+            <a:r>
+              <a:rPr sz="1000">
+                <a:solidFill>
+                  <a:srgbClr val="5C4D3E"/>
+                </a:solidFill>
+                <a:latin typeface="Consolas"/>
+              </a:rPr>
+              <a:t>/api/menus</a:t>
+            </a:r>
+          </a:p>
+          <a:p>
+            <a:pPr>
+              <a:lnSpc>
+                <a:spcPct val="125000"/>
+              </a:lnSpc>
+            </a:pPr>
+            <a:r>
+              <a:rPr sz="1000" b="1">
+                <a:solidFill>
+                  <a:srgbClr val="8B6F47"/>
+                </a:solidFill>
+                <a:latin typeface="Consolas"/>
+              </a:rPr>
+              <a:t>POST   </a:t>
+            </a:r>
+            <a:r>
+              <a:rPr sz="1000">
+                <a:solidFill>
+                  <a:srgbClr val="5C4D3E"/>
+                </a:solidFill>
+                <a:latin typeface="Consolas"/>
+              </a:rPr>
+              <a:t>/api/checklists</a:t>
+            </a:r>
+          </a:p>
+          <a:p>
+            <a:pPr>
+              <a:lnSpc>
+                <a:spcPct val="125000"/>
+              </a:lnSpc>
+            </a:pPr>
+            <a:r>
+              <a:rPr sz="1000" b="1">
+                <a:solidFill>
+                  <a:srgbClr val="4A6E3C"/>
+                </a:solidFill>
+                <a:latin typeface="Consolas"/>
+              </a:rPr>
+              <a:t>GET    </a:t>
+            </a:r>
+            <a:r>
+              <a:rPr sz="1000">
+                <a:solidFill>
+                  <a:srgbClr val="5C4D3E"/>
+                </a:solidFill>
+                <a:latin typeface="Consolas"/>
+              </a:rPr>
+              <a:t>/api/analytics/dashboard</a:t>
+            </a:r>
+          </a:p>
+          <a:p>
+            <a:pPr>
+              <a:lnSpc>
+                <a:spcPct val="125000"/>
+              </a:lnSpc>
+            </a:pPr>
+            <a:r>
+              <a:rPr sz="1000" b="1">
+                <a:solidFill>
+                  <a:srgbClr val="8B6F47"/>
+                </a:solidFill>
+                <a:latin typeface="Consolas"/>
+              </a:rPr>
+              <a:t>POST   </a:t>
+            </a:r>
+            <a:r>
+              <a:rPr sz="1000">
+                <a:solidFill>
+                  <a:srgbClr val="5C4D3E"/>
+                </a:solidFill>
+                <a:latin typeface="Consolas"/>
+              </a:rPr>
+              <a:t>/api/chat/message</a:t>
+            </a:r>
+          </a:p>
+        </p:txBody>
+      </p:sp>
+      <p:sp>
+        <p:nvSpPr>
+          <p:cNvPr id="31" name="TextBox 30"/>
+          <p:cNvSpPr txBox="1"/>
+          <p:nvPr/>
+        </p:nvSpPr>
+        <p:spPr>
+          <a:xfrm>
+            <a:off x="10789920" y="6510528"/>
+            <a:ext cx="1188720" cy="274320"/>
+          </a:xfrm>
+          <a:prstGeom prst="rect">
+            <a:avLst/>
+          </a:prstGeom>
+          <a:noFill/>
+        </p:spPr>
+        <p:txBody>
+          <a:bodyPr wrap="square" anchor="t">
+            <a:spAutoFit/>
+          </a:bodyPr>
+          <a:lstStyle/>
+          <a:p>
+            <a:pPr algn="r"/>
+            <a:r>
+              <a:rPr sz="1000" b="0" i="1">
+                <a:solidFill>
+                  <a:srgbClr val="A8894E"/>
+                </a:solidFill>
+                <a:latin typeface="Calibri"/>
+              </a:rPr>
+              <a:t>Page 13</a:t>
+            </a:r>
+          </a:p>
+        </p:txBody>
+      </p:sp>
+    </p:spTree>
+  </p:cSld>
+  <p:clrMapOvr>
+    <a:masterClrMapping/>
+  </p:clrMapOvr>
+</p:sld>
+</file>
+
+<file path=ppt/slides/slide14.xml><?xml version="1.0" encoding="utf-8"?>
+<p:sld xmlns:a="http://schemas.openxmlformats.org/drawingml/2006/main" xmlns:r="http://schemas.openxmlformats.org/officeDocument/2006/relationships" xmlns:p="http://schemas.openxmlformats.org/presentationml/2006/main">
+  <p:cSld>
+    <p:spTree>
+      <p:nvGrpSpPr>
+        <p:cNvPr id="1" name=""/>
+        <p:cNvGrpSpPr/>
+        <p:nvPr/>
+      </p:nvGrpSpPr>
+      <p:grpSpPr>
+        <a:xfrm>
+          <a:off x="0" y="0"/>
+          <a:ext cx="0" cy="0"/>
+          <a:chOff x="0" y="0"/>
+          <a:chExt cx="0" cy="0"/>
+        </a:xfrm>
+      </p:grpSpPr>
+      <p:sp>
+        <p:nvSpPr>
+          <p:cNvPr id="2" name="Rectangle 1"/>
+          <p:cNvSpPr/>
+          <p:nvPr/>
+        </p:nvSpPr>
+        <p:spPr>
+          <a:xfrm>
+            <a:off x="0" y="0"/>
+            <a:ext cx="12191695" cy="6858000"/>
+          </a:xfrm>
+          <a:prstGeom prst="rect">
+            <a:avLst/>
+          </a:prstGeom>
+          <a:solidFill>
+            <a:srgbClr val="FDF8F3"/>
+          </a:solidFill>
+          <a:ln>
+            <a:noFill/>
+          </a:ln>
+        </p:spPr>
+        <p:style>
+          <a:lnRef idx="1">
+            <a:schemeClr val="accent1"/>
+          </a:lnRef>
+          <a:fillRef idx="3">
+            <a:schemeClr val="accent1"/>
+          </a:fillRef>
+          <a:effectRef idx="2">
+            <a:schemeClr val="accent1"/>
+          </a:effectRef>
+          <a:fontRef idx="minor">
+            <a:schemeClr val="lt1"/>
+          </a:fontRef>
+        </p:style>
+        <p:txBody>
+          <a:bodyPr rtlCol="0" anchor="ctr"/>
+          <a:lstStyle/>
+          <a:p>
+            <a:pPr algn="ctr"/>
+            <a:endParaRPr/>
+          </a:p>
+        </p:txBody>
+      </p:sp>
+      <p:sp>
+        <p:nvSpPr>
+          <p:cNvPr id="3" name="Rectangle 2"/>
+          <p:cNvSpPr/>
+          <p:nvPr/>
+        </p:nvSpPr>
+        <p:spPr>
+          <a:xfrm>
+            <a:off x="0" y="0"/>
+            <a:ext cx="12191695" cy="1097280"/>
+          </a:xfrm>
+          <a:prstGeom prst="rect">
+            <a:avLst/>
+          </a:prstGeom>
+          <a:solidFill>
+            <a:srgbClr val="F5ECDD"/>
+          </a:solidFill>
+          <a:ln>
+            <a:noFill/>
+          </a:ln>
+        </p:spPr>
+        <p:style>
+          <a:lnRef idx="1">
+            <a:schemeClr val="accent1"/>
+          </a:lnRef>
+          <a:fillRef idx="3">
+            <a:schemeClr val="accent1"/>
+          </a:fillRef>
+          <a:effectRef idx="2">
+            <a:schemeClr val="accent1"/>
+          </a:effectRef>
+          <a:fontRef idx="minor">
+            <a:schemeClr val="lt1"/>
+          </a:fontRef>
+        </p:style>
+        <p:txBody>
+          <a:bodyPr rtlCol="0" anchor="ctr"/>
+          <a:lstStyle/>
+          <a:p>
+            <a:pPr algn="ctr"/>
+            <a:endParaRPr/>
+          </a:p>
+        </p:txBody>
+      </p:sp>
+      <p:sp>
+        <p:nvSpPr>
+          <p:cNvPr id="4" name="TextBox 3"/>
+          <p:cNvSpPr txBox="1"/>
+          <p:nvPr/>
+        </p:nvSpPr>
+        <p:spPr>
+          <a:xfrm>
+            <a:off x="548640" y="228600"/>
+            <a:ext cx="10972800" cy="731520"/>
+          </a:xfrm>
+          <a:prstGeom prst="rect">
+            <a:avLst/>
+          </a:prstGeom>
+          <a:noFill/>
+        </p:spPr>
+        <p:txBody>
+          <a:bodyPr wrap="square" anchor="ctr">
+            <a:spAutoFit/>
+          </a:bodyPr>
+          <a:lstStyle/>
+          <a:p>
+            <a:pPr algn="l"/>
+            <a:r>
+              <a:rPr sz="3400" b="1" i="0">
+                <a:solidFill>
+                  <a:srgbClr val="4A3728"/>
+                </a:solidFill>
+                <a:latin typeface="Liberation Serif"/>
+              </a:rPr>
+              <a:t>Challenges Faced &amp; Solutions</a:t>
+            </a:r>
+          </a:p>
+        </p:txBody>
+      </p:sp>
+      <p:sp>
+        <p:nvSpPr>
+          <p:cNvPr id="5" name="Rectangle 4"/>
+          <p:cNvSpPr/>
+          <p:nvPr/>
+        </p:nvSpPr>
+        <p:spPr>
+          <a:xfrm>
+            <a:off x="566928" y="932688"/>
+            <a:ext cx="2011680" cy="38100"/>
+          </a:xfrm>
+          <a:prstGeom prst="rect">
+            <a:avLst/>
+          </a:prstGeom>
+          <a:solidFill>
+            <a:srgbClr val="C9A96E"/>
+          </a:solidFill>
+          <a:ln>
+            <a:noFill/>
+          </a:ln>
+        </p:spPr>
+        <p:style>
+          <a:lnRef idx="1">
+            <a:schemeClr val="accent1"/>
+          </a:lnRef>
+          <a:fillRef idx="3">
+            <a:schemeClr val="accent1"/>
+          </a:fillRef>
+          <a:effectRef idx="2">
+            <a:schemeClr val="accent1"/>
+          </a:effectRef>
+          <a:fontRef idx="minor">
+            <a:schemeClr val="lt1"/>
+          </a:fontRef>
+        </p:style>
+        <p:txBody>
+          <a:bodyPr rtlCol="0" anchor="ctr"/>
+          <a:lstStyle/>
+          <a:p>
+            <a:pPr algn="ctr"/>
+            <a:endParaRPr/>
+          </a:p>
+        </p:txBody>
+      </p:sp>
+      <p:sp>
+        <p:nvSpPr>
+          <p:cNvPr id="6" name="TextBox 5"/>
+          <p:cNvSpPr txBox="1"/>
+          <p:nvPr/>
+        </p:nvSpPr>
+        <p:spPr>
+          <a:xfrm>
+            <a:off x="548640" y="1234440"/>
+            <a:ext cx="11155680" cy="411480"/>
+          </a:xfrm>
+          <a:prstGeom prst="rect">
+            <a:avLst/>
+          </a:prstGeom>
+          <a:noFill/>
+        </p:spPr>
+        <p:txBody>
+          <a:bodyPr wrap="square" anchor="t">
+            <a:spAutoFit/>
+          </a:bodyPr>
+          <a:lstStyle/>
+          <a:p>
+            <a:pPr algn="l"/>
+            <a:r>
+              <a:rPr sz="1300" b="0" i="1">
+                <a:solidFill>
+                  <a:srgbClr val="8B6F47"/>
+                </a:solidFill>
+                <a:latin typeface="Calibri"/>
+              </a:rPr>
+              <a:t>Key engineering problems encountered during development and the architectural decisions taken to solve them.</a:t>
+            </a:r>
+          </a:p>
+        </p:txBody>
+      </p:sp>
+      <p:sp>
+        <p:nvSpPr>
+          <p:cNvPr id="7" name="Rectangle 6"/>
+          <p:cNvSpPr/>
+          <p:nvPr/>
+        </p:nvSpPr>
+        <p:spPr>
+          <a:xfrm>
+            <a:off x="548640" y="1783080"/>
+            <a:ext cx="5486400" cy="2148840"/>
+          </a:xfrm>
+          <a:prstGeom prst="rect">
+            <a:avLst/>
+          </a:prstGeom>
+          <a:solidFill>
+            <a:srgbClr val="FDFBF7"/>
+          </a:solidFill>
+          <a:ln w="9525">
+            <a:solidFill>
+              <a:srgbClr val="C9A96E"/>
+            </a:solidFill>
+          </a:ln>
+        </p:spPr>
+        <p:style>
+          <a:lnRef idx="1">
+            <a:schemeClr val="accent1"/>
+          </a:lnRef>
+          <a:fillRef idx="3">
+            <a:schemeClr val="accent1"/>
+          </a:fillRef>
+          <a:effectRef idx="2">
+            <a:schemeClr val="accent1"/>
+          </a:effectRef>
+          <a:fontRef idx="minor">
+            <a:schemeClr val="lt1"/>
+          </a:fontRef>
+        </p:style>
+        <p:txBody>
+          <a:bodyPr rtlCol="0" anchor="ctr"/>
+          <a:lstStyle/>
+          <a:p>
+            <a:pPr algn="ctr"/>
+            <a:endParaRPr/>
+          </a:p>
+        </p:txBody>
+      </p:sp>
+      <p:sp>
+        <p:nvSpPr>
+          <p:cNvPr id="8" name="Rectangle 7"/>
+          <p:cNvSpPr/>
+          <p:nvPr/>
+        </p:nvSpPr>
+        <p:spPr>
+          <a:xfrm>
+            <a:off x="548640" y="1783080"/>
+            <a:ext cx="64008" cy="2148840"/>
+          </a:xfrm>
+          <a:prstGeom prst="rect">
+            <a:avLst/>
+          </a:prstGeom>
+          <a:solidFill>
+            <a:srgbClr val="C9A96E"/>
+          </a:solidFill>
+          <a:ln>
+            <a:noFill/>
+          </a:ln>
+        </p:spPr>
+        <p:style>
+          <a:lnRef idx="1">
+            <a:schemeClr val="accent1"/>
+          </a:lnRef>
+          <a:fillRef idx="3">
+            <a:schemeClr val="accent1"/>
+          </a:fillRef>
+          <a:effectRef idx="2">
+            <a:schemeClr val="accent1"/>
+          </a:effectRef>
+          <a:fontRef idx="minor">
+            <a:schemeClr val="lt1"/>
+          </a:fontRef>
+        </p:style>
+        <p:txBody>
+          <a:bodyPr rtlCol="0" anchor="ctr"/>
+          <a:lstStyle/>
+          <a:p>
+            <a:pPr algn="ctr"/>
+            <a:endParaRPr/>
+          </a:p>
+        </p:txBody>
+      </p:sp>
+      <p:sp>
+        <p:nvSpPr>
+          <p:cNvPr id="9" name="TextBox 8"/>
+          <p:cNvSpPr txBox="1"/>
+          <p:nvPr/>
+        </p:nvSpPr>
+        <p:spPr>
+          <a:xfrm>
+            <a:off x="731520" y="1874520"/>
+            <a:ext cx="5212080" cy="365760"/>
+          </a:xfrm>
+          <a:prstGeom prst="rect">
+            <a:avLst/>
+          </a:prstGeom>
+          <a:noFill/>
+        </p:spPr>
+        <p:txBody>
+          <a:bodyPr wrap="square" anchor="t">
+            <a:spAutoFit/>
+          </a:bodyPr>
+          <a:lstStyle/>
+          <a:p>
+            <a:pPr algn="l"/>
+            <a:r>
+              <a:rPr sz="1600" b="1" i="0">
+                <a:solidFill>
+                  <a:srgbClr val="4A3728"/>
+                </a:solidFill>
+                <a:latin typeface="Liberation Serif"/>
+              </a:rPr>
+              <a:t>Double-Booking Conflicts</a:t>
+            </a:r>
+          </a:p>
+        </p:txBody>
+      </p:sp>
+      <p:sp>
+        <p:nvSpPr>
+          <p:cNvPr id="10" name="TextBox 9"/>
+          <p:cNvSpPr txBox="1"/>
+          <p:nvPr/>
+        </p:nvSpPr>
+        <p:spPr>
+          <a:xfrm>
+            <a:off x="731520" y="2286000"/>
+            <a:ext cx="5212080" cy="640080"/>
+          </a:xfrm>
+          <a:prstGeom prst="rect">
+            <a:avLst/>
+          </a:prstGeom>
+          <a:noFill/>
+        </p:spPr>
+        <p:txBody>
+          <a:bodyPr wrap="square">
+            <a:spAutoFit/>
+          </a:bodyPr>
+          <a:lstStyle/>
+          <a:p>
+            <a:r>
+              <a:rPr sz="1100" b="1">
+                <a:solidFill>
+                  <a:srgbClr val="A84A3A"/>
+                </a:solidFill>
+                <a:latin typeface="Calibri"/>
+              </a:rPr>
+              <a:t>Problem: </a:t>
+            </a:r>
+            <a:r>
+              <a:rPr sz="1100">
+                <a:solidFill>
+                  <a:srgbClr val="5C4D3E"/>
+                </a:solidFill>
+                <a:latin typeface="Calibri"/>
+              </a:rPr>
+              <a:t>Multiple clients requesting the same venue on the same date created data collisions.</a:t>
+            </a:r>
+          </a:p>
+        </p:txBody>
+      </p:sp>
+      <p:sp>
+        <p:nvSpPr>
+          <p:cNvPr id="11" name="TextBox 10"/>
+          <p:cNvSpPr txBox="1"/>
+          <p:nvPr/>
+        </p:nvSpPr>
+        <p:spPr>
+          <a:xfrm>
+            <a:off x="731520" y="2926080"/>
+            <a:ext cx="5212080" cy="960120"/>
+          </a:xfrm>
+          <a:prstGeom prst="rect">
+            <a:avLst/>
+          </a:prstGeom>
+          <a:noFill/>
+        </p:spPr>
+        <p:txBody>
+          <a:bodyPr wrap="square">
+            <a:spAutoFit/>
+          </a:bodyPr>
+          <a:lstStyle/>
+          <a:p>
+            <a:r>
+              <a:rPr sz="1100" b="1">
+                <a:solidFill>
+                  <a:srgbClr val="4A6E3C"/>
+                </a:solidFill>
+                <a:latin typeface="Calibri"/>
+              </a:rPr>
+              <a:t>Solution: </a:t>
+            </a:r>
+            <a:r>
+              <a:rPr sz="1100">
+                <a:solidFill>
+                  <a:srgbClr val="5C4D3E"/>
+                </a:solidFill>
+                <a:latin typeface="Calibri"/>
+              </a:rPr>
+              <a:t>Implemented a server-side conflict-detection algorithm that queries existing bookings by venue + event_date; admin can 'Suggest New Date' to push a reschedule request.</a:t>
+            </a:r>
+          </a:p>
+        </p:txBody>
+      </p:sp>
+      <p:sp>
+        <p:nvSpPr>
+          <p:cNvPr id="12" name="Rectangle 11"/>
+          <p:cNvSpPr/>
+          <p:nvPr/>
+        </p:nvSpPr>
+        <p:spPr>
+          <a:xfrm>
+            <a:off x="6217920" y="1783080"/>
+            <a:ext cx="5486400" cy="2148840"/>
+          </a:xfrm>
+          <a:prstGeom prst="rect">
+            <a:avLst/>
+          </a:prstGeom>
+          <a:solidFill>
+            <a:srgbClr val="FDFBF7"/>
+          </a:solidFill>
+          <a:ln w="9525">
+            <a:solidFill>
+              <a:srgbClr val="C9A96E"/>
+            </a:solidFill>
+          </a:ln>
+        </p:spPr>
+        <p:style>
+          <a:lnRef idx="1">
+            <a:schemeClr val="accent1"/>
+          </a:lnRef>
+          <a:fillRef idx="3">
+            <a:schemeClr val="accent1"/>
+          </a:fillRef>
+          <a:effectRef idx="2">
+            <a:schemeClr val="accent1"/>
+          </a:effectRef>
+          <a:fontRef idx="minor">
+            <a:schemeClr val="lt1"/>
+          </a:fontRef>
+        </p:style>
+        <p:txBody>
+          <a:bodyPr rtlCol="0" anchor="ctr"/>
+          <a:lstStyle/>
+          <a:p>
+            <a:pPr algn="ctr"/>
+            <a:endParaRPr/>
+          </a:p>
+        </p:txBody>
+      </p:sp>
+      <p:sp>
+        <p:nvSpPr>
+          <p:cNvPr id="13" name="Rectangle 12"/>
+          <p:cNvSpPr/>
+          <p:nvPr/>
+        </p:nvSpPr>
+        <p:spPr>
+          <a:xfrm>
+            <a:off x="6217920" y="1783080"/>
+            <a:ext cx="64008" cy="2148840"/>
+          </a:xfrm>
+          <a:prstGeom prst="rect">
+            <a:avLst/>
+          </a:prstGeom>
+          <a:solidFill>
+            <a:srgbClr val="C9A96E"/>
+          </a:solidFill>
+          <a:ln>
+            <a:noFill/>
+          </a:ln>
+        </p:spPr>
+        <p:style>
+          <a:lnRef idx="1">
+            <a:schemeClr val="accent1"/>
+          </a:lnRef>
+          <a:fillRef idx="3">
+            <a:schemeClr val="accent1"/>
+          </a:fillRef>
+          <a:effectRef idx="2">
+            <a:schemeClr val="accent1"/>
+          </a:effectRef>
+          <a:fontRef idx="minor">
+            <a:schemeClr val="lt1"/>
+          </a:fontRef>
+        </p:style>
+        <p:txBody>
+          <a:bodyPr rtlCol="0" anchor="ctr"/>
+          <a:lstStyle/>
+          <a:p>
+            <a:pPr algn="ctr"/>
+            <a:endParaRPr/>
+          </a:p>
+        </p:txBody>
+      </p:sp>
+      <p:sp>
+        <p:nvSpPr>
+          <p:cNvPr id="14" name="TextBox 13"/>
+          <p:cNvSpPr txBox="1"/>
+          <p:nvPr/>
+        </p:nvSpPr>
+        <p:spPr>
+          <a:xfrm>
+            <a:off x="6400800" y="1874520"/>
+            <a:ext cx="5212080" cy="365760"/>
+          </a:xfrm>
+          <a:prstGeom prst="rect">
+            <a:avLst/>
+          </a:prstGeom>
+          <a:noFill/>
+        </p:spPr>
+        <p:txBody>
+          <a:bodyPr wrap="square" anchor="t">
+            <a:spAutoFit/>
+          </a:bodyPr>
+          <a:lstStyle/>
+          <a:p>
+            <a:pPr algn="l"/>
+            <a:r>
+              <a:rPr sz="1600" b="1" i="0">
+                <a:solidFill>
+                  <a:srgbClr val="4A3728"/>
+                </a:solidFill>
+                <a:latin typeface="Liberation Serif"/>
+              </a:rPr>
+              <a:t>Granular Payment Tracking</a:t>
+            </a:r>
+          </a:p>
+        </p:txBody>
+      </p:sp>
+      <p:sp>
+        <p:nvSpPr>
+          <p:cNvPr id="15" name="TextBox 14"/>
+          <p:cNvSpPr txBox="1"/>
+          <p:nvPr/>
+        </p:nvSpPr>
+        <p:spPr>
+          <a:xfrm>
+            <a:off x="6400800" y="2286000"/>
+            <a:ext cx="5212080" cy="640080"/>
+          </a:xfrm>
+          <a:prstGeom prst="rect">
+            <a:avLst/>
+          </a:prstGeom>
+          <a:noFill/>
+        </p:spPr>
+        <p:txBody>
+          <a:bodyPr wrap="square">
+            <a:spAutoFit/>
+          </a:bodyPr>
+          <a:lstStyle/>
+          <a:p>
+            <a:r>
+              <a:rPr sz="1100" b="1">
+                <a:solidFill>
+                  <a:srgbClr val="A84A3A"/>
+                </a:solidFill>
+                <a:latin typeface="Calibri"/>
+              </a:rPr>
+              <a:t>Problem: </a:t>
+            </a:r>
+            <a:r>
+              <a:rPr sz="1100">
+                <a:solidFill>
+                  <a:srgbClr val="5C4D3E"/>
+                </a:solidFill>
+                <a:latin typeface="Calibri"/>
+              </a:rPr>
+              <a:t>Payments come in as partial installments across cash, card, UPI, and bank transfer.</a:t>
+            </a:r>
+          </a:p>
+        </p:txBody>
+      </p:sp>
+      <p:sp>
+        <p:nvSpPr>
+          <p:cNvPr id="16" name="TextBox 15"/>
+          <p:cNvSpPr txBox="1"/>
+          <p:nvPr/>
+        </p:nvSpPr>
+        <p:spPr>
+          <a:xfrm>
+            <a:off x="6400800" y="2926080"/>
+            <a:ext cx="5212080" cy="960120"/>
+          </a:xfrm>
+          <a:prstGeom prst="rect">
+            <a:avLst/>
+          </a:prstGeom>
+          <a:noFill/>
+        </p:spPr>
+        <p:txBody>
+          <a:bodyPr wrap="square">
+            <a:spAutoFit/>
+          </a:bodyPr>
+          <a:lstStyle/>
+          <a:p>
+            <a:r>
+              <a:rPr sz="1100" b="1">
+                <a:solidFill>
+                  <a:srgbClr val="4A6E3C"/>
+                </a:solidFill>
+                <a:latin typeface="Calibri"/>
+              </a:rPr>
+              <a:t>Solution: </a:t>
+            </a:r>
+            <a:r>
+              <a:rPr sz="1100">
+                <a:solidFill>
+                  <a:srgbClr val="5C4D3E"/>
+                </a:solidFill>
+                <a:latin typeface="Calibri"/>
+              </a:rPr>
+              <a:t>Built a dedicated Payment model with method enum, receipt generation, and a revenue aggregation pipeline feeding the admin analytics dashboard.</a:t>
+            </a:r>
+          </a:p>
+        </p:txBody>
+      </p:sp>
+      <p:sp>
+        <p:nvSpPr>
+          <p:cNvPr id="17" name="Rectangle 16"/>
+          <p:cNvSpPr/>
+          <p:nvPr/>
+        </p:nvSpPr>
+        <p:spPr>
+          <a:xfrm>
+            <a:off x="548640" y="4069080"/>
+            <a:ext cx="5486400" cy="2148840"/>
+          </a:xfrm>
+          <a:prstGeom prst="rect">
+            <a:avLst/>
+          </a:prstGeom>
+          <a:solidFill>
+            <a:srgbClr val="FDFBF7"/>
+          </a:solidFill>
+          <a:ln w="9525">
+            <a:solidFill>
+              <a:srgbClr val="C9A96E"/>
+            </a:solidFill>
+          </a:ln>
+        </p:spPr>
+        <p:style>
+          <a:lnRef idx="1">
+            <a:schemeClr val="accent1"/>
+          </a:lnRef>
+          <a:fillRef idx="3">
+            <a:schemeClr val="accent1"/>
+          </a:fillRef>
+          <a:effectRef idx="2">
+            <a:schemeClr val="accent1"/>
+          </a:effectRef>
+          <a:fontRef idx="minor">
+            <a:schemeClr val="lt1"/>
+          </a:fontRef>
+        </p:style>
+        <p:txBody>
+          <a:bodyPr rtlCol="0" anchor="ctr"/>
+          <a:lstStyle/>
+          <a:p>
+            <a:pPr algn="ctr"/>
+            <a:endParaRPr/>
+          </a:p>
+        </p:txBody>
+      </p:sp>
+      <p:sp>
+        <p:nvSpPr>
+          <p:cNvPr id="18" name="Rectangle 17"/>
+          <p:cNvSpPr/>
+          <p:nvPr/>
+        </p:nvSpPr>
+        <p:spPr>
+          <a:xfrm>
+            <a:off x="548640" y="4069080"/>
+            <a:ext cx="64008" cy="2148840"/>
+          </a:xfrm>
+          <a:prstGeom prst="rect">
+            <a:avLst/>
+          </a:prstGeom>
+          <a:solidFill>
+            <a:srgbClr val="C9A96E"/>
+          </a:solidFill>
+          <a:ln>
+            <a:noFill/>
+          </a:ln>
+        </p:spPr>
+        <p:style>
+          <a:lnRef idx="1">
+            <a:schemeClr val="accent1"/>
+          </a:lnRef>
+          <a:fillRef idx="3">
+            <a:schemeClr val="accent1"/>
+          </a:fillRef>
+          <a:effectRef idx="2">
+            <a:schemeClr val="accent1"/>
+          </a:effectRef>
+          <a:fontRef idx="minor">
+            <a:schemeClr val="lt1"/>
+          </a:fontRef>
+        </p:style>
+        <p:txBody>
+          <a:bodyPr rtlCol="0" anchor="ctr"/>
+          <a:lstStyle/>
+          <a:p>
+            <a:pPr algn="ctr"/>
+            <a:endParaRPr/>
+          </a:p>
+        </p:txBody>
+      </p:sp>
+      <p:sp>
+        <p:nvSpPr>
+          <p:cNvPr id="19" name="TextBox 18"/>
+          <p:cNvSpPr txBox="1"/>
+          <p:nvPr/>
+        </p:nvSpPr>
+        <p:spPr>
+          <a:xfrm>
+            <a:off x="731520" y="4160520"/>
+            <a:ext cx="5212080" cy="365760"/>
+          </a:xfrm>
+          <a:prstGeom prst="rect">
+            <a:avLst/>
+          </a:prstGeom>
+          <a:noFill/>
+        </p:spPr>
+        <p:txBody>
+          <a:bodyPr wrap="square" anchor="t">
+            <a:spAutoFit/>
+          </a:bodyPr>
+          <a:lstStyle/>
+          <a:p>
+            <a:pPr algn="l"/>
+            <a:r>
+              <a:rPr sz="1600" b="1" i="0">
+                <a:solidFill>
+                  <a:srgbClr val="4A3728"/>
+                </a:solidFill>
+                <a:latin typeface="Liberation Serif"/>
+              </a:rPr>
+              <a:t>Real-Time User Feedback</a:t>
+            </a:r>
+          </a:p>
+        </p:txBody>
+      </p:sp>
+      <p:sp>
+        <p:nvSpPr>
+          <p:cNvPr id="20" name="TextBox 19"/>
+          <p:cNvSpPr txBox="1"/>
+          <p:nvPr/>
+        </p:nvSpPr>
+        <p:spPr>
+          <a:xfrm>
+            <a:off x="731520" y="4572000"/>
+            <a:ext cx="5212080" cy="640080"/>
+          </a:xfrm>
+          <a:prstGeom prst="rect">
+            <a:avLst/>
+          </a:prstGeom>
+          <a:noFill/>
+        </p:spPr>
+        <p:txBody>
+          <a:bodyPr wrap="square">
+            <a:spAutoFit/>
+          </a:bodyPr>
+          <a:lstStyle/>
+          <a:p>
+            <a:r>
+              <a:rPr sz="1100" b="1">
+                <a:solidFill>
+                  <a:srgbClr val="A84A3A"/>
+                </a:solidFill>
+                <a:latin typeface="Calibri"/>
+              </a:rPr>
+              <a:t>Problem: </a:t>
+            </a:r>
+            <a:r>
+              <a:rPr sz="1100">
+                <a:solidFill>
+                  <a:srgbClr val="5C4D3E"/>
+                </a:solidFill>
+                <a:latin typeface="Calibri"/>
+              </a:rPr>
+              <a:t>Clients needed immediate confirmation on booking status changes and payment receipts.</a:t>
+            </a:r>
+          </a:p>
+        </p:txBody>
+      </p:sp>
+      <p:sp>
+        <p:nvSpPr>
+          <p:cNvPr id="21" name="TextBox 20"/>
+          <p:cNvSpPr txBox="1"/>
+          <p:nvPr/>
+        </p:nvSpPr>
+        <p:spPr>
+          <a:xfrm>
+            <a:off x="731520" y="5212080"/>
+            <a:ext cx="5212080" cy="960120"/>
+          </a:xfrm>
+          <a:prstGeom prst="rect">
+            <a:avLst/>
+          </a:prstGeom>
+          <a:noFill/>
+        </p:spPr>
+        <p:txBody>
+          <a:bodyPr wrap="square">
+            <a:spAutoFit/>
+          </a:bodyPr>
+          <a:lstStyle/>
+          <a:p>
+            <a:r>
+              <a:rPr sz="1100" b="1">
+                <a:solidFill>
+                  <a:srgbClr val="4A6E3C"/>
+                </a:solidFill>
+                <a:latin typeface="Calibri"/>
+              </a:rPr>
+              <a:t>Solution: </a:t>
+            </a:r>
+            <a:r>
+              <a:rPr sz="1100">
+                <a:solidFill>
+                  <a:srgbClr val="5C4D3E"/>
+                </a:solidFill>
+                <a:latin typeface="Calibri"/>
+              </a:rPr>
+              <a:t>Designed a Notification model with type-tagged messages and an unread counter; the frontend polls and displays them via animated dashboard cards.</a:t>
+            </a:r>
+          </a:p>
+        </p:txBody>
+      </p:sp>
+      <p:sp>
+        <p:nvSpPr>
+          <p:cNvPr id="22" name="Rectangle 21"/>
+          <p:cNvSpPr/>
+          <p:nvPr/>
+        </p:nvSpPr>
+        <p:spPr>
+          <a:xfrm>
+            <a:off x="6217920" y="4069080"/>
+            <a:ext cx="5486400" cy="2148840"/>
+          </a:xfrm>
+          <a:prstGeom prst="rect">
+            <a:avLst/>
+          </a:prstGeom>
+          <a:solidFill>
+            <a:srgbClr val="FDFBF7"/>
+          </a:solidFill>
+          <a:ln w="9525">
+            <a:solidFill>
+              <a:srgbClr val="C9A96E"/>
+            </a:solidFill>
+          </a:ln>
+        </p:spPr>
+        <p:style>
+          <a:lnRef idx="1">
+            <a:schemeClr val="accent1"/>
+          </a:lnRef>
+          <a:fillRef idx="3">
+            <a:schemeClr val="accent1"/>
+          </a:fillRef>
+          <a:effectRef idx="2">
+            <a:schemeClr val="accent1"/>
+          </a:effectRef>
+          <a:fontRef idx="minor">
+            <a:schemeClr val="lt1"/>
+          </a:fontRef>
+        </p:style>
+        <p:txBody>
+          <a:bodyPr rtlCol="0" anchor="ctr"/>
+          <a:lstStyle/>
+          <a:p>
+            <a:pPr algn="ctr"/>
+            <a:endParaRPr/>
+          </a:p>
+        </p:txBody>
+      </p:sp>
+      <p:sp>
+        <p:nvSpPr>
+          <p:cNvPr id="23" name="Rectangle 22"/>
+          <p:cNvSpPr/>
+          <p:nvPr/>
+        </p:nvSpPr>
+        <p:spPr>
+          <a:xfrm>
+            <a:off x="6217920" y="4069080"/>
+            <a:ext cx="64008" cy="2148840"/>
+          </a:xfrm>
+          <a:prstGeom prst="rect">
+            <a:avLst/>
+          </a:prstGeom>
+          <a:solidFill>
+            <a:srgbClr val="C9A96E"/>
+          </a:solidFill>
+          <a:ln>
+            <a:noFill/>
+          </a:ln>
+        </p:spPr>
+        <p:style>
+          <a:lnRef idx="1">
+            <a:schemeClr val="accent1"/>
+          </a:lnRef>
+          <a:fillRef idx="3">
+            <a:schemeClr val="accent1"/>
+          </a:fillRef>
+          <a:effectRef idx="2">
+            <a:schemeClr val="accent1"/>
+          </a:effectRef>
+          <a:fontRef idx="minor">
+            <a:schemeClr val="lt1"/>
+          </a:fontRef>
+        </p:style>
+        <p:txBody>
+          <a:bodyPr rtlCol="0" anchor="ctr"/>
+          <a:lstStyle/>
+          <a:p>
+            <a:pPr algn="ctr"/>
+            <a:endParaRPr/>
+          </a:p>
+        </p:txBody>
+      </p:sp>
+      <p:sp>
+        <p:nvSpPr>
+          <p:cNvPr id="24" name="TextBox 23"/>
+          <p:cNvSpPr txBox="1"/>
+          <p:nvPr/>
+        </p:nvSpPr>
+        <p:spPr>
+          <a:xfrm>
+            <a:off x="6400800" y="4160520"/>
+            <a:ext cx="5212080" cy="365760"/>
+          </a:xfrm>
+          <a:prstGeom prst="rect">
+            <a:avLst/>
+          </a:prstGeom>
+          <a:noFill/>
+        </p:spPr>
+        <p:txBody>
+          <a:bodyPr wrap="square" anchor="t">
+            <a:spAutoFit/>
+          </a:bodyPr>
+          <a:lstStyle/>
+          <a:p>
+            <a:pPr algn="l"/>
+            <a:r>
+              <a:rPr sz="1600" b="1" i="0">
+                <a:solidFill>
+                  <a:srgbClr val="4A3728"/>
+                </a:solidFill>
+                <a:latin typeface="Liberation Serif"/>
+              </a:rPr>
+              <a:t>Responsive Wedding Aesthetic</a:t>
+            </a:r>
+          </a:p>
+        </p:txBody>
+      </p:sp>
+      <p:sp>
+        <p:nvSpPr>
+          <p:cNvPr id="25" name="TextBox 24"/>
+          <p:cNvSpPr txBox="1"/>
+          <p:nvPr/>
+        </p:nvSpPr>
+        <p:spPr>
+          <a:xfrm>
+            <a:off x="6400800" y="4572000"/>
+            <a:ext cx="5212080" cy="640080"/>
+          </a:xfrm>
+          <a:prstGeom prst="rect">
+            <a:avLst/>
+          </a:prstGeom>
+          <a:noFill/>
+        </p:spPr>
+        <p:txBody>
+          <a:bodyPr wrap="square">
+            <a:spAutoFit/>
+          </a:bodyPr>
+          <a:lstStyle/>
+          <a:p>
+            <a:r>
+              <a:rPr sz="1100" b="1">
+                <a:solidFill>
+                  <a:srgbClr val="A84A3A"/>
+                </a:solidFill>
+                <a:latin typeface="Calibri"/>
+              </a:rPr>
+              <a:t>Problem: </a:t>
+            </a:r>
+            <a:r>
+              <a:rPr sz="1100">
+                <a:solidFill>
+                  <a:srgbClr val="5C4D3E"/>
+                </a:solidFill>
+                <a:latin typeface="Calibri"/>
+              </a:rPr>
+              <a:t>A premium feel had to work from 320px mobile up to 4K displays without breaking layout.</a:t>
+            </a:r>
+          </a:p>
+        </p:txBody>
+      </p:sp>
+      <p:sp>
+        <p:nvSpPr>
+          <p:cNvPr id="26" name="TextBox 25"/>
+          <p:cNvSpPr txBox="1"/>
+          <p:nvPr/>
+        </p:nvSpPr>
+        <p:spPr>
+          <a:xfrm>
+            <a:off x="6400800" y="5212080"/>
+            <a:ext cx="5212080" cy="960120"/>
+          </a:xfrm>
+          <a:prstGeom prst="rect">
+            <a:avLst/>
+          </a:prstGeom>
+          <a:noFill/>
+        </p:spPr>
+        <p:txBody>
+          <a:bodyPr wrap="square">
+            <a:spAutoFit/>
+          </a:bodyPr>
+          <a:lstStyle/>
+          <a:p>
+            <a:r>
+              <a:rPr sz="1100" b="1">
+                <a:solidFill>
+                  <a:srgbClr val="4A6E3C"/>
+                </a:solidFill>
+                <a:latin typeface="Calibri"/>
+              </a:rPr>
+              <a:t>Solution: </a:t>
+            </a:r>
+            <a:r>
+              <a:rPr sz="1100">
+                <a:solidFill>
+                  <a:srgbClr val="5C4D3E"/>
+                </a:solidFill>
+                <a:latin typeface="Calibri"/>
+              </a:rPr>
+              <a:t>Used Tailwind's utility system with custom breakpoints, Framer Motion transitions, glass-morphism cards, and SweetAlert2 for consistent dialog styling.</a:t>
+            </a:r>
+          </a:p>
+        </p:txBody>
+      </p:sp>
+      <p:sp>
+        <p:nvSpPr>
+          <p:cNvPr id="27" name="TextBox 26"/>
+          <p:cNvSpPr txBox="1"/>
+          <p:nvPr/>
+        </p:nvSpPr>
+        <p:spPr>
+          <a:xfrm>
+            <a:off x="10789920" y="6510528"/>
+            <a:ext cx="1188720" cy="274320"/>
+          </a:xfrm>
+          <a:prstGeom prst="rect">
+            <a:avLst/>
+          </a:prstGeom>
+          <a:noFill/>
+        </p:spPr>
+        <p:txBody>
+          <a:bodyPr wrap="square" anchor="t">
+            <a:spAutoFit/>
+          </a:bodyPr>
+          <a:lstStyle/>
+          <a:p>
+            <a:pPr algn="r"/>
+            <a:r>
+              <a:rPr sz="1000" b="0" i="1">
+                <a:solidFill>
+                  <a:srgbClr val="A8894E"/>
+                </a:solidFill>
+                <a:latin typeface="Calibri"/>
+              </a:rPr>
+              <a:t>Page 14</a:t>
+            </a:r>
+          </a:p>
+        </p:txBody>
+      </p:sp>
+    </p:spTree>
+  </p:cSld>
+  <p:clrMapOvr>
+    <a:masterClrMapping/>
+  </p:clrMapOvr>
+</p:sld>
+</file>
+
+<file path=ppt/slides/slide15.xml><?xml version="1.0" encoding="utf-8"?>
+<p:sld xmlns:a="http://schemas.openxmlformats.org/drawingml/2006/main" xmlns:r="http://schemas.openxmlformats.org/officeDocument/2006/relationships" xmlns:p="http://schemas.openxmlformats.org/presentationml/2006/main">
+  <p:cSld>
+    <p:spTree>
+      <p:nvGrpSpPr>
+        <p:cNvPr id="1" name=""/>
+        <p:cNvGrpSpPr/>
+        <p:nvPr/>
+      </p:nvGrpSpPr>
+      <p:grpSpPr>
+        <a:xfrm>
+          <a:off x="0" y="0"/>
+          <a:ext cx="0" cy="0"/>
+          <a:chOff x="0" y="0"/>
+          <a:chExt cx="0" cy="0"/>
+        </a:xfrm>
+      </p:grpSpPr>
+      <p:sp>
+        <p:nvSpPr>
+          <p:cNvPr id="2" name="Rectangle 1"/>
+          <p:cNvSpPr/>
+          <p:nvPr/>
+        </p:nvSpPr>
+        <p:spPr>
+          <a:xfrm>
+            <a:off x="0" y="0"/>
+            <a:ext cx="12191695" cy="6858000"/>
+          </a:xfrm>
+          <a:prstGeom prst="rect">
+            <a:avLst/>
+          </a:prstGeom>
+          <a:solidFill>
+            <a:srgbClr val="FDF8F3"/>
+          </a:solidFill>
+          <a:ln>
+            <a:noFill/>
+          </a:ln>
+        </p:spPr>
+        <p:style>
+          <a:lnRef idx="1">
+            <a:schemeClr val="accent1"/>
+          </a:lnRef>
+          <a:fillRef idx="3">
+            <a:schemeClr val="accent1"/>
+          </a:fillRef>
+          <a:effectRef idx="2">
+            <a:schemeClr val="accent1"/>
+          </a:effectRef>
+          <a:fontRef idx="minor">
+            <a:schemeClr val="lt1"/>
+          </a:fontRef>
+        </p:style>
+        <p:txBody>
+          <a:bodyPr rtlCol="0" anchor="ctr"/>
+          <a:lstStyle/>
+          <a:p>
+            <a:pPr algn="ctr"/>
+            <a:endParaRPr/>
+          </a:p>
+        </p:txBody>
+      </p:sp>
+      <p:sp>
+        <p:nvSpPr>
+          <p:cNvPr id="3" name="Rectangle 2"/>
+          <p:cNvSpPr/>
+          <p:nvPr/>
+        </p:nvSpPr>
+        <p:spPr>
+          <a:xfrm>
+            <a:off x="0" y="0"/>
+            <a:ext cx="12191695" cy="1097280"/>
+          </a:xfrm>
+          <a:prstGeom prst="rect">
+            <a:avLst/>
+          </a:prstGeom>
+          <a:solidFill>
+            <a:srgbClr val="F5ECDD"/>
+          </a:solidFill>
+          <a:ln>
+            <a:noFill/>
+          </a:ln>
+        </p:spPr>
+        <p:style>
+          <a:lnRef idx="1">
+            <a:schemeClr val="accent1"/>
+          </a:lnRef>
+          <a:fillRef idx="3">
+            <a:schemeClr val="accent1"/>
+          </a:fillRef>
+          <a:effectRef idx="2">
+            <a:schemeClr val="accent1"/>
+          </a:effectRef>
+          <a:fontRef idx="minor">
+            <a:schemeClr val="lt1"/>
+          </a:fontRef>
+        </p:style>
+        <p:txBody>
+          <a:bodyPr rtlCol="0" anchor="ctr"/>
+          <a:lstStyle/>
+          <a:p>
+            <a:pPr algn="ctr"/>
+            <a:endParaRPr/>
+          </a:p>
+        </p:txBody>
+      </p:sp>
+      <p:sp>
+        <p:nvSpPr>
+          <p:cNvPr id="4" name="TextBox 3"/>
+          <p:cNvSpPr txBox="1"/>
+          <p:nvPr/>
+        </p:nvSpPr>
+        <p:spPr>
+          <a:xfrm>
+            <a:off x="548640" y="228600"/>
+            <a:ext cx="10972800" cy="731520"/>
+          </a:xfrm>
+          <a:prstGeom prst="rect">
+            <a:avLst/>
+          </a:prstGeom>
+          <a:noFill/>
+        </p:spPr>
+        <p:txBody>
+          <a:bodyPr wrap="square" anchor="ctr">
+            <a:spAutoFit/>
+          </a:bodyPr>
+          <a:lstStyle/>
+          <a:p>
+            <a:pPr algn="l"/>
+            <a:r>
+              <a:rPr sz="3400" b="1" i="0">
+                <a:solidFill>
+                  <a:srgbClr val="4A3728"/>
+                </a:solidFill>
+                <a:latin typeface="Liberation Serif"/>
+              </a:rPr>
+              <a:t>Future Scope &amp; Conclusion</a:t>
+            </a:r>
+          </a:p>
+        </p:txBody>
+      </p:sp>
+      <p:sp>
+        <p:nvSpPr>
+          <p:cNvPr id="5" name="Rectangle 4"/>
+          <p:cNvSpPr/>
+          <p:nvPr/>
+        </p:nvSpPr>
+        <p:spPr>
+          <a:xfrm>
+            <a:off x="566928" y="932688"/>
+            <a:ext cx="2011680" cy="38100"/>
+          </a:xfrm>
+          <a:prstGeom prst="rect">
+            <a:avLst/>
+          </a:prstGeom>
+          <a:solidFill>
+            <a:srgbClr val="C9A96E"/>
+          </a:solidFill>
+          <a:ln>
+            <a:noFill/>
+          </a:ln>
+        </p:spPr>
+        <p:style>
+          <a:lnRef idx="1">
+            <a:schemeClr val="accent1"/>
+          </a:lnRef>
+          <a:fillRef idx="3">
+            <a:schemeClr val="accent1"/>
+          </a:fillRef>
+          <a:effectRef idx="2">
+            <a:schemeClr val="accent1"/>
+          </a:effectRef>
+          <a:fontRef idx="minor">
+            <a:schemeClr val="lt1"/>
+          </a:fontRef>
+        </p:style>
+        <p:txBody>
+          <a:bodyPr rtlCol="0" anchor="ctr"/>
+          <a:lstStyle/>
+          <a:p>
+            <a:pPr algn="ctr"/>
+            <a:endParaRPr/>
+          </a:p>
+        </p:txBody>
+      </p:sp>
+      <p:sp>
+        <p:nvSpPr>
+          <p:cNvPr id="6" name="TextBox 5"/>
+          <p:cNvSpPr txBox="1"/>
+          <p:nvPr/>
+        </p:nvSpPr>
+        <p:spPr>
+          <a:xfrm>
+            <a:off x="548640" y="1234440"/>
+            <a:ext cx="11155680" cy="411480"/>
+          </a:xfrm>
+          <a:prstGeom prst="rect">
+            <a:avLst/>
+          </a:prstGeom>
+          <a:noFill/>
+        </p:spPr>
+        <p:txBody>
+          <a:bodyPr wrap="square" anchor="t">
+            <a:spAutoFit/>
+          </a:bodyPr>
+          <a:lstStyle/>
+          <a:p>
+            <a:pPr algn="l"/>
+            <a:r>
+              <a:rPr sz="1300" b="0" i="1">
+                <a:solidFill>
+                  <a:srgbClr val="8B6F47"/>
+                </a:solidFill>
+                <a:latin typeface="Calibri"/>
+              </a:rPr>
+              <a:t>Our platform is production-ready today, with a clear roadmap for expanding into a complete wedding-tech ecosystem.</a:t>
+            </a:r>
+          </a:p>
+        </p:txBody>
+      </p:sp>
+      <p:sp>
+        <p:nvSpPr>
+          <p:cNvPr id="7" name="TextBox 6"/>
+          <p:cNvSpPr txBox="1"/>
+          <p:nvPr/>
+        </p:nvSpPr>
+        <p:spPr>
+          <a:xfrm>
+            <a:off x="548640" y="1783080"/>
+            <a:ext cx="5486400" cy="365760"/>
+          </a:xfrm>
+          <a:prstGeom prst="rect">
+            <a:avLst/>
+          </a:prstGeom>
+          <a:noFill/>
+        </p:spPr>
+        <p:txBody>
+          <a:bodyPr wrap="square" anchor="b">
+            <a:spAutoFit/>
+          </a:bodyPr>
+          <a:lstStyle/>
+          <a:p>
+            <a:pPr algn="l"/>
+            <a:r>
+              <a:rPr sz="2000" b="0" i="0">
+                <a:solidFill>
+                  <a:srgbClr val="8B6F47"/>
+                </a:solidFill>
+                <a:latin typeface="Liberation Serif"/>
+              </a:rPr>
+              <a:t>Planned Enhancements</a:t>
+            </a:r>
+          </a:p>
+        </p:txBody>
+      </p:sp>
+      <p:sp>
+        <p:nvSpPr>
+          <p:cNvPr id="8" name="Rectangle 7"/>
+          <p:cNvSpPr/>
+          <p:nvPr/>
+        </p:nvSpPr>
+        <p:spPr>
+          <a:xfrm>
+            <a:off x="548640" y="2148840"/>
+            <a:ext cx="5486400" cy="9525"/>
+          </a:xfrm>
+          <a:prstGeom prst="rect">
+            <a:avLst/>
+          </a:prstGeom>
+          <a:solidFill>
+            <a:srgbClr val="C9A96E"/>
+          </a:solidFill>
+          <a:ln>
+            <a:noFill/>
+          </a:ln>
+        </p:spPr>
+        <p:style>
+          <a:lnRef idx="1">
+            <a:schemeClr val="accent1"/>
+          </a:lnRef>
+          <a:fillRef idx="3">
+            <a:schemeClr val="accent1"/>
+          </a:fillRef>
+          <a:effectRef idx="2">
+            <a:schemeClr val="accent1"/>
+          </a:effectRef>
+          <a:fontRef idx="minor">
+            <a:schemeClr val="lt1"/>
+          </a:fontRef>
+        </p:style>
+        <p:txBody>
+          <a:bodyPr rtlCol="0" anchor="ctr"/>
+          <a:lstStyle/>
+          <a:p>
+            <a:pPr algn="ctr"/>
+            <a:endParaRPr/>
+          </a:p>
+        </p:txBody>
+      </p:sp>
+      <p:sp>
+        <p:nvSpPr>
+          <p:cNvPr id="9" name="Rectangle 8"/>
+          <p:cNvSpPr/>
+          <p:nvPr/>
+        </p:nvSpPr>
+        <p:spPr>
+          <a:xfrm>
+            <a:off x="548640" y="2286000"/>
+            <a:ext cx="5486400" cy="3291840"/>
+          </a:xfrm>
+          <a:prstGeom prst="rect">
+            <a:avLst/>
+          </a:prstGeom>
+          <a:solidFill>
+            <a:srgbClr val="FDFBF7"/>
+          </a:solidFill>
+          <a:ln w="9525">
+            <a:solidFill>
+              <a:srgbClr val="C9A96E"/>
+            </a:solidFill>
+          </a:ln>
+        </p:spPr>
+        <p:style>
+          <a:lnRef idx="1">
+            <a:schemeClr val="accent1"/>
+          </a:lnRef>
+          <a:fillRef idx="3">
+            <a:schemeClr val="accent1"/>
+          </a:fillRef>
+          <a:effectRef idx="2">
+            <a:schemeClr val="accent1"/>
+          </a:effectRef>
+          <a:fontRef idx="minor">
+            <a:schemeClr val="lt1"/>
+          </a:fontRef>
+        </p:style>
+        <p:txBody>
+          <a:bodyPr rtlCol="0" anchor="ctr"/>
+          <a:lstStyle/>
+          <a:p>
+            <a:pPr algn="ctr"/>
+            <a:endParaRPr/>
+          </a:p>
+        </p:txBody>
+      </p:sp>
+      <p:sp>
+        <p:nvSpPr>
+          <p:cNvPr id="10" name="Rectangle 9"/>
+          <p:cNvSpPr/>
+          <p:nvPr/>
+        </p:nvSpPr>
+        <p:spPr>
+          <a:xfrm>
+            <a:off x="548640" y="2286000"/>
+            <a:ext cx="64008" cy="3291840"/>
+          </a:xfrm>
+          <a:prstGeom prst="rect">
+            <a:avLst/>
+          </a:prstGeom>
+          <a:solidFill>
+            <a:srgbClr val="C9A96E"/>
+          </a:solidFill>
+          <a:ln>
+            <a:noFill/>
+          </a:ln>
+        </p:spPr>
+        <p:style>
+          <a:lnRef idx="1">
+            <a:schemeClr val="accent1"/>
+          </a:lnRef>
+          <a:fillRef idx="3">
+            <a:schemeClr val="accent1"/>
+          </a:fillRef>
+          <a:effectRef idx="2">
+            <a:schemeClr val="accent1"/>
+          </a:effectRef>
+          <a:fontRef idx="minor">
+            <a:schemeClr val="lt1"/>
+          </a:fontRef>
+        </p:style>
+        <p:txBody>
+          <a:bodyPr rtlCol="0" anchor="ctr"/>
+          <a:lstStyle/>
+          <a:p>
+            <a:pPr algn="ctr"/>
+            <a:endParaRPr/>
+          </a:p>
+        </p:txBody>
+      </p:sp>
+      <p:sp>
+        <p:nvSpPr>
+          <p:cNvPr id="11" name="TextBox 10"/>
+          <p:cNvSpPr txBox="1"/>
+          <p:nvPr/>
+        </p:nvSpPr>
+        <p:spPr>
+          <a:xfrm>
+            <a:off x="731520" y="2423160"/>
+            <a:ext cx="5212080" cy="3063240"/>
+          </a:xfrm>
+          <a:prstGeom prst="rect">
+            <a:avLst/>
+          </a:prstGeom>
+          <a:noFill/>
+        </p:spPr>
+        <p:txBody>
+          <a:bodyPr wrap="square">
+            <a:spAutoFit/>
+          </a:bodyPr>
+          <a:lstStyle/>
+          <a:p>
+            <a:pPr algn="l">
+              <a:lnSpc>
+                <a:spcPct val="135000"/>
+              </a:lnSpc>
+            </a:pPr>
+            <a:r>
+              <a:rPr sz="1200" b="1">
+                <a:solidFill>
+                  <a:srgbClr val="C9A96E"/>
+                </a:solidFill>
+                <a:latin typeface="Calibri"/>
+              </a:rPr>
+              <a:t>•  </a:t>
+            </a:r>
+            <a:r>
+              <a:rPr sz="1200">
+                <a:solidFill>
+                  <a:srgbClr val="5C4D3E"/>
+                </a:solidFill>
+                <a:latin typeface="Calibri"/>
+              </a:rPr>
+              <a:t>Razorpay / Stripe payment gateway for live transactions</a:t>
+            </a:r>
+          </a:p>
+          <a:p>
+            <a:pPr algn="l">
+              <a:lnSpc>
+                <a:spcPct val="135000"/>
+              </a:lnSpc>
+            </a:pPr>
+            <a:r>
+              <a:rPr sz="1200" b="1">
+                <a:solidFill>
+                  <a:srgbClr val="C9A96E"/>
+                </a:solidFill>
+                <a:latin typeface="Calibri"/>
+              </a:rPr>
+              <a:t>•  </a:t>
+            </a:r>
+            <a:r>
+              <a:rPr sz="1200">
+                <a:solidFill>
+                  <a:srgbClr val="5C4D3E"/>
+                </a:solidFill>
+                <a:latin typeface="Calibri"/>
+              </a:rPr>
+              <a:t>WhatsApp OTP login for frictionless client onboarding</a:t>
+            </a:r>
+          </a:p>
+          <a:p>
+            <a:pPr algn="l">
+              <a:lnSpc>
+                <a:spcPct val="135000"/>
+              </a:lnSpc>
+            </a:pPr>
+            <a:r>
+              <a:rPr sz="1200" b="1">
+                <a:solidFill>
+                  <a:srgbClr val="C9A96E"/>
+                </a:solidFill>
+                <a:latin typeface="Calibri"/>
+              </a:rPr>
+              <a:t>•  </a:t>
+            </a:r>
+            <a:r>
+              <a:rPr sz="1200">
+                <a:solidFill>
+                  <a:srgbClr val="5C4D3E"/>
+                </a:solidFill>
+                <a:latin typeface="Calibri"/>
+              </a:rPr>
+              <a:t>AI-powered vendor recommendations based on budget &amp; style</a:t>
+            </a:r>
+          </a:p>
+          <a:p>
+            <a:pPr algn="l">
+              <a:lnSpc>
+                <a:spcPct val="135000"/>
+              </a:lnSpc>
+            </a:pPr>
+            <a:r>
+              <a:rPr sz="1200" b="1">
+                <a:solidFill>
+                  <a:srgbClr val="C9A96E"/>
+                </a:solidFill>
+                <a:latin typeface="Calibri"/>
+              </a:rPr>
+              <a:t>•  </a:t>
+            </a:r>
+            <a:r>
+              <a:rPr sz="1200">
+                <a:solidFill>
+                  <a:srgbClr val="5C4D3E"/>
+                </a:solidFill>
+                <a:latin typeface="Calibri"/>
+              </a:rPr>
+              <a:t>Real-time chat via WebSocket / Socket.IO instead of polling</a:t>
+            </a:r>
+          </a:p>
+          <a:p>
+            <a:pPr algn="l">
+              <a:lnSpc>
+                <a:spcPct val="135000"/>
+              </a:lnSpc>
+            </a:pPr>
+            <a:r>
+              <a:rPr sz="1200" b="1">
+                <a:solidFill>
+                  <a:srgbClr val="C9A96E"/>
+                </a:solidFill>
+                <a:latin typeface="Calibri"/>
+              </a:rPr>
+              <a:t>•  </a:t>
+            </a:r>
+            <a:r>
+              <a:rPr sz="1200">
+                <a:solidFill>
+                  <a:srgbClr val="5C4D3E"/>
+                </a:solidFill>
+                <a:latin typeface="Calibri"/>
+              </a:rPr>
+              <a:t>Native mobile app (React Native) for clients on the go</a:t>
+            </a:r>
+          </a:p>
+          <a:p>
+            <a:pPr algn="l">
+              <a:lnSpc>
+                <a:spcPct val="135000"/>
+              </a:lnSpc>
+            </a:pPr>
+            <a:r>
+              <a:rPr sz="1200" b="1">
+                <a:solidFill>
+                  <a:srgbClr val="C9A96E"/>
+                </a:solidFill>
+                <a:latin typeface="Calibri"/>
+              </a:rPr>
+              <a:t>•  </a:t>
+            </a:r>
+            <a:r>
+              <a:rPr sz="1200">
+                <a:solidFill>
+                  <a:srgbClr val="5C4D3E"/>
+                </a:solidFill>
+                <a:latin typeface="Calibri"/>
+              </a:rPr>
+              <a:t>Multi-language support (English, Hindi, Bengali)</a:t>
+            </a:r>
+          </a:p>
+          <a:p>
+            <a:pPr algn="l">
+              <a:lnSpc>
+                <a:spcPct val="135000"/>
+              </a:lnSpc>
+            </a:pPr>
+            <a:r>
+              <a:rPr sz="1200" b="1">
+                <a:solidFill>
+                  <a:srgbClr val="C9A96E"/>
+                </a:solidFill>
+                <a:latin typeface="Calibri"/>
+              </a:rPr>
+              <a:t>•  </a:t>
+            </a:r>
+            <a:r>
+              <a:rPr sz="1200">
+                <a:solidFill>
+                  <a:srgbClr val="5C4D3E"/>
+                </a:solidFill>
+                <a:latin typeface="Calibri"/>
+              </a:rPr>
+              <a:t>Automated email &amp; SMS reminders through Twilio / SendGrid</a:t>
+            </a:r>
+          </a:p>
+          <a:p>
+            <a:pPr algn="l">
+              <a:lnSpc>
+                <a:spcPct val="135000"/>
+              </a:lnSpc>
+            </a:pPr>
+            <a:r>
+              <a:rPr sz="1200" b="1">
+                <a:solidFill>
+                  <a:srgbClr val="C9A96E"/>
+                </a:solidFill>
+                <a:latin typeface="Calibri"/>
+              </a:rPr>
+              <a:t>•  </a:t>
+            </a:r>
+            <a:r>
+              <a:rPr sz="1200">
+                <a:solidFill>
+                  <a:srgbClr val="5C4D3E"/>
+                </a:solidFill>
+                <a:latin typeface="Calibri"/>
+              </a:rPr>
+              <a:t>Admin revenue forecasting with Chart.js visualizations</a:t>
+            </a:r>
+          </a:p>
+        </p:txBody>
+      </p:sp>
+      <p:sp>
+        <p:nvSpPr>
+          <p:cNvPr id="12" name="TextBox 11"/>
+          <p:cNvSpPr txBox="1"/>
+          <p:nvPr/>
+        </p:nvSpPr>
+        <p:spPr>
+          <a:xfrm>
+            <a:off x="6217920" y="1783080"/>
+            <a:ext cx="5486400" cy="365760"/>
+          </a:xfrm>
+          <a:prstGeom prst="rect">
+            <a:avLst/>
+          </a:prstGeom>
+          <a:noFill/>
+        </p:spPr>
+        <p:txBody>
+          <a:bodyPr wrap="square" anchor="b">
+            <a:spAutoFit/>
+          </a:bodyPr>
+          <a:lstStyle/>
+          <a:p>
+            <a:pPr algn="l"/>
+            <a:r>
+              <a:rPr sz="2000" b="0" i="0">
+                <a:solidFill>
+                  <a:srgbClr val="8B6F47"/>
+                </a:solidFill>
+                <a:latin typeface="Liberation Serif"/>
+              </a:rPr>
+              <a:t>Project Conclusion</a:t>
+            </a:r>
+          </a:p>
+        </p:txBody>
+      </p:sp>
+      <p:sp>
+        <p:nvSpPr>
+          <p:cNvPr id="13" name="Rectangle 12"/>
+          <p:cNvSpPr/>
+          <p:nvPr/>
+        </p:nvSpPr>
+        <p:spPr>
+          <a:xfrm>
+            <a:off x="6217920" y="2148840"/>
+            <a:ext cx="5486400" cy="9525"/>
+          </a:xfrm>
+          <a:prstGeom prst="rect">
+            <a:avLst/>
+          </a:prstGeom>
+          <a:solidFill>
+            <a:srgbClr val="C9A96E"/>
+          </a:solidFill>
+          <a:ln>
+            <a:noFill/>
+          </a:ln>
+        </p:spPr>
+        <p:style>
+          <a:lnRef idx="1">
+            <a:schemeClr val="accent1"/>
+          </a:lnRef>
+          <a:fillRef idx="3">
+            <a:schemeClr val="accent1"/>
+          </a:fillRef>
+          <a:effectRef idx="2">
+            <a:schemeClr val="accent1"/>
+          </a:effectRef>
+          <a:fontRef idx="minor">
+            <a:schemeClr val="lt1"/>
+          </a:fontRef>
+        </p:style>
+        <p:txBody>
+          <a:bodyPr rtlCol="0" anchor="ctr"/>
+          <a:lstStyle/>
+          <a:p>
+            <a:pPr algn="ctr"/>
+            <a:endParaRPr/>
+          </a:p>
+        </p:txBody>
+      </p:sp>
+      <p:sp>
+        <p:nvSpPr>
+          <p:cNvPr id="14" name="Rectangle 13"/>
+          <p:cNvSpPr/>
+          <p:nvPr/>
+        </p:nvSpPr>
+        <p:spPr>
+          <a:xfrm>
+            <a:off x="6217920" y="2286000"/>
+            <a:ext cx="5486400" cy="3291840"/>
+          </a:xfrm>
+          <a:prstGeom prst="rect">
+            <a:avLst/>
+          </a:prstGeom>
+          <a:solidFill>
+            <a:srgbClr val="FDFBF7"/>
+          </a:solidFill>
+          <a:ln w="9525">
+            <a:solidFill>
+              <a:srgbClr val="C9A96E"/>
+            </a:solidFill>
+          </a:ln>
+        </p:spPr>
+        <p:style>
+          <a:lnRef idx="1">
+            <a:schemeClr val="accent1"/>
+          </a:lnRef>
+          <a:fillRef idx="3">
+            <a:schemeClr val="accent1"/>
+          </a:fillRef>
+          <a:effectRef idx="2">
+            <a:schemeClr val="accent1"/>
+          </a:effectRef>
+          <a:fontRef idx="minor">
+            <a:schemeClr val="lt1"/>
+          </a:fontRef>
+        </p:style>
+        <p:txBody>
+          <a:bodyPr rtlCol="0" anchor="ctr"/>
+          <a:lstStyle/>
+          <a:p>
+            <a:pPr algn="ctr"/>
+            <a:endParaRPr/>
+          </a:p>
+        </p:txBody>
+      </p:sp>
+      <p:sp>
+        <p:nvSpPr>
+          <p:cNvPr id="15" name="Rectangle 14"/>
+          <p:cNvSpPr/>
+          <p:nvPr/>
+        </p:nvSpPr>
+        <p:spPr>
+          <a:xfrm>
+            <a:off x="6217920" y="2286000"/>
+            <a:ext cx="64008" cy="3291840"/>
+          </a:xfrm>
+          <a:prstGeom prst="rect">
+            <a:avLst/>
+          </a:prstGeom>
+          <a:solidFill>
+            <a:srgbClr val="C9A96E"/>
+          </a:solidFill>
+          <a:ln>
+            <a:noFill/>
+          </a:ln>
+        </p:spPr>
+        <p:style>
+          <a:lnRef idx="1">
+            <a:schemeClr val="accent1"/>
+          </a:lnRef>
+          <a:fillRef idx="3">
+            <a:schemeClr val="accent1"/>
+          </a:fillRef>
+          <a:effectRef idx="2">
+            <a:schemeClr val="accent1"/>
+          </a:effectRef>
+          <a:fontRef idx="minor">
+            <a:schemeClr val="lt1"/>
+          </a:fontRef>
+        </p:style>
+        <p:txBody>
+          <a:bodyPr rtlCol="0" anchor="ctr"/>
+          <a:lstStyle/>
+          <a:p>
+            <a:pPr algn="ctr"/>
+            <a:endParaRPr/>
+          </a:p>
+        </p:txBody>
+      </p:sp>
+      <p:sp>
+        <p:nvSpPr>
+          <p:cNvPr id="16" name="TextBox 15"/>
+          <p:cNvSpPr txBox="1"/>
+          <p:nvPr/>
+        </p:nvSpPr>
+        <p:spPr>
+          <a:xfrm>
+            <a:off x="6400800" y="2423160"/>
+            <a:ext cx="5212080" cy="3063240"/>
+          </a:xfrm>
+          <a:prstGeom prst="rect">
+            <a:avLst/>
+          </a:prstGeom>
+          <a:noFill/>
+        </p:spPr>
+        <p:txBody>
+          <a:bodyPr wrap="square">
+            <a:spAutoFit/>
+          </a:bodyPr>
+          <a:lstStyle/>
+          <a:p>
+            <a:pPr>
+              <a:lnSpc>
+                <a:spcPct val="135000"/>
+              </a:lnSpc>
+            </a:pPr>
+            <a:r>
+              <a:rPr sz="1200" b="0">
+                <a:solidFill>
+                  <a:srgbClr val="5C4D3E"/>
+                </a:solidFill>
+                <a:latin typeface="Calibri"/>
+              </a:rPr>
+              <a:t>The Wedding Banquet Management System successfully delivers an end-to-end solution that bridges couples, admins, and vendors on a single elegant platform.</a:t>
+            </a:r>
+          </a:p>
+          <a:p>
+            <a:pPr>
+              <a:lnSpc>
+                <a:spcPct val="135000"/>
+              </a:lnSpc>
+            </a:pPr>
+            <a:endParaRPr sz="1200" b="0">
+              <a:solidFill>
+                <a:srgbClr val="5C4D3E"/>
+              </a:solidFill>
+              <a:latin typeface="Calibri"/>
+            </a:endParaRPr>
+          </a:p>
+          <a:p>
+            <a:pPr>
+              <a:lnSpc>
+                <a:spcPct val="135000"/>
+              </a:lnSpc>
+            </a:pPr>
+            <a:r>
+              <a:rPr sz="1200" b="0">
+                <a:solidFill>
+                  <a:srgbClr val="5C4D3E"/>
+                </a:solidFill>
+                <a:latin typeface="Calibri"/>
+              </a:rPr>
+              <a:t>Across 11 data models, 12 controller modules, and 40+ REST endpoints, the MERN stack has proven to be a scalable, maintainable foundation for real-world wedding operations.</a:t>
+            </a:r>
+          </a:p>
+          <a:p>
+            <a:pPr>
+              <a:lnSpc>
+                <a:spcPct val="135000"/>
+              </a:lnSpc>
+            </a:pPr>
+            <a:endParaRPr sz="1200" b="0">
+              <a:solidFill>
+                <a:srgbClr val="5C4D3E"/>
+              </a:solidFill>
+              <a:latin typeface="Calibri"/>
+            </a:endParaRPr>
+          </a:p>
+          <a:p>
+            <a:pPr>
+              <a:lnSpc>
+                <a:spcPct val="135000"/>
+              </a:lnSpc>
+            </a:pPr>
+            <a:r>
+              <a:rPr sz="1200" b="0">
+                <a:solidFill>
+                  <a:srgbClr val="5C4D3E"/>
+                </a:solidFill>
+                <a:latin typeface="Calibri"/>
+              </a:rPr>
+              <a:t>The project strengthened our skills in full-stack architecture, secure authentication, database design, responsive UI, and agile collaboration.</a:t>
+            </a:r>
+          </a:p>
+        </p:txBody>
+      </p:sp>
+      <p:sp>
+        <p:nvSpPr>
+          <p:cNvPr id="17" name="Rounded Rectangle 16"/>
+          <p:cNvSpPr/>
+          <p:nvPr/>
+        </p:nvSpPr>
+        <p:spPr>
+          <a:xfrm>
+            <a:off x="563727" y="5760720"/>
+            <a:ext cx="2103120" cy="685800"/>
+          </a:xfrm>
+          <a:prstGeom prst="roundRect">
+            <a:avLst/>
+          </a:prstGeom>
+          <a:solidFill>
+            <a:srgbClr val="F9F1E3"/>
+          </a:solidFill>
+          <a:ln w="9525">
+            <a:solidFill>
+              <a:srgbClr val="C9A96E"/>
+            </a:solidFill>
+          </a:ln>
+        </p:spPr>
+        <p:style>
+          <a:lnRef idx="1">
+            <a:schemeClr val="accent1"/>
+          </a:lnRef>
+          <a:fillRef idx="3">
+            <a:schemeClr val="accent1"/>
+          </a:fillRef>
+          <a:effectRef idx="2">
+            <a:schemeClr val="accent1"/>
+          </a:effectRef>
+          <a:fontRef idx="minor">
+            <a:schemeClr val="lt1"/>
+          </a:fontRef>
+        </p:style>
+        <p:txBody>
+          <a:bodyPr rtlCol="0" anchor="ctr"/>
+          <a:lstStyle/>
+          <a:p>
+            <a:pPr algn="ctr"/>
+            <a:endParaRPr/>
+          </a:p>
+        </p:txBody>
+      </p:sp>
+      <p:sp>
+        <p:nvSpPr>
+          <p:cNvPr id="18" name="TextBox 17"/>
+          <p:cNvSpPr txBox="1"/>
+          <p:nvPr/>
+        </p:nvSpPr>
+        <p:spPr>
+          <a:xfrm>
+            <a:off x="563727" y="5806440"/>
+            <a:ext cx="2103120" cy="320040"/>
+          </a:xfrm>
+          <a:prstGeom prst="rect">
+            <a:avLst/>
+          </a:prstGeom>
+          <a:noFill/>
+        </p:spPr>
+        <p:txBody>
+          <a:bodyPr wrap="square" anchor="t">
+            <a:spAutoFit/>
+          </a:bodyPr>
+          <a:lstStyle/>
+          <a:p>
+            <a:pPr algn="ctr"/>
+            <a:r>
+              <a:rPr sz="1800" b="1" i="0">
+                <a:solidFill>
+                  <a:srgbClr val="4A3728"/>
+                </a:solidFill>
+                <a:latin typeface="Liberation Serif"/>
+              </a:rPr>
+              <a:t>15+</a:t>
+            </a:r>
+          </a:p>
+        </p:txBody>
+      </p:sp>
+      <p:sp>
+        <p:nvSpPr>
+          <p:cNvPr id="19" name="TextBox 18"/>
+          <p:cNvSpPr txBox="1"/>
+          <p:nvPr/>
+        </p:nvSpPr>
+        <p:spPr>
+          <a:xfrm>
+            <a:off x="563727" y="6144768"/>
+            <a:ext cx="2103120" cy="274320"/>
+          </a:xfrm>
+          <a:prstGeom prst="rect">
+            <a:avLst/>
+          </a:prstGeom>
+          <a:noFill/>
+        </p:spPr>
+        <p:txBody>
+          <a:bodyPr wrap="square" anchor="t">
+            <a:spAutoFit/>
+          </a:bodyPr>
+          <a:lstStyle/>
+          <a:p>
+            <a:pPr algn="ctr"/>
+            <a:r>
+              <a:rPr sz="1000" b="0" i="1">
+                <a:solidFill>
+                  <a:srgbClr val="A8894E"/>
+                </a:solidFill>
+                <a:latin typeface="Calibri"/>
+              </a:rPr>
+              <a:t>React Pages</a:t>
+            </a:r>
+          </a:p>
+        </p:txBody>
+      </p:sp>
+      <p:sp>
+        <p:nvSpPr>
+          <p:cNvPr id="20" name="Rounded Rectangle 19"/>
+          <p:cNvSpPr/>
+          <p:nvPr/>
+        </p:nvSpPr>
+        <p:spPr>
+          <a:xfrm>
+            <a:off x="2804007" y="5760720"/>
+            <a:ext cx="2103120" cy="685800"/>
+          </a:xfrm>
+          <a:prstGeom prst="roundRect">
+            <a:avLst/>
+          </a:prstGeom>
+          <a:solidFill>
+            <a:srgbClr val="F9F1E3"/>
+          </a:solidFill>
+          <a:ln w="9525">
+            <a:solidFill>
+              <a:srgbClr val="C9A96E"/>
+            </a:solidFill>
+          </a:ln>
+        </p:spPr>
+        <p:style>
+          <a:lnRef idx="1">
+            <a:schemeClr val="accent1"/>
+          </a:lnRef>
+          <a:fillRef idx="3">
+            <a:schemeClr val="accent1"/>
+          </a:fillRef>
+          <a:effectRef idx="2">
+            <a:schemeClr val="accent1"/>
+          </a:effectRef>
+          <a:fontRef idx="minor">
+            <a:schemeClr val="lt1"/>
+          </a:fontRef>
+        </p:style>
+        <p:txBody>
+          <a:bodyPr rtlCol="0" anchor="ctr"/>
+          <a:lstStyle/>
+          <a:p>
+            <a:pPr algn="ctr"/>
+            <a:endParaRPr/>
+          </a:p>
+        </p:txBody>
+      </p:sp>
+      <p:sp>
+        <p:nvSpPr>
+          <p:cNvPr id="21" name="TextBox 20"/>
+          <p:cNvSpPr txBox="1"/>
+          <p:nvPr/>
+        </p:nvSpPr>
+        <p:spPr>
+          <a:xfrm>
+            <a:off x="2804007" y="5806440"/>
+            <a:ext cx="2103120" cy="320040"/>
+          </a:xfrm>
+          <a:prstGeom prst="rect">
+            <a:avLst/>
+          </a:prstGeom>
+          <a:noFill/>
+        </p:spPr>
+        <p:txBody>
+          <a:bodyPr wrap="square" anchor="t">
+            <a:spAutoFit/>
+          </a:bodyPr>
+          <a:lstStyle/>
+          <a:p>
+            <a:pPr algn="ctr"/>
+            <a:r>
+              <a:rPr sz="1800" b="1" i="0">
+                <a:solidFill>
+                  <a:srgbClr val="4A3728"/>
+                </a:solidFill>
+                <a:latin typeface="Liberation Serif"/>
+              </a:rPr>
+              <a:t>40+</a:t>
+            </a:r>
+          </a:p>
+        </p:txBody>
+      </p:sp>
+      <p:sp>
+        <p:nvSpPr>
+          <p:cNvPr id="22" name="TextBox 21"/>
+          <p:cNvSpPr txBox="1"/>
+          <p:nvPr/>
+        </p:nvSpPr>
+        <p:spPr>
+          <a:xfrm>
+            <a:off x="2804007" y="6144768"/>
+            <a:ext cx="2103120" cy="274320"/>
+          </a:xfrm>
+          <a:prstGeom prst="rect">
+            <a:avLst/>
+          </a:prstGeom>
+          <a:noFill/>
+        </p:spPr>
+        <p:txBody>
+          <a:bodyPr wrap="square" anchor="t">
+            <a:spAutoFit/>
+          </a:bodyPr>
+          <a:lstStyle/>
+          <a:p>
+            <a:pPr algn="ctr"/>
+            <a:r>
+              <a:rPr sz="1000" b="0" i="1">
+                <a:solidFill>
+                  <a:srgbClr val="A8894E"/>
+                </a:solidFill>
+                <a:latin typeface="Calibri"/>
+              </a:rPr>
+              <a:t>API Endpoints</a:t>
+            </a:r>
+          </a:p>
+        </p:txBody>
+      </p:sp>
+      <p:sp>
+        <p:nvSpPr>
+          <p:cNvPr id="23" name="Rounded Rectangle 22"/>
+          <p:cNvSpPr/>
+          <p:nvPr/>
+        </p:nvSpPr>
+        <p:spPr>
+          <a:xfrm>
+            <a:off x="5044287" y="5760720"/>
+            <a:ext cx="2103120" cy="685800"/>
+          </a:xfrm>
+          <a:prstGeom prst="roundRect">
+            <a:avLst/>
+          </a:prstGeom>
+          <a:solidFill>
+            <a:srgbClr val="F9F1E3"/>
+          </a:solidFill>
+          <a:ln w="9525">
+            <a:solidFill>
+              <a:srgbClr val="C9A96E"/>
+            </a:solidFill>
+          </a:ln>
+        </p:spPr>
+        <p:style>
+          <a:lnRef idx="1">
+            <a:schemeClr val="accent1"/>
+          </a:lnRef>
+          <a:fillRef idx="3">
+            <a:schemeClr val="accent1"/>
+          </a:fillRef>
+          <a:effectRef idx="2">
+            <a:schemeClr val="accent1"/>
+          </a:effectRef>
+          <a:fontRef idx="minor">
+            <a:schemeClr val="lt1"/>
+          </a:fontRef>
+        </p:style>
+        <p:txBody>
+          <a:bodyPr rtlCol="0" anchor="ctr"/>
+          <a:lstStyle/>
+          <a:p>
+            <a:pPr algn="ctr"/>
+            <a:endParaRPr/>
+          </a:p>
+        </p:txBody>
+      </p:sp>
+      <p:sp>
+        <p:nvSpPr>
+          <p:cNvPr id="24" name="TextBox 23"/>
+          <p:cNvSpPr txBox="1"/>
+          <p:nvPr/>
+        </p:nvSpPr>
+        <p:spPr>
+          <a:xfrm>
+            <a:off x="5044287" y="5806440"/>
+            <a:ext cx="2103120" cy="320040"/>
+          </a:xfrm>
+          <a:prstGeom prst="rect">
+            <a:avLst/>
+          </a:prstGeom>
+          <a:noFill/>
+        </p:spPr>
+        <p:txBody>
+          <a:bodyPr wrap="square" anchor="t">
+            <a:spAutoFit/>
+          </a:bodyPr>
+          <a:lstStyle/>
+          <a:p>
+            <a:pPr algn="ctr"/>
+            <a:r>
+              <a:rPr sz="1800" b="1" i="0">
+                <a:solidFill>
+                  <a:srgbClr val="4A3728"/>
+                </a:solidFill>
+                <a:latin typeface="Liberation Serif"/>
+              </a:rPr>
+              <a:t>11</a:t>
+            </a:r>
+          </a:p>
+        </p:txBody>
+      </p:sp>
+      <p:sp>
+        <p:nvSpPr>
+          <p:cNvPr id="25" name="TextBox 24"/>
+          <p:cNvSpPr txBox="1"/>
+          <p:nvPr/>
+        </p:nvSpPr>
+        <p:spPr>
+          <a:xfrm>
+            <a:off x="5044287" y="6144768"/>
+            <a:ext cx="2103120" cy="274320"/>
+          </a:xfrm>
+          <a:prstGeom prst="rect">
+            <a:avLst/>
+          </a:prstGeom>
+          <a:noFill/>
+        </p:spPr>
+        <p:txBody>
+          <a:bodyPr wrap="square" anchor="t">
+            <a:spAutoFit/>
+          </a:bodyPr>
+          <a:lstStyle/>
+          <a:p>
+            <a:pPr algn="ctr"/>
+            <a:r>
+              <a:rPr sz="1000" b="0" i="1">
+                <a:solidFill>
+                  <a:srgbClr val="A8894E"/>
+                </a:solidFill>
+                <a:latin typeface="Calibri"/>
+              </a:rPr>
+              <a:t>DB Models</a:t>
+            </a:r>
+          </a:p>
+        </p:txBody>
+      </p:sp>
+      <p:sp>
+        <p:nvSpPr>
+          <p:cNvPr id="26" name="Rounded Rectangle 25"/>
+          <p:cNvSpPr/>
+          <p:nvPr/>
+        </p:nvSpPr>
+        <p:spPr>
+          <a:xfrm>
+            <a:off x="7284567" y="5760720"/>
+            <a:ext cx="2103120" cy="685800"/>
+          </a:xfrm>
+          <a:prstGeom prst="roundRect">
+            <a:avLst/>
+          </a:prstGeom>
+          <a:solidFill>
+            <a:srgbClr val="F9F1E3"/>
+          </a:solidFill>
+          <a:ln w="9525">
+            <a:solidFill>
+              <a:srgbClr val="C9A96E"/>
+            </a:solidFill>
+          </a:ln>
+        </p:spPr>
+        <p:style>
+          <a:lnRef idx="1">
+            <a:schemeClr val="accent1"/>
+          </a:lnRef>
+          <a:fillRef idx="3">
+            <a:schemeClr val="accent1"/>
+          </a:fillRef>
+          <a:effectRef idx="2">
+            <a:schemeClr val="accent1"/>
+          </a:effectRef>
+          <a:fontRef idx="minor">
+            <a:schemeClr val="lt1"/>
+          </a:fontRef>
+        </p:style>
+        <p:txBody>
+          <a:bodyPr rtlCol="0" anchor="ctr"/>
+          <a:lstStyle/>
+          <a:p>
+            <a:pPr algn="ctr"/>
+            <a:endParaRPr/>
+          </a:p>
+        </p:txBody>
+      </p:sp>
+      <p:sp>
+        <p:nvSpPr>
+          <p:cNvPr id="27" name="TextBox 26"/>
+          <p:cNvSpPr txBox="1"/>
+          <p:nvPr/>
+        </p:nvSpPr>
+        <p:spPr>
+          <a:xfrm>
+            <a:off x="7284567" y="5806440"/>
+            <a:ext cx="2103120" cy="320040"/>
+          </a:xfrm>
+          <a:prstGeom prst="rect">
+            <a:avLst/>
+          </a:prstGeom>
+          <a:noFill/>
+        </p:spPr>
+        <p:txBody>
+          <a:bodyPr wrap="square" anchor="t">
+            <a:spAutoFit/>
+          </a:bodyPr>
+          <a:lstStyle/>
+          <a:p>
+            <a:pPr algn="ctr"/>
+            <a:r>
+              <a:rPr sz="1800" b="1" i="0">
+                <a:solidFill>
+                  <a:srgbClr val="4A3728"/>
+                </a:solidFill>
+                <a:latin typeface="Liberation Serif"/>
+              </a:rPr>
+              <a:t>3</a:t>
+            </a:r>
+          </a:p>
+        </p:txBody>
+      </p:sp>
+      <p:sp>
+        <p:nvSpPr>
+          <p:cNvPr id="28" name="TextBox 27"/>
+          <p:cNvSpPr txBox="1"/>
+          <p:nvPr/>
+        </p:nvSpPr>
+        <p:spPr>
+          <a:xfrm>
+            <a:off x="7284567" y="6144768"/>
+            <a:ext cx="2103120" cy="274320"/>
+          </a:xfrm>
+          <a:prstGeom prst="rect">
+            <a:avLst/>
+          </a:prstGeom>
+          <a:noFill/>
+        </p:spPr>
+        <p:txBody>
+          <a:bodyPr wrap="square" anchor="t">
+            <a:spAutoFit/>
+          </a:bodyPr>
+          <a:lstStyle/>
+          <a:p>
+            <a:pPr algn="ctr"/>
+            <a:r>
+              <a:rPr sz="1000" b="0" i="1">
+                <a:solidFill>
+                  <a:srgbClr val="A8894E"/>
+                </a:solidFill>
+                <a:latin typeface="Calibri"/>
+              </a:rPr>
+              <a:t>User Roles</a:t>
+            </a:r>
+          </a:p>
+        </p:txBody>
+      </p:sp>
+      <p:sp>
+        <p:nvSpPr>
+          <p:cNvPr id="29" name="Rounded Rectangle 28"/>
+          <p:cNvSpPr/>
+          <p:nvPr/>
+        </p:nvSpPr>
+        <p:spPr>
+          <a:xfrm>
+            <a:off x="9524847" y="5760720"/>
+            <a:ext cx="2103120" cy="685800"/>
+          </a:xfrm>
+          <a:prstGeom prst="roundRect">
+            <a:avLst/>
+          </a:prstGeom>
+          <a:solidFill>
+            <a:srgbClr val="F9F1E3"/>
+          </a:solidFill>
+          <a:ln w="9525">
+            <a:solidFill>
+              <a:srgbClr val="C9A96E"/>
+            </a:solidFill>
+          </a:ln>
+        </p:spPr>
+        <p:style>
+          <a:lnRef idx="1">
+            <a:schemeClr val="accent1"/>
+          </a:lnRef>
+          <a:fillRef idx="3">
+            <a:schemeClr val="accent1"/>
+          </a:fillRef>
+          <a:effectRef idx="2">
+            <a:schemeClr val="accent1"/>
+          </a:effectRef>
+          <a:fontRef idx="minor">
+            <a:schemeClr val="lt1"/>
+          </a:fontRef>
+        </p:style>
+        <p:txBody>
+          <a:bodyPr rtlCol="0" anchor="ctr"/>
+          <a:lstStyle/>
+          <a:p>
+            <a:pPr algn="ctr"/>
+            <a:endParaRPr/>
+          </a:p>
+        </p:txBody>
+      </p:sp>
+      <p:sp>
+        <p:nvSpPr>
+          <p:cNvPr id="30" name="TextBox 29"/>
+          <p:cNvSpPr txBox="1"/>
+          <p:nvPr/>
+        </p:nvSpPr>
+        <p:spPr>
+          <a:xfrm>
+            <a:off x="9524847" y="5806440"/>
+            <a:ext cx="2103120" cy="320040"/>
+          </a:xfrm>
+          <a:prstGeom prst="rect">
+            <a:avLst/>
+          </a:prstGeom>
+          <a:noFill/>
+        </p:spPr>
+        <p:txBody>
+          <a:bodyPr wrap="square" anchor="t">
+            <a:spAutoFit/>
+          </a:bodyPr>
+          <a:lstStyle/>
+          <a:p>
+            <a:pPr algn="ctr"/>
+            <a:r>
+              <a:rPr sz="1800" b="1" i="0">
+                <a:solidFill>
+                  <a:srgbClr val="4A3728"/>
+                </a:solidFill>
+                <a:latin typeface="Liberation Serif"/>
+              </a:rPr>
+              <a:t>100%</a:t>
+            </a:r>
+          </a:p>
+        </p:txBody>
+      </p:sp>
+      <p:sp>
+        <p:nvSpPr>
+          <p:cNvPr id="31" name="TextBox 30"/>
+          <p:cNvSpPr txBox="1"/>
+          <p:nvPr/>
+        </p:nvSpPr>
+        <p:spPr>
+          <a:xfrm>
+            <a:off x="9524847" y="6144768"/>
+            <a:ext cx="2103120" cy="274320"/>
+          </a:xfrm>
+          <a:prstGeom prst="rect">
+            <a:avLst/>
+          </a:prstGeom>
+          <a:noFill/>
+        </p:spPr>
+        <p:txBody>
+          <a:bodyPr wrap="square" anchor="t">
+            <a:spAutoFit/>
+          </a:bodyPr>
+          <a:lstStyle/>
+          <a:p>
+            <a:pPr algn="ctr"/>
+            <a:r>
+              <a:rPr sz="1000" b="0" i="1">
+                <a:solidFill>
+                  <a:srgbClr val="A8894E"/>
+                </a:solidFill>
+                <a:latin typeface="Calibri"/>
+              </a:rPr>
+              <a:t>Responsive</a:t>
+            </a:r>
+          </a:p>
+        </p:txBody>
+      </p:sp>
+      <p:sp>
+        <p:nvSpPr>
+          <p:cNvPr id="32" name="TextBox 31"/>
+          <p:cNvSpPr txBox="1"/>
+          <p:nvPr/>
+        </p:nvSpPr>
+        <p:spPr>
+          <a:xfrm>
+            <a:off x="548640" y="6537960"/>
+            <a:ext cx="11155680" cy="274320"/>
+          </a:xfrm>
+          <a:prstGeom prst="rect">
+            <a:avLst/>
+          </a:prstGeom>
+          <a:noFill/>
+        </p:spPr>
+        <p:txBody>
+          <a:bodyPr wrap="square" anchor="t">
+            <a:spAutoFit/>
+          </a:bodyPr>
+          <a:lstStyle/>
+          <a:p>
+            <a:pPr algn="ctr"/>
+            <a:r>
+              <a:rPr sz="1200" b="0" i="1">
+                <a:solidFill>
+                  <a:srgbClr val="8B6F47"/>
+                </a:solidFill>
+                <a:latin typeface="Liberation Serif"/>
+              </a:rPr>
+              <a:t>— Crafted with ❤ using React, Node.js, Express &amp; MongoDB —</a:t>
+            </a:r>
+          </a:p>
+        </p:txBody>
+      </p:sp>
+      <p:sp>
+        <p:nvSpPr>
+          <p:cNvPr id="33" name="TextBox 32"/>
+          <p:cNvSpPr txBox="1"/>
+          <p:nvPr/>
+        </p:nvSpPr>
+        <p:spPr>
+          <a:xfrm>
+            <a:off x="10789920" y="6510528"/>
+            <a:ext cx="1188720" cy="274320"/>
+          </a:xfrm>
+          <a:prstGeom prst="rect">
+            <a:avLst/>
+          </a:prstGeom>
+          <a:noFill/>
+        </p:spPr>
+        <p:txBody>
+          <a:bodyPr wrap="square" anchor="t">
+            <a:spAutoFit/>
+          </a:bodyPr>
+          <a:lstStyle/>
+          <a:p>
+            <a:pPr algn="r"/>
+            <a:r>
+              <a:rPr sz="1000" b="0" i="1">
+                <a:solidFill>
+                  <a:srgbClr val="A8894E"/>
+                </a:solidFill>
+                <a:latin typeface="Calibri"/>
+              </a:rPr>
+              <a:t>Page 15</a:t>
+            </a:r>
+          </a:p>
+        </p:txBody>
+      </p:sp>
+    </p:spTree>
+  </p:cSld>
+  <p:clrMapOvr>
+    <a:masterClrMapping/>
+  </p:clrMapOvr>
+</p:sld>
+</file>
+
+<file path=ppt/slides/slide16.xml><?xml version="1.0" encoding="utf-8"?>
+<p:sld xmlns:a="http://schemas.openxmlformats.org/drawingml/2006/main" xmlns:r="http://schemas.openxmlformats.org/officeDocument/2006/relationships" xmlns:p="http://schemas.openxmlformats.org/presentationml/2006/main">
+  <p:cSld>
+    <p:spTree>
+      <p:nvGrpSpPr>
+        <p:cNvPr id="1" name=""/>
+        <p:cNvGrpSpPr/>
+        <p:nvPr/>
+      </p:nvGrpSpPr>
+      <p:grpSpPr>
+        <a:xfrm>
+          <a:off x="0" y="0"/>
+          <a:ext cx="0" cy="0"/>
+          <a:chOff x="0" y="0"/>
+          <a:chExt cx="0" cy="0"/>
+        </a:xfrm>
+      </p:grpSpPr>
+      <p:sp>
+        <p:nvSpPr>
           <p:cNvPr id="4" name="Rectangle 3">
             <a:extLst>
               <a:ext uri="{FF2B5EF4-FFF2-40B4-BE49-F238E27FC236}">
@@ -3976,7 +12170,7 @@
           <a:lstStyle/>
           <a:p>
             <a:pPr algn="ctr"/>
-            <a:endParaRPr lang="en-IN"/>
+            <a:endParaRPr lang="en-IN" dirty="0"/>
           </a:p>
         </p:txBody>
       </p:sp>
@@ -4075,6 +12269,595 @@
           <a:p>
             <a:pPr algn="ctr"/>
             <a:endParaRPr lang="en-IN"/>
+          </a:p>
+        </p:txBody>
+      </p:sp>
+      <p:sp>
+        <p:nvSpPr>
+          <p:cNvPr id="17" name="Rectangle 16">
+            <a:extLst>
+              <a:ext uri="{FF2B5EF4-FFF2-40B4-BE49-F238E27FC236}">
+                <a16:creationId xmlns:a16="http://schemas.microsoft.com/office/drawing/2014/main" id="{2B3722B9-F0E2-1532-F98D-1135F683FE63}"/>
+              </a:ext>
+            </a:extLst>
+          </p:cNvPr>
+          <p:cNvSpPr/>
+          <p:nvPr/>
+        </p:nvSpPr>
+        <p:spPr>
+          <a:xfrm>
+            <a:off x="703005" y="1799303"/>
+            <a:ext cx="4055808" cy="4396274"/>
+          </a:xfrm>
+          <a:prstGeom prst="rect">
+            <a:avLst/>
+          </a:prstGeom>
+          <a:solidFill>
+            <a:schemeClr val="bg1"/>
+          </a:solidFill>
+          <a:ln>
+            <a:solidFill>
+              <a:schemeClr val="bg1"/>
+            </a:solidFill>
+          </a:ln>
+          <a:effectLst/>
+        </p:spPr>
+        <p:style>
+          <a:lnRef idx="1">
+            <a:schemeClr val="accent1"/>
+          </a:lnRef>
+          <a:fillRef idx="3">
+            <a:schemeClr val="accent1"/>
+          </a:fillRef>
+          <a:effectRef idx="2">
+            <a:schemeClr val="accent1"/>
+          </a:effectRef>
+          <a:fontRef idx="minor">
+            <a:schemeClr val="lt1"/>
+          </a:fontRef>
+        </p:style>
+        <p:txBody>
+          <a:bodyPr rtlCol="0" anchor="ctr"/>
+          <a:lstStyle/>
+          <a:p>
+            <a:pPr marL="342900" indent="-342900">
+              <a:buFont typeface="+mj-lt"/>
+              <a:buAutoNum type="arabicPeriod"/>
+            </a:pPr>
+            <a:r>
+              <a:rPr lang="en-IN" sz="1500" dirty="0">
+                <a:solidFill>
+                  <a:srgbClr val="3D2C1F">
+                    <a:alpha val="92000"/>
+                  </a:srgbClr>
+                </a:solidFill>
+                <a:latin typeface="Myanmar Text" panose="020B0502040204020203" pitchFamily="34" charset="0"/>
+                <a:cs typeface="Myanmar Text" panose="020B0502040204020203" pitchFamily="34" charset="0"/>
+                <a:hlinkClick r:id="rId12" action="ppaction://hlinksldjump">
+                  <a:extLst>
+                    <a:ext uri="{A12FA001-AC4F-418D-AE19-62706E023703}">
+                      <ahyp:hlinkClr xmlns:ahyp="http://schemas.microsoft.com/office/drawing/2018/hyperlinkcolor" val="tx"/>
+                    </a:ext>
+                  </a:extLst>
+                </a:hlinkClick>
+              </a:rPr>
+              <a:t>Introduction</a:t>
+            </a:r>
+            <a:endParaRPr lang="en-IN" sz="1500" dirty="0">
+              <a:solidFill>
+                <a:srgbClr val="3D2C1F">
+                  <a:alpha val="92000"/>
+                </a:srgbClr>
+              </a:solidFill>
+              <a:latin typeface="Myanmar Text" panose="020B0502040204020203" pitchFamily="34" charset="0"/>
+              <a:cs typeface="Myanmar Text" panose="020B0502040204020203" pitchFamily="34" charset="0"/>
+            </a:endParaRPr>
+          </a:p>
+          <a:p>
+            <a:pPr marL="342900" indent="-342900">
+              <a:buFont typeface="+mj-lt"/>
+              <a:buAutoNum type="arabicPeriod"/>
+            </a:pPr>
+            <a:r>
+              <a:rPr lang="en-IN" sz="1500" dirty="0">
+                <a:solidFill>
+                  <a:srgbClr val="3D2C1F">
+                    <a:alpha val="92000"/>
+                  </a:srgbClr>
+                </a:solidFill>
+                <a:latin typeface="Myanmar Text" panose="020B0502040204020203" pitchFamily="34" charset="0"/>
+                <a:cs typeface="Myanmar Text" panose="020B0502040204020203" pitchFamily="34" charset="0"/>
+                <a:hlinkClick r:id="rId4" action="ppaction://hlinksldjump">
+                  <a:extLst>
+                    <a:ext uri="{A12FA001-AC4F-418D-AE19-62706E023703}">
+                      <ahyp:hlinkClr xmlns:ahyp="http://schemas.microsoft.com/office/drawing/2018/hyperlinkcolor" val="tx"/>
+                    </a:ext>
+                  </a:extLst>
+                </a:hlinkClick>
+              </a:rPr>
+              <a:t>System Requirements</a:t>
+            </a:r>
+            <a:endParaRPr lang="en-IN" sz="1500" dirty="0">
+              <a:solidFill>
+                <a:srgbClr val="3D2C1F">
+                  <a:alpha val="92000"/>
+                </a:srgbClr>
+              </a:solidFill>
+              <a:latin typeface="Myanmar Text" panose="020B0502040204020203" pitchFamily="34" charset="0"/>
+              <a:cs typeface="Myanmar Text" panose="020B0502040204020203" pitchFamily="34" charset="0"/>
+            </a:endParaRPr>
+          </a:p>
+          <a:p>
+            <a:pPr marL="342900" indent="-342900">
+              <a:buFont typeface="+mj-lt"/>
+              <a:buAutoNum type="arabicPeriod"/>
+            </a:pPr>
+            <a:r>
+              <a:rPr lang="en-IN" sz="1500" dirty="0">
+                <a:solidFill>
+                  <a:srgbClr val="3D2C1F">
+                    <a:alpha val="92000"/>
+                  </a:srgbClr>
+                </a:solidFill>
+                <a:latin typeface="Myanmar Text" panose="020B0502040204020203" pitchFamily="34" charset="0"/>
+                <a:cs typeface="Myanmar Text" panose="020B0502040204020203" pitchFamily="34" charset="0"/>
+                <a:hlinkClick r:id="rId5" action="ppaction://hlinksldjump">
+                  <a:extLst>
+                    <a:ext uri="{A12FA001-AC4F-418D-AE19-62706E023703}">
+                      <ahyp:hlinkClr xmlns:ahyp="http://schemas.microsoft.com/office/drawing/2018/hyperlinkcolor" val="tx"/>
+                    </a:ext>
+                  </a:extLst>
+                </a:hlinkClick>
+              </a:rPr>
+              <a:t>System Flowchart</a:t>
+            </a:r>
+            <a:endParaRPr lang="en-IN" sz="1500" dirty="0">
+              <a:solidFill>
+                <a:srgbClr val="3D2C1F">
+                  <a:alpha val="92000"/>
+                </a:srgbClr>
+              </a:solidFill>
+              <a:latin typeface="Myanmar Text" panose="020B0502040204020203" pitchFamily="34" charset="0"/>
+              <a:cs typeface="Myanmar Text" panose="020B0502040204020203" pitchFamily="34" charset="0"/>
+            </a:endParaRPr>
+          </a:p>
+          <a:p>
+            <a:pPr marL="342900" indent="-342900">
+              <a:buFont typeface="+mj-lt"/>
+              <a:buAutoNum type="arabicPeriod"/>
+            </a:pPr>
+            <a:r>
+              <a:rPr lang="en-IN" sz="1500" dirty="0">
+                <a:solidFill>
+                  <a:srgbClr val="3D2C1F">
+                    <a:alpha val="92000"/>
+                  </a:srgbClr>
+                </a:solidFill>
+                <a:latin typeface="Myanmar Text" panose="020B0502040204020203" pitchFamily="34" charset="0"/>
+                <a:cs typeface="Myanmar Text" panose="020B0502040204020203" pitchFamily="34" charset="0"/>
+                <a:hlinkClick r:id="rId6" action="ppaction://hlinksldjump">
+                  <a:extLst>
+                    <a:ext uri="{A12FA001-AC4F-418D-AE19-62706E023703}">
+                      <ahyp:hlinkClr xmlns:ahyp="http://schemas.microsoft.com/office/drawing/2018/hyperlinkcolor" val="tx"/>
+                    </a:ext>
+                  </a:extLst>
+                </a:hlinkClick>
+              </a:rPr>
+              <a:t>E-R Diagram</a:t>
+            </a:r>
+            <a:endParaRPr lang="en-IN" sz="1500" dirty="0">
+              <a:solidFill>
+                <a:srgbClr val="3D2C1F">
+                  <a:alpha val="92000"/>
+                </a:srgbClr>
+              </a:solidFill>
+              <a:latin typeface="Myanmar Text" panose="020B0502040204020203" pitchFamily="34" charset="0"/>
+              <a:cs typeface="Myanmar Text" panose="020B0502040204020203" pitchFamily="34" charset="0"/>
+            </a:endParaRPr>
+          </a:p>
+          <a:p>
+            <a:pPr marL="342900" indent="-342900">
+              <a:buFont typeface="+mj-lt"/>
+              <a:buAutoNum type="arabicPeriod"/>
+            </a:pPr>
+            <a:r>
+              <a:rPr lang="en-IN" sz="1500" dirty="0">
+                <a:solidFill>
+                  <a:srgbClr val="3D2C1F">
+                    <a:alpha val="92000"/>
+                  </a:srgbClr>
+                </a:solidFill>
+                <a:latin typeface="Myanmar Text" panose="020B0502040204020203" pitchFamily="34" charset="0"/>
+                <a:cs typeface="Myanmar Text" panose="020B0502040204020203" pitchFamily="34" charset="0"/>
+                <a:hlinkClick r:id="rId7" action="ppaction://hlinksldjump">
+                  <a:extLst>
+                    <a:ext uri="{A12FA001-AC4F-418D-AE19-62706E023703}">
+                      <ahyp:hlinkClr xmlns:ahyp="http://schemas.microsoft.com/office/drawing/2018/hyperlinkcolor" val="tx"/>
+                    </a:ext>
+                  </a:extLst>
+                </a:hlinkClick>
+              </a:rPr>
+              <a:t>Data Flow Diagram</a:t>
+            </a:r>
+            <a:endParaRPr lang="en-IN" sz="1500" dirty="0">
+              <a:solidFill>
+                <a:srgbClr val="3D2C1F">
+                  <a:alpha val="92000"/>
+                </a:srgbClr>
+              </a:solidFill>
+              <a:latin typeface="Myanmar Text" panose="020B0502040204020203" pitchFamily="34" charset="0"/>
+              <a:cs typeface="Myanmar Text" panose="020B0502040204020203" pitchFamily="34" charset="0"/>
+            </a:endParaRPr>
+          </a:p>
+          <a:p>
+            <a:pPr marL="342900" indent="-342900">
+              <a:buFont typeface="+mj-lt"/>
+              <a:buAutoNum type="arabicPeriod"/>
+            </a:pPr>
+            <a:r>
+              <a:rPr lang="en-IN" sz="1500" dirty="0">
+                <a:solidFill>
+                  <a:srgbClr val="3D2C1F">
+                    <a:alpha val="92000"/>
+                  </a:srgbClr>
+                </a:solidFill>
+                <a:latin typeface="Myanmar Text" panose="020B0502040204020203" pitchFamily="34" charset="0"/>
+                <a:cs typeface="Myanmar Text" panose="020B0502040204020203" pitchFamily="34" charset="0"/>
+                <a:hlinkClick r:id="rId2" action="ppaction://hlinksldjump">
+                  <a:extLst>
+                    <a:ext uri="{A12FA001-AC4F-418D-AE19-62706E023703}">
+                      <ahyp:hlinkClr xmlns:ahyp="http://schemas.microsoft.com/office/drawing/2018/hyperlinkcolor" val="tx"/>
+                    </a:ext>
+                  </a:extLst>
+                </a:hlinkClick>
+              </a:rPr>
+              <a:t>Benchmark &amp; Performance Comparison</a:t>
+            </a:r>
+            <a:endParaRPr lang="en-IN" sz="1500" dirty="0">
+              <a:solidFill>
+                <a:srgbClr val="3D2C1F">
+                  <a:alpha val="92000"/>
+                </a:srgbClr>
+              </a:solidFill>
+              <a:latin typeface="Myanmar Text" panose="020B0502040204020203" pitchFamily="34" charset="0"/>
+              <a:cs typeface="Myanmar Text" panose="020B0502040204020203" pitchFamily="34" charset="0"/>
+            </a:endParaRPr>
+          </a:p>
+          <a:p>
+            <a:pPr marL="342900" indent="-342900">
+              <a:buFont typeface="+mj-lt"/>
+              <a:buAutoNum type="arabicPeriod"/>
+            </a:pPr>
+            <a:r>
+              <a:rPr lang="en-IN" sz="1500" dirty="0">
+                <a:solidFill>
+                  <a:srgbClr val="3D2C1F">
+                    <a:alpha val="92000"/>
+                  </a:srgbClr>
+                </a:solidFill>
+                <a:latin typeface="Myanmar Text" panose="020B0502040204020203" pitchFamily="34" charset="0"/>
+                <a:cs typeface="Myanmar Text" panose="020B0502040204020203" pitchFamily="34" charset="0"/>
+                <a:hlinkClick r:id="rId8" action="ppaction://hlinksldjump">
+                  <a:extLst>
+                    <a:ext uri="{A12FA001-AC4F-418D-AE19-62706E023703}">
+                      <ahyp:hlinkClr xmlns:ahyp="http://schemas.microsoft.com/office/drawing/2018/hyperlinkcolor" val="tx"/>
+                    </a:ext>
+                  </a:extLst>
+                </a:hlinkClick>
+              </a:rPr>
+              <a:t>Execution &amp; Demo</a:t>
+            </a:r>
+            <a:endParaRPr lang="en-IN" sz="1500" dirty="0">
+              <a:solidFill>
+                <a:srgbClr val="3D2C1F">
+                  <a:alpha val="92000"/>
+                </a:srgbClr>
+              </a:solidFill>
+              <a:latin typeface="Myanmar Text" panose="020B0502040204020203" pitchFamily="34" charset="0"/>
+              <a:cs typeface="Myanmar Text" panose="020B0502040204020203" pitchFamily="34" charset="0"/>
+            </a:endParaRPr>
+          </a:p>
+          <a:p>
+            <a:pPr marL="342900" indent="-342900">
+              <a:buFont typeface="+mj-lt"/>
+              <a:buAutoNum type="arabicPeriod"/>
+            </a:pPr>
+            <a:r>
+              <a:rPr lang="en-IN" sz="1500" dirty="0">
+                <a:solidFill>
+                  <a:srgbClr val="3D2C1F">
+                    <a:alpha val="92000"/>
+                  </a:srgbClr>
+                </a:solidFill>
+                <a:latin typeface="Myanmar Text" panose="020B0502040204020203" pitchFamily="34" charset="0"/>
+                <a:cs typeface="Myanmar Text" panose="020B0502040204020203" pitchFamily="34" charset="0"/>
+                <a:hlinkClick r:id="rId11" action="ppaction://hlinksldjump">
+                  <a:extLst>
+                    <a:ext uri="{A12FA001-AC4F-418D-AE19-62706E023703}">
+                      <ahyp:hlinkClr xmlns:ahyp="http://schemas.microsoft.com/office/drawing/2018/hyperlinkcolor" val="tx"/>
+                    </a:ext>
+                  </a:extLst>
+                </a:hlinkClick>
+              </a:rPr>
+              <a:t>Job Responsibilities</a:t>
+            </a:r>
+            <a:endParaRPr lang="en-IN" sz="1500" dirty="0">
+              <a:solidFill>
+                <a:srgbClr val="3D2C1F">
+                  <a:alpha val="92000"/>
+                </a:srgbClr>
+              </a:solidFill>
+              <a:latin typeface="Myanmar Text" panose="020B0502040204020203" pitchFamily="34" charset="0"/>
+              <a:cs typeface="Myanmar Text" panose="020B0502040204020203" pitchFamily="34" charset="0"/>
+            </a:endParaRPr>
+          </a:p>
+          <a:p>
+            <a:pPr marL="342900" indent="-342900">
+              <a:buFont typeface="+mj-lt"/>
+              <a:buAutoNum type="arabicPeriod"/>
+            </a:pPr>
+            <a:r>
+              <a:rPr lang="en-IN" sz="1500" dirty="0">
+                <a:solidFill>
+                  <a:srgbClr val="3D2C1F">
+                    <a:alpha val="92000"/>
+                  </a:srgbClr>
+                </a:solidFill>
+                <a:latin typeface="Myanmar Text" panose="020B0502040204020203" pitchFamily="34" charset="0"/>
+                <a:cs typeface="Myanmar Text" panose="020B0502040204020203" pitchFamily="34" charset="0"/>
+                <a:hlinkClick r:id="rId9" action="ppaction://hlinksldjump">
+                  <a:extLst>
+                    <a:ext uri="{A12FA001-AC4F-418D-AE19-62706E023703}">
+                      <ahyp:hlinkClr xmlns:ahyp="http://schemas.microsoft.com/office/drawing/2018/hyperlinkcolor" val="tx"/>
+                    </a:ext>
+                  </a:extLst>
+                </a:hlinkClick>
+              </a:rPr>
+              <a:t>Project Stakeholders</a:t>
+            </a:r>
+            <a:endParaRPr lang="en-IN" sz="1500" dirty="0">
+              <a:solidFill>
+                <a:srgbClr val="3D2C1F">
+                  <a:alpha val="92000"/>
+                </a:srgbClr>
+              </a:solidFill>
+              <a:latin typeface="Myanmar Text" panose="020B0502040204020203" pitchFamily="34" charset="0"/>
+              <a:cs typeface="Myanmar Text" panose="020B0502040204020203" pitchFamily="34" charset="0"/>
+            </a:endParaRPr>
+          </a:p>
+          <a:p>
+            <a:pPr marL="342900" indent="-342900">
+              <a:buFont typeface="+mj-lt"/>
+              <a:buAutoNum type="arabicPeriod"/>
+            </a:pPr>
+            <a:r>
+              <a:rPr lang="en-IN" sz="1500" dirty="0">
+                <a:solidFill>
+                  <a:srgbClr val="3D2C1F">
+                    <a:alpha val="92000"/>
+                  </a:srgbClr>
+                </a:solidFill>
+                <a:latin typeface="Myanmar Text" panose="020B0502040204020203" pitchFamily="34" charset="0"/>
+                <a:cs typeface="Myanmar Text" panose="020B0502040204020203" pitchFamily="34" charset="0"/>
+                <a:hlinkClick r:id="rId13" action="ppaction://hlinksldjump">
+                  <a:extLst>
+                    <a:ext uri="{A12FA001-AC4F-418D-AE19-62706E023703}">
+                      <ahyp:hlinkClr xmlns:ahyp="http://schemas.microsoft.com/office/drawing/2018/hyperlinkcolor" val="tx"/>
+                    </a:ext>
+                  </a:extLst>
+                </a:hlinkClick>
+              </a:rPr>
+              <a:t>Database Schema</a:t>
+            </a:r>
+            <a:endParaRPr lang="en-IN" sz="1500" dirty="0">
+              <a:solidFill>
+                <a:srgbClr val="3D2C1F">
+                  <a:alpha val="92000"/>
+                </a:srgbClr>
+              </a:solidFill>
+              <a:latin typeface="Myanmar Text" panose="020B0502040204020203" pitchFamily="34" charset="0"/>
+              <a:cs typeface="Myanmar Text" panose="020B0502040204020203" pitchFamily="34" charset="0"/>
+            </a:endParaRPr>
+          </a:p>
+          <a:p>
+            <a:pPr marL="342900" indent="-342900">
+              <a:buFont typeface="+mj-lt"/>
+              <a:buAutoNum type="arabicPeriod"/>
+            </a:pPr>
+            <a:r>
+              <a:rPr lang="en-IN" sz="1500" dirty="0">
+                <a:solidFill>
+                  <a:srgbClr val="3D2C1F">
+                    <a:alpha val="92000"/>
+                  </a:srgbClr>
+                </a:solidFill>
+                <a:latin typeface="Myanmar Text" panose="020B0502040204020203" pitchFamily="34" charset="0"/>
+                <a:cs typeface="Myanmar Text" panose="020B0502040204020203" pitchFamily="34" charset="0"/>
+                <a:hlinkClick r:id="rId14" action="ppaction://hlinksldjump">
+                  <a:extLst>
+                    <a:ext uri="{A12FA001-AC4F-418D-AE19-62706E023703}">
+                      <ahyp:hlinkClr xmlns:ahyp="http://schemas.microsoft.com/office/drawing/2018/hyperlinkcolor" val="tx"/>
+                    </a:ext>
+                  </a:extLst>
+                </a:hlinkClick>
+              </a:rPr>
+              <a:t>Security &amp; Auth</a:t>
+            </a:r>
+            <a:endParaRPr lang="en-IN" sz="1500" dirty="0">
+              <a:solidFill>
+                <a:srgbClr val="3D2C1F">
+                  <a:alpha val="92000"/>
+                </a:srgbClr>
+              </a:solidFill>
+              <a:latin typeface="Myanmar Text" panose="020B0502040204020203" pitchFamily="34" charset="0"/>
+              <a:cs typeface="Myanmar Text" panose="020B0502040204020203" pitchFamily="34" charset="0"/>
+            </a:endParaRPr>
+          </a:p>
+          <a:p>
+            <a:pPr marL="342900" indent="-342900">
+              <a:buFont typeface="+mj-lt"/>
+              <a:buAutoNum type="arabicPeriod"/>
+            </a:pPr>
+            <a:r>
+              <a:rPr lang="en-IN" sz="1500" dirty="0">
+                <a:solidFill>
+                  <a:srgbClr val="3D2C1F">
+                    <a:alpha val="92000"/>
+                  </a:srgbClr>
+                </a:solidFill>
+                <a:latin typeface="Myanmar Text" panose="020B0502040204020203" pitchFamily="34" charset="0"/>
+                <a:cs typeface="Myanmar Text" panose="020B0502040204020203" pitchFamily="34" charset="0"/>
+                <a:hlinkClick r:id="rId15" action="ppaction://hlinksldjump">
+                  <a:extLst>
+                    <a:ext uri="{A12FA001-AC4F-418D-AE19-62706E023703}">
+                      <ahyp:hlinkClr xmlns:ahyp="http://schemas.microsoft.com/office/drawing/2018/hyperlinkcolor" val="tx"/>
+                    </a:ext>
+                  </a:extLst>
+                </a:hlinkClick>
+              </a:rPr>
+              <a:t>Rest API endpoints</a:t>
+            </a:r>
+            <a:endParaRPr lang="en-IN" sz="1500" dirty="0">
+              <a:solidFill>
+                <a:srgbClr val="3D2C1F">
+                  <a:alpha val="92000"/>
+                </a:srgbClr>
+              </a:solidFill>
+              <a:latin typeface="Myanmar Text" panose="020B0502040204020203" pitchFamily="34" charset="0"/>
+              <a:cs typeface="Myanmar Text" panose="020B0502040204020203" pitchFamily="34" charset="0"/>
+            </a:endParaRPr>
+          </a:p>
+          <a:p>
+            <a:pPr marL="342900" indent="-342900">
+              <a:buFont typeface="+mj-lt"/>
+              <a:buAutoNum type="arabicPeriod"/>
+            </a:pPr>
+            <a:r>
+              <a:rPr lang="en-IN" sz="1500" dirty="0">
+                <a:solidFill>
+                  <a:srgbClr val="3D2C1F">
+                    <a:alpha val="92000"/>
+                  </a:srgbClr>
+                </a:solidFill>
+                <a:latin typeface="Myanmar Text" panose="020B0502040204020203" pitchFamily="34" charset="0"/>
+                <a:cs typeface="Myanmar Text" panose="020B0502040204020203" pitchFamily="34" charset="0"/>
+                <a:hlinkClick r:id="rId16" action="ppaction://hlinksldjump">
+                  <a:extLst>
+                    <a:ext uri="{A12FA001-AC4F-418D-AE19-62706E023703}">
+                      <ahyp:hlinkClr xmlns:ahyp="http://schemas.microsoft.com/office/drawing/2018/hyperlinkcolor" val="tx"/>
+                    </a:ext>
+                  </a:extLst>
+                </a:hlinkClick>
+              </a:rPr>
+              <a:t>Challenges Faced</a:t>
+            </a:r>
+            <a:endParaRPr lang="en-IN" sz="1500" dirty="0">
+              <a:solidFill>
+                <a:srgbClr val="3D2C1F">
+                  <a:alpha val="92000"/>
+                </a:srgbClr>
+              </a:solidFill>
+              <a:latin typeface="Myanmar Text" panose="020B0502040204020203" pitchFamily="34" charset="0"/>
+              <a:cs typeface="Myanmar Text" panose="020B0502040204020203" pitchFamily="34" charset="0"/>
+            </a:endParaRPr>
+          </a:p>
+          <a:p>
+            <a:pPr marL="342900" indent="-342900">
+              <a:buFont typeface="+mj-lt"/>
+              <a:buAutoNum type="arabicPeriod"/>
+            </a:pPr>
+            <a:r>
+              <a:rPr lang="en-IN" sz="1500" dirty="0">
+                <a:solidFill>
+                  <a:srgbClr val="3D2C1F">
+                    <a:alpha val="92000"/>
+                  </a:srgbClr>
+                </a:solidFill>
+                <a:latin typeface="Myanmar Text" panose="020B0502040204020203" pitchFamily="34" charset="0"/>
+                <a:cs typeface="Myanmar Text" panose="020B0502040204020203" pitchFamily="34" charset="0"/>
+                <a:hlinkClick r:id="rId17" action="ppaction://hlinksldjump">
+                  <a:extLst>
+                    <a:ext uri="{A12FA001-AC4F-418D-AE19-62706E023703}">
+                      <ahyp:hlinkClr xmlns:ahyp="http://schemas.microsoft.com/office/drawing/2018/hyperlinkcolor" val="tx"/>
+                    </a:ext>
+                  </a:extLst>
+                </a:hlinkClick>
+              </a:rPr>
+              <a:t>Future Scope </a:t>
+            </a:r>
+            <a:endParaRPr lang="en-IN" sz="1500" dirty="0">
+              <a:solidFill>
+                <a:srgbClr val="3D2C1F">
+                  <a:alpha val="92000"/>
+                </a:srgbClr>
+              </a:solidFill>
+              <a:latin typeface="Myanmar Text" panose="020B0502040204020203" pitchFamily="34" charset="0"/>
+              <a:cs typeface="Myanmar Text" panose="020B0502040204020203" pitchFamily="34" charset="0"/>
+            </a:endParaRPr>
+          </a:p>
+          <a:p>
+            <a:pPr marL="342900" indent="-342900">
+              <a:buFont typeface="+mj-lt"/>
+              <a:buAutoNum type="arabicPeriod"/>
+            </a:pPr>
+            <a:r>
+              <a:rPr lang="en-IN" sz="1500" dirty="0">
+                <a:solidFill>
+                  <a:srgbClr val="3D2C1F">
+                    <a:alpha val="92000"/>
+                  </a:srgbClr>
+                </a:solidFill>
+                <a:latin typeface="Myanmar Text" panose="020B0502040204020203" pitchFamily="34" charset="0"/>
+                <a:cs typeface="Myanmar Text" panose="020B0502040204020203" pitchFamily="34" charset="0"/>
+                <a:hlinkClick r:id="rId10" action="ppaction://hlinksldjump">
+                  <a:extLst>
+                    <a:ext uri="{A12FA001-AC4F-418D-AE19-62706E023703}">
+                      <ahyp:hlinkClr xmlns:ahyp="http://schemas.microsoft.com/office/drawing/2018/hyperlinkcolor" val="tx"/>
+                    </a:ext>
+                  </a:extLst>
+                </a:hlinkClick>
+              </a:rPr>
+              <a:t>Thank You</a:t>
+            </a:r>
+            <a:endParaRPr lang="en-IN" sz="1500" dirty="0">
+              <a:solidFill>
+                <a:srgbClr val="3D2C1F">
+                  <a:alpha val="92000"/>
+                </a:srgbClr>
+              </a:solidFill>
+              <a:latin typeface="Myanmar Text" panose="020B0502040204020203" pitchFamily="34" charset="0"/>
+              <a:cs typeface="Myanmar Text" panose="020B0502040204020203" pitchFamily="34" charset="0"/>
+            </a:endParaRPr>
+          </a:p>
+          <a:p>
+            <a:pPr marL="342900" indent="-342900">
+              <a:buFont typeface="+mj-lt"/>
+              <a:buAutoNum type="arabicPeriod"/>
+            </a:pPr>
+            <a:endParaRPr lang="en-IN" sz="1500" dirty="0">
+              <a:solidFill>
+                <a:srgbClr val="3D2C1F">
+                  <a:alpha val="92000"/>
+                </a:srgbClr>
+              </a:solidFill>
+              <a:latin typeface="Myanmar Text" panose="020B0502040204020203" pitchFamily="34" charset="0"/>
+              <a:cs typeface="Myanmar Text" panose="020B0502040204020203" pitchFamily="34" charset="0"/>
+            </a:endParaRPr>
+          </a:p>
+          <a:p>
+            <a:pPr marL="342900" indent="-342900">
+              <a:buFont typeface="+mj-lt"/>
+              <a:buAutoNum type="arabicPeriod"/>
+            </a:pPr>
+            <a:endParaRPr lang="en-IN" sz="1500" dirty="0">
+              <a:solidFill>
+                <a:srgbClr val="3D2C1F">
+                  <a:alpha val="92000"/>
+                </a:srgbClr>
+              </a:solidFill>
+              <a:latin typeface="Myanmar Text" panose="020B0502040204020203" pitchFamily="34" charset="0"/>
+              <a:cs typeface="Myanmar Text" panose="020B0502040204020203" pitchFamily="34" charset="0"/>
+            </a:endParaRPr>
           </a:p>
         </p:txBody>
       </p:sp>
@@ -4763,7 +13546,7 @@
       <p:sp>
         <p:nvSpPr>
           <p:cNvPr id="21" name="Rectangle 20">
-            <a:hlinkClick r:id="rId3"/>
+            <a:hlinkClick r:id="rId12"/>
             <a:extLst>
               <a:ext uri="{FF2B5EF4-FFF2-40B4-BE49-F238E27FC236}">
                 <a16:creationId xmlns:a16="http://schemas.microsoft.com/office/drawing/2014/main" id="{1A568B80-B418-F0D1-081B-0C982FEDF3F6}"/>
@@ -4833,7 +13616,7 @@
                 <a:latin typeface="Aptos" panose="020B0004020202020204" pitchFamily="34" charset="0"/>
                 <a:ea typeface="Cambria Math" panose="02040503050406030204" pitchFamily="18" charset="0"/>
               </a:rPr>
-              <a:t>Live Demo </a:t>
+              <a:t>Execution Video </a:t>
             </a:r>
             <a:r>
               <a:rPr lang="en-IN" b="1" dirty="0">
@@ -4843,7 +13626,7 @@
                 <a:latin typeface="Cambria Math" panose="02040503050406030204" pitchFamily="18" charset="0"/>
                 <a:ea typeface="Cambria Math" panose="02040503050406030204" pitchFamily="18" charset="0"/>
               </a:rPr>
-              <a:t>: https://weeding-chapter.vercel.app</a:t>
+              <a:t>: Video-link</a:t>
             </a:r>
           </a:p>
         </p:txBody>
@@ -4851,7 +13634,7 @@
       <p:sp>
         <p:nvSpPr>
           <p:cNvPr id="23" name="Rectangle 22">
-            <a:hlinkClick r:id="rId12"/>
+            <a:hlinkClick r:id="rId13"/>
             <a:extLst>
               <a:ext uri="{FF2B5EF4-FFF2-40B4-BE49-F238E27FC236}">
                 <a16:creationId xmlns:a16="http://schemas.microsoft.com/office/drawing/2014/main" id="{B41CF31D-11B5-8A8E-9987-08652DA74E1E}"/>
@@ -4914,7 +13697,7 @@
           <p:nvPr/>
         </p:nvPicPr>
         <p:blipFill>
-          <a:blip r:embed="rId13"/>
+          <a:blip r:embed="rId14"/>
           <a:stretch>
             <a:fillRect/>
           </a:stretch>
@@ -4932,7 +13715,7 @@
       <p:sp>
         <p:nvSpPr>
           <p:cNvPr id="26" name="Rectangle 25">
-            <a:hlinkClick r:id="rId14"/>
+            <a:hlinkClick r:id="rId15"/>
             <a:extLst>
               <a:ext uri="{FF2B5EF4-FFF2-40B4-BE49-F238E27FC236}">
                 <a16:creationId xmlns:a16="http://schemas.microsoft.com/office/drawing/2014/main" id="{C4DC9C7A-9CA1-7802-1C42-0F9EDE2672F3}"/>
@@ -5075,6 +13858,281 @@
           </a:prstGeom>
         </p:spPr>
       </p:pic>
+      <p:sp>
+        <p:nvSpPr>
+          <p:cNvPr id="4" name="Rectangle 3">
+            <a:extLst>
+              <a:ext uri="{FF2B5EF4-FFF2-40B4-BE49-F238E27FC236}">
+                <a16:creationId xmlns:a16="http://schemas.microsoft.com/office/drawing/2014/main" id="{65D7D5A3-5D80-69C9-ABB3-CB35E623D009}"/>
+              </a:ext>
+            </a:extLst>
+          </p:cNvPr>
+          <p:cNvSpPr/>
+          <p:nvPr/>
+        </p:nvSpPr>
+        <p:spPr>
+          <a:xfrm>
+            <a:off x="8042785" y="712839"/>
+            <a:ext cx="3490452" cy="599768"/>
+          </a:xfrm>
+          <a:prstGeom prst="rect">
+            <a:avLst/>
+          </a:prstGeom>
+          <a:noFill/>
+          <a:ln>
+            <a:noFill/>
+          </a:ln>
+        </p:spPr>
+        <p:style>
+          <a:lnRef idx="1">
+            <a:schemeClr val="accent1"/>
+          </a:lnRef>
+          <a:fillRef idx="3">
+            <a:schemeClr val="accent1"/>
+          </a:fillRef>
+          <a:effectRef idx="2">
+            <a:schemeClr val="accent1"/>
+          </a:effectRef>
+          <a:fontRef idx="minor">
+            <a:schemeClr val="lt1"/>
+          </a:fontRef>
+        </p:style>
+        <p:txBody>
+          <a:bodyPr rtlCol="0" anchor="ctr"/>
+          <a:lstStyle/>
+          <a:p>
+            <a:pPr algn="ctr"/>
+            <a:r>
+              <a:rPr lang="en-IN" sz="1600" dirty="0">
+                <a:solidFill>
+                  <a:schemeClr val="tx1"/>
+                </a:solidFill>
+              </a:rPr>
+              <a:t>Debmalya Bhattacharya</a:t>
+            </a:r>
+          </a:p>
+        </p:txBody>
+      </p:sp>
+      <p:sp>
+        <p:nvSpPr>
+          <p:cNvPr id="5" name="Rectangle 4">
+            <a:extLst>
+              <a:ext uri="{FF2B5EF4-FFF2-40B4-BE49-F238E27FC236}">
+                <a16:creationId xmlns:a16="http://schemas.microsoft.com/office/drawing/2014/main" id="{F71CAAF9-2E3E-E734-DCDF-573DCA0A6FF2}"/>
+              </a:ext>
+            </a:extLst>
+          </p:cNvPr>
+          <p:cNvSpPr/>
+          <p:nvPr/>
+        </p:nvSpPr>
+        <p:spPr>
+          <a:xfrm>
+            <a:off x="4281947" y="712839"/>
+            <a:ext cx="3490452" cy="599768"/>
+          </a:xfrm>
+          <a:prstGeom prst="rect">
+            <a:avLst/>
+          </a:prstGeom>
+          <a:noFill/>
+          <a:ln>
+            <a:noFill/>
+          </a:ln>
+        </p:spPr>
+        <p:style>
+          <a:lnRef idx="1">
+            <a:schemeClr val="accent1"/>
+          </a:lnRef>
+          <a:fillRef idx="3">
+            <a:schemeClr val="accent1"/>
+          </a:fillRef>
+          <a:effectRef idx="2">
+            <a:schemeClr val="accent1"/>
+          </a:effectRef>
+          <a:fontRef idx="minor">
+            <a:schemeClr val="lt1"/>
+          </a:fontRef>
+        </p:style>
+        <p:txBody>
+          <a:bodyPr rtlCol="0" anchor="ctr"/>
+          <a:lstStyle/>
+          <a:p>
+            <a:pPr algn="ctr"/>
+            <a:r>
+              <a:rPr lang="en-IN" sz="1600" dirty="0">
+                <a:solidFill>
+                  <a:schemeClr val="tx1"/>
+                </a:solidFill>
+              </a:rPr>
+              <a:t>Sagnik Saha</a:t>
+            </a:r>
+          </a:p>
+        </p:txBody>
+      </p:sp>
+      <p:sp>
+        <p:nvSpPr>
+          <p:cNvPr id="7" name="Rectangle 6">
+            <a:extLst>
+              <a:ext uri="{FF2B5EF4-FFF2-40B4-BE49-F238E27FC236}">
+                <a16:creationId xmlns:a16="http://schemas.microsoft.com/office/drawing/2014/main" id="{027E4F90-8E94-B04A-A4D3-C1370F5E7624}"/>
+              </a:ext>
+            </a:extLst>
+          </p:cNvPr>
+          <p:cNvSpPr/>
+          <p:nvPr/>
+        </p:nvSpPr>
+        <p:spPr>
+          <a:xfrm>
+            <a:off x="6794089" y="3837037"/>
+            <a:ext cx="3490452" cy="599768"/>
+          </a:xfrm>
+          <a:prstGeom prst="rect">
+            <a:avLst/>
+          </a:prstGeom>
+          <a:noFill/>
+          <a:ln>
+            <a:noFill/>
+          </a:ln>
+        </p:spPr>
+        <p:style>
+          <a:lnRef idx="1">
+            <a:schemeClr val="accent1"/>
+          </a:lnRef>
+          <a:fillRef idx="3">
+            <a:schemeClr val="accent1"/>
+          </a:fillRef>
+          <a:effectRef idx="2">
+            <a:schemeClr val="accent1"/>
+          </a:effectRef>
+          <a:fontRef idx="minor">
+            <a:schemeClr val="lt1"/>
+          </a:fontRef>
+        </p:style>
+        <p:txBody>
+          <a:bodyPr rtlCol="0" anchor="ctr"/>
+          <a:lstStyle/>
+          <a:p>
+            <a:pPr algn="ctr"/>
+            <a:r>
+              <a:rPr lang="en-IN" sz="1600" dirty="0">
+                <a:solidFill>
+                  <a:schemeClr val="tx1"/>
+                </a:solidFill>
+              </a:rPr>
+              <a:t>- Rumpi Saha</a:t>
+            </a:r>
+          </a:p>
+        </p:txBody>
+      </p:sp>
+      <p:sp>
+        <p:nvSpPr>
+          <p:cNvPr id="8" name="Rectangle 7">
+            <a:extLst>
+              <a:ext uri="{FF2B5EF4-FFF2-40B4-BE49-F238E27FC236}">
+                <a16:creationId xmlns:a16="http://schemas.microsoft.com/office/drawing/2014/main" id="{93435E32-C1CC-A490-3E39-AFDB6361E596}"/>
+              </a:ext>
+            </a:extLst>
+          </p:cNvPr>
+          <p:cNvSpPr/>
+          <p:nvPr/>
+        </p:nvSpPr>
+        <p:spPr>
+          <a:xfrm>
+            <a:off x="3121740" y="3834579"/>
+            <a:ext cx="3490452" cy="599768"/>
+          </a:xfrm>
+          <a:prstGeom prst="rect">
+            <a:avLst/>
+          </a:prstGeom>
+          <a:noFill/>
+          <a:ln>
+            <a:noFill/>
+          </a:ln>
+        </p:spPr>
+        <p:style>
+          <a:lnRef idx="1">
+            <a:schemeClr val="accent1"/>
+          </a:lnRef>
+          <a:fillRef idx="3">
+            <a:schemeClr val="accent1"/>
+          </a:fillRef>
+          <a:effectRef idx="2">
+            <a:schemeClr val="accent1"/>
+          </a:effectRef>
+          <a:fontRef idx="minor">
+            <a:schemeClr val="lt1"/>
+          </a:fontRef>
+        </p:style>
+        <p:txBody>
+          <a:bodyPr rtlCol="0" anchor="ctr"/>
+          <a:lstStyle/>
+          <a:p>
+            <a:pPr algn="ctr"/>
+            <a:r>
+              <a:rPr lang="en-IN" sz="1600" dirty="0">
+                <a:solidFill>
+                  <a:schemeClr val="tx1"/>
+                </a:solidFill>
+              </a:rPr>
+              <a:t>- Rumpi Saha</a:t>
+            </a:r>
+          </a:p>
+        </p:txBody>
+      </p:sp>
+      <p:sp>
+        <p:nvSpPr>
+          <p:cNvPr id="9" name="Rectangle 8">
+            <a:extLst>
+              <a:ext uri="{FF2B5EF4-FFF2-40B4-BE49-F238E27FC236}">
+                <a16:creationId xmlns:a16="http://schemas.microsoft.com/office/drawing/2014/main" id="{80D39903-B141-70E6-E5C2-3E2CEF18BB37}"/>
+              </a:ext>
+            </a:extLst>
+          </p:cNvPr>
+          <p:cNvSpPr/>
+          <p:nvPr/>
+        </p:nvSpPr>
+        <p:spPr>
+          <a:xfrm>
+            <a:off x="658763" y="712839"/>
+            <a:ext cx="3352798" cy="599768"/>
+          </a:xfrm>
+          <a:prstGeom prst="rect">
+            <a:avLst/>
+          </a:prstGeom>
+          <a:noFill/>
+          <a:ln>
+            <a:noFill/>
+          </a:ln>
+        </p:spPr>
+        <p:style>
+          <a:lnRef idx="1">
+            <a:schemeClr val="accent1"/>
+          </a:lnRef>
+          <a:fillRef idx="3">
+            <a:schemeClr val="accent1"/>
+          </a:fillRef>
+          <a:effectRef idx="2">
+            <a:schemeClr val="accent1"/>
+          </a:effectRef>
+          <a:fontRef idx="minor">
+            <a:schemeClr val="lt1"/>
+          </a:fontRef>
+        </p:style>
+        <p:txBody>
+          <a:bodyPr rtlCol="0" anchor="ctr"/>
+          <a:lstStyle/>
+          <a:p>
+            <a:pPr algn="ctr"/>
+            <a:r>
+              <a:rPr lang="en-IN" sz="1600" dirty="0">
+                <a:solidFill>
+                  <a:schemeClr val="tx1"/>
+                </a:solidFill>
+              </a:rPr>
+              <a:t>Debmalya Bhattacharya</a:t>
+            </a:r>
+          </a:p>
+        </p:txBody>
+      </p:sp>
     </p:spTree>
   </p:cSld>
   <p:clrMapOvr>
